--- a/AWS/aws-autoscaling.pptx
+++ b/AWS/aws-autoscaling.pptx
@@ -4,23 +4,39 @@
   <p:sldMasterIdLst>
     <p:sldMasterId id="2147483660" r:id="rId1"/>
   </p:sldMasterIdLst>
+  <p:notesMasterIdLst>
+    <p:notesMasterId r:id="rId31"/>
+  </p:notesMasterIdLst>
   <p:sldIdLst>
-    <p:sldId id="256" r:id="rId2"/>
-    <p:sldId id="341" r:id="rId3"/>
-    <p:sldId id="342" r:id="rId4"/>
-    <p:sldId id="343" r:id="rId5"/>
-    <p:sldId id="344" r:id="rId6"/>
-    <p:sldId id="345" r:id="rId7"/>
-    <p:sldId id="368" r:id="rId8"/>
-    <p:sldId id="369" r:id="rId9"/>
-    <p:sldId id="370" r:id="rId10"/>
-    <p:sldId id="371" r:id="rId11"/>
-    <p:sldId id="372" r:id="rId12"/>
-    <p:sldId id="373" r:id="rId13"/>
-    <p:sldId id="374" r:id="rId14"/>
-    <p:sldId id="375" r:id="rId15"/>
-    <p:sldId id="376" r:id="rId16"/>
-    <p:sldId id="377" r:id="rId17"/>
+    <p:sldId id="341" r:id="rId2"/>
+    <p:sldId id="342" r:id="rId3"/>
+    <p:sldId id="343" r:id="rId4"/>
+    <p:sldId id="344" r:id="rId5"/>
+    <p:sldId id="345" r:id="rId6"/>
+    <p:sldId id="368" r:id="rId7"/>
+    <p:sldId id="369" r:id="rId8"/>
+    <p:sldId id="370" r:id="rId9"/>
+    <p:sldId id="371" r:id="rId10"/>
+    <p:sldId id="372" r:id="rId11"/>
+    <p:sldId id="373" r:id="rId12"/>
+    <p:sldId id="374" r:id="rId13"/>
+    <p:sldId id="375" r:id="rId14"/>
+    <p:sldId id="376" r:id="rId15"/>
+    <p:sldId id="377" r:id="rId16"/>
+    <p:sldId id="378" r:id="rId17"/>
+    <p:sldId id="379" r:id="rId18"/>
+    <p:sldId id="380" r:id="rId19"/>
+    <p:sldId id="381" r:id="rId20"/>
+    <p:sldId id="382" r:id="rId21"/>
+    <p:sldId id="383" r:id="rId22"/>
+    <p:sldId id="384" r:id="rId23"/>
+    <p:sldId id="385" r:id="rId24"/>
+    <p:sldId id="386" r:id="rId25"/>
+    <p:sldId id="387" r:id="rId26"/>
+    <p:sldId id="388" r:id="rId27"/>
+    <p:sldId id="389" r:id="rId28"/>
+    <p:sldId id="390" r:id="rId29"/>
+    <p:sldId id="391" r:id="rId30"/>
   </p:sldIdLst>
   <p:sldSz cx="12192000" cy="6858000"/>
   <p:notesSz cx="6858000" cy="9144000"/>
@@ -119,7 +135,874 @@
       </a:defRPr>
     </a:lvl9pPr>
   </p:defaultTextStyle>
+  <p:extLst>
+    <p:ext uri="{EFAFB233-063F-42B5-8137-9DF3F51BA10A}">
+      <p15:sldGuideLst xmlns:p15="http://schemas.microsoft.com/office/powerpoint/2012/main"/>
+    </p:ext>
+  </p:extLst>
 </p:presentation>
+</file>
+
+<file path=ppt/notesMasters/notesMaster1.xml><?xml version="1.0" encoding="utf-8"?>
+<p:notesMaster xmlns:a="http://schemas.openxmlformats.org/drawingml/2006/main" xmlns:r="http://schemas.openxmlformats.org/officeDocument/2006/relationships" xmlns:p="http://schemas.openxmlformats.org/presentationml/2006/main">
+  <p:cSld>
+    <p:bg>
+      <p:bgRef idx="1001">
+        <a:schemeClr val="bg1"/>
+      </p:bgRef>
+    </p:bg>
+    <p:spTree>
+      <p:nvGrpSpPr>
+        <p:cNvPr id="1" name=""/>
+        <p:cNvGrpSpPr/>
+        <p:nvPr/>
+      </p:nvGrpSpPr>
+      <p:grpSpPr>
+        <a:xfrm>
+          <a:off x="0" y="0"/>
+          <a:ext cx="0" cy="0"/>
+          <a:chOff x="0" y="0"/>
+          <a:chExt cx="0" cy="0"/>
+        </a:xfrm>
+      </p:grpSpPr>
+      <p:sp>
+        <p:nvSpPr>
+          <p:cNvPr id="2" name="Header Placeholder 1"/>
+          <p:cNvSpPr>
+            <a:spLocks noGrp="1"/>
+          </p:cNvSpPr>
+          <p:nvPr>
+            <p:ph type="hdr" sz="quarter"/>
+          </p:nvPr>
+        </p:nvSpPr>
+        <p:spPr>
+          <a:xfrm>
+            <a:off x="0" y="0"/>
+            <a:ext cx="2971800" cy="458788"/>
+          </a:xfrm>
+          <a:prstGeom prst="rect">
+            <a:avLst/>
+          </a:prstGeom>
+        </p:spPr>
+        <p:txBody>
+          <a:bodyPr vert="horz" lIns="91440" tIns="45720" rIns="91440" bIns="45720" rtlCol="0"/>
+          <a:lstStyle>
+            <a:lvl1pPr algn="l">
+              <a:defRPr sz="1200"/>
+            </a:lvl1pPr>
+          </a:lstStyle>
+          <a:p>
+            <a:endParaRPr lang="en-IN"/>
+          </a:p>
+        </p:txBody>
+      </p:sp>
+      <p:sp>
+        <p:nvSpPr>
+          <p:cNvPr id="3" name="Date Placeholder 2"/>
+          <p:cNvSpPr>
+            <a:spLocks noGrp="1"/>
+          </p:cNvSpPr>
+          <p:nvPr>
+            <p:ph type="dt" idx="1"/>
+          </p:nvPr>
+        </p:nvSpPr>
+        <p:spPr>
+          <a:xfrm>
+            <a:off x="3884613" y="0"/>
+            <a:ext cx="2971800" cy="458788"/>
+          </a:xfrm>
+          <a:prstGeom prst="rect">
+            <a:avLst/>
+          </a:prstGeom>
+        </p:spPr>
+        <p:txBody>
+          <a:bodyPr vert="horz" lIns="91440" tIns="45720" rIns="91440" bIns="45720" rtlCol="0"/>
+          <a:lstStyle>
+            <a:lvl1pPr algn="r">
+              <a:defRPr sz="1200"/>
+            </a:lvl1pPr>
+          </a:lstStyle>
+          <a:p>
+            <a:fld id="{2C9F40F0-ECCA-441F-BA10-BAC82A9DAF4D}" type="datetimeFigureOut">
+              <a:rPr lang="en-IN" smtClean="0"/>
+              <a:t>08-05-2021</a:t>
+            </a:fld>
+            <a:endParaRPr lang="en-IN"/>
+          </a:p>
+        </p:txBody>
+      </p:sp>
+      <p:sp>
+        <p:nvSpPr>
+          <p:cNvPr id="4" name="Slide Image Placeholder 3"/>
+          <p:cNvSpPr>
+            <a:spLocks noGrp="1" noRot="1" noChangeAspect="1"/>
+          </p:cNvSpPr>
+          <p:nvPr>
+            <p:ph type="sldImg" idx="2"/>
+          </p:nvPr>
+        </p:nvSpPr>
+        <p:spPr>
+          <a:xfrm>
+            <a:off x="685800" y="1143000"/>
+            <a:ext cx="5486400" cy="3086100"/>
+          </a:xfrm>
+          <a:prstGeom prst="rect">
+            <a:avLst/>
+          </a:prstGeom>
+          <a:noFill/>
+          <a:ln w="12700">
+            <a:solidFill>
+              <a:prstClr val="black"/>
+            </a:solidFill>
+          </a:ln>
+        </p:spPr>
+        <p:txBody>
+          <a:bodyPr vert="horz" lIns="91440" tIns="45720" rIns="91440" bIns="45720" rtlCol="0" anchor="ctr"/>
+          <a:lstStyle/>
+          <a:p>
+            <a:endParaRPr lang="en-IN"/>
+          </a:p>
+        </p:txBody>
+      </p:sp>
+      <p:sp>
+        <p:nvSpPr>
+          <p:cNvPr id="5" name="Notes Placeholder 4"/>
+          <p:cNvSpPr>
+            <a:spLocks noGrp="1"/>
+          </p:cNvSpPr>
+          <p:nvPr>
+            <p:ph type="body" sz="quarter" idx="3"/>
+          </p:nvPr>
+        </p:nvSpPr>
+        <p:spPr>
+          <a:xfrm>
+            <a:off x="685800" y="4400550"/>
+            <a:ext cx="5486400" cy="3600450"/>
+          </a:xfrm>
+          <a:prstGeom prst="rect">
+            <a:avLst/>
+          </a:prstGeom>
+        </p:spPr>
+        <p:txBody>
+          <a:bodyPr vert="horz" lIns="91440" tIns="45720" rIns="91440" bIns="45720" rtlCol="0"/>
+          <a:lstStyle/>
+          <a:p>
+            <a:pPr lvl="0"/>
+            <a:r>
+              <a:rPr lang="en-US"/>
+              <a:t>Click to edit Master text styles</a:t>
+            </a:r>
+          </a:p>
+          <a:p>
+            <a:pPr lvl="1"/>
+            <a:r>
+              <a:rPr lang="en-US"/>
+              <a:t>Second level</a:t>
+            </a:r>
+          </a:p>
+          <a:p>
+            <a:pPr lvl="2"/>
+            <a:r>
+              <a:rPr lang="en-US"/>
+              <a:t>Third level</a:t>
+            </a:r>
+          </a:p>
+          <a:p>
+            <a:pPr lvl="3"/>
+            <a:r>
+              <a:rPr lang="en-US"/>
+              <a:t>Fourth level</a:t>
+            </a:r>
+          </a:p>
+          <a:p>
+            <a:pPr lvl="4"/>
+            <a:r>
+              <a:rPr lang="en-US"/>
+              <a:t>Fifth level</a:t>
+            </a:r>
+            <a:endParaRPr lang="en-IN"/>
+          </a:p>
+        </p:txBody>
+      </p:sp>
+      <p:sp>
+        <p:nvSpPr>
+          <p:cNvPr id="6" name="Footer Placeholder 5"/>
+          <p:cNvSpPr>
+            <a:spLocks noGrp="1"/>
+          </p:cNvSpPr>
+          <p:nvPr>
+            <p:ph type="ftr" sz="quarter" idx="4"/>
+          </p:nvPr>
+        </p:nvSpPr>
+        <p:spPr>
+          <a:xfrm>
+            <a:off x="0" y="8685213"/>
+            <a:ext cx="2971800" cy="458787"/>
+          </a:xfrm>
+          <a:prstGeom prst="rect">
+            <a:avLst/>
+          </a:prstGeom>
+        </p:spPr>
+        <p:txBody>
+          <a:bodyPr vert="horz" lIns="91440" tIns="45720" rIns="91440" bIns="45720" rtlCol="0" anchor="b"/>
+          <a:lstStyle>
+            <a:lvl1pPr algn="l">
+              <a:defRPr sz="1200"/>
+            </a:lvl1pPr>
+          </a:lstStyle>
+          <a:p>
+            <a:endParaRPr lang="en-IN"/>
+          </a:p>
+        </p:txBody>
+      </p:sp>
+      <p:sp>
+        <p:nvSpPr>
+          <p:cNvPr id="7" name="Slide Number Placeholder 6"/>
+          <p:cNvSpPr>
+            <a:spLocks noGrp="1"/>
+          </p:cNvSpPr>
+          <p:nvPr>
+            <p:ph type="sldNum" sz="quarter" idx="5"/>
+          </p:nvPr>
+        </p:nvSpPr>
+        <p:spPr>
+          <a:xfrm>
+            <a:off x="3884613" y="8685213"/>
+            <a:ext cx="2971800" cy="458787"/>
+          </a:xfrm>
+          <a:prstGeom prst="rect">
+            <a:avLst/>
+          </a:prstGeom>
+        </p:spPr>
+        <p:txBody>
+          <a:bodyPr vert="horz" lIns="91440" tIns="45720" rIns="91440" bIns="45720" rtlCol="0" anchor="b"/>
+          <a:lstStyle>
+            <a:lvl1pPr algn="r">
+              <a:defRPr sz="1200"/>
+            </a:lvl1pPr>
+          </a:lstStyle>
+          <a:p>
+            <a:fld id="{39A69C21-17BE-4261-9969-AB5EA457C0D5}" type="slidenum">
+              <a:rPr lang="en-IN" smtClean="0"/>
+              <a:t>‹#›</a:t>
+            </a:fld>
+            <a:endParaRPr lang="en-IN"/>
+          </a:p>
+        </p:txBody>
+      </p:sp>
+    </p:spTree>
+    <p:extLst>
+      <p:ext uri="{BB962C8B-B14F-4D97-AF65-F5344CB8AC3E}">
+        <p14:creationId xmlns:p14="http://schemas.microsoft.com/office/powerpoint/2010/main" val="1189922225"/>
+      </p:ext>
+    </p:extLst>
+  </p:cSld>
+  <p:clrMap bg1="lt1" tx1="dk1" bg2="lt2" tx2="dk2" accent1="accent1" accent2="accent2" accent3="accent3" accent4="accent4" accent5="accent5" accent6="accent6" hlink="hlink" folHlink="folHlink"/>
+  <p:notesStyle>
+    <a:lvl1pPr marL="0" algn="l" defTabSz="914400" rtl="0" eaLnBrk="1" latinLnBrk="0" hangingPunct="1">
+      <a:defRPr sz="1200" kern="1200">
+        <a:solidFill>
+          <a:schemeClr val="tx1"/>
+        </a:solidFill>
+        <a:latin typeface="+mn-lt"/>
+        <a:ea typeface="+mn-ea"/>
+        <a:cs typeface="+mn-cs"/>
+      </a:defRPr>
+    </a:lvl1pPr>
+    <a:lvl2pPr marL="457200" algn="l" defTabSz="914400" rtl="0" eaLnBrk="1" latinLnBrk="0" hangingPunct="1">
+      <a:defRPr sz="1200" kern="1200">
+        <a:solidFill>
+          <a:schemeClr val="tx1"/>
+        </a:solidFill>
+        <a:latin typeface="+mn-lt"/>
+        <a:ea typeface="+mn-ea"/>
+        <a:cs typeface="+mn-cs"/>
+      </a:defRPr>
+    </a:lvl2pPr>
+    <a:lvl3pPr marL="914400" algn="l" defTabSz="914400" rtl="0" eaLnBrk="1" latinLnBrk="0" hangingPunct="1">
+      <a:defRPr sz="1200" kern="1200">
+        <a:solidFill>
+          <a:schemeClr val="tx1"/>
+        </a:solidFill>
+        <a:latin typeface="+mn-lt"/>
+        <a:ea typeface="+mn-ea"/>
+        <a:cs typeface="+mn-cs"/>
+      </a:defRPr>
+    </a:lvl3pPr>
+    <a:lvl4pPr marL="1371600" algn="l" defTabSz="914400" rtl="0" eaLnBrk="1" latinLnBrk="0" hangingPunct="1">
+      <a:defRPr sz="1200" kern="1200">
+        <a:solidFill>
+          <a:schemeClr val="tx1"/>
+        </a:solidFill>
+        <a:latin typeface="+mn-lt"/>
+        <a:ea typeface="+mn-ea"/>
+        <a:cs typeface="+mn-cs"/>
+      </a:defRPr>
+    </a:lvl4pPr>
+    <a:lvl5pPr marL="1828800" algn="l" defTabSz="914400" rtl="0" eaLnBrk="1" latinLnBrk="0" hangingPunct="1">
+      <a:defRPr sz="1200" kern="1200">
+        <a:solidFill>
+          <a:schemeClr val="tx1"/>
+        </a:solidFill>
+        <a:latin typeface="+mn-lt"/>
+        <a:ea typeface="+mn-ea"/>
+        <a:cs typeface="+mn-cs"/>
+      </a:defRPr>
+    </a:lvl5pPr>
+    <a:lvl6pPr marL="2286000" algn="l" defTabSz="914400" rtl="0" eaLnBrk="1" latinLnBrk="0" hangingPunct="1">
+      <a:defRPr sz="1200" kern="1200">
+        <a:solidFill>
+          <a:schemeClr val="tx1"/>
+        </a:solidFill>
+        <a:latin typeface="+mn-lt"/>
+        <a:ea typeface="+mn-ea"/>
+        <a:cs typeface="+mn-cs"/>
+      </a:defRPr>
+    </a:lvl6pPr>
+    <a:lvl7pPr marL="2743200" algn="l" defTabSz="914400" rtl="0" eaLnBrk="1" latinLnBrk="0" hangingPunct="1">
+      <a:defRPr sz="1200" kern="1200">
+        <a:solidFill>
+          <a:schemeClr val="tx1"/>
+        </a:solidFill>
+        <a:latin typeface="+mn-lt"/>
+        <a:ea typeface="+mn-ea"/>
+        <a:cs typeface="+mn-cs"/>
+      </a:defRPr>
+    </a:lvl7pPr>
+    <a:lvl8pPr marL="3200400" algn="l" defTabSz="914400" rtl="0" eaLnBrk="1" latinLnBrk="0" hangingPunct="1">
+      <a:defRPr sz="1200" kern="1200">
+        <a:solidFill>
+          <a:schemeClr val="tx1"/>
+        </a:solidFill>
+        <a:latin typeface="+mn-lt"/>
+        <a:ea typeface="+mn-ea"/>
+        <a:cs typeface="+mn-cs"/>
+      </a:defRPr>
+    </a:lvl8pPr>
+    <a:lvl9pPr marL="3657600" algn="l" defTabSz="914400" rtl="0" eaLnBrk="1" latinLnBrk="0" hangingPunct="1">
+      <a:defRPr sz="1200" kern="1200">
+        <a:solidFill>
+          <a:schemeClr val="tx1"/>
+        </a:solidFill>
+        <a:latin typeface="+mn-lt"/>
+        <a:ea typeface="+mn-ea"/>
+        <a:cs typeface="+mn-cs"/>
+      </a:defRPr>
+    </a:lvl9pPr>
+  </p:notesStyle>
+</p:notesMaster>
+</file>
+
+<file path=ppt/notesSlides/notesSlide1.xml><?xml version="1.0" encoding="utf-8"?>
+<p:notes xmlns:a="http://schemas.openxmlformats.org/drawingml/2006/main" xmlns:r="http://schemas.openxmlformats.org/officeDocument/2006/relationships" xmlns:p="http://schemas.openxmlformats.org/presentationml/2006/main">
+  <p:cSld>
+    <p:spTree>
+      <p:nvGrpSpPr>
+        <p:cNvPr id="1" name=""/>
+        <p:cNvGrpSpPr/>
+        <p:nvPr/>
+      </p:nvGrpSpPr>
+      <p:grpSpPr>
+        <a:xfrm>
+          <a:off x="0" y="0"/>
+          <a:ext cx="0" cy="0"/>
+          <a:chOff x="0" y="0"/>
+          <a:chExt cx="0" cy="0"/>
+        </a:xfrm>
+      </p:grpSpPr>
+      <p:sp>
+        <p:nvSpPr>
+          <p:cNvPr id="2" name="Slide Image Placeholder 1"/>
+          <p:cNvSpPr>
+            <a:spLocks noGrp="1" noRot="1" noChangeAspect="1"/>
+          </p:cNvSpPr>
+          <p:nvPr>
+            <p:ph type="sldImg"/>
+          </p:nvPr>
+        </p:nvSpPr>
+        <p:spPr/>
+      </p:sp>
+      <p:sp>
+        <p:nvSpPr>
+          <p:cNvPr id="3" name="Notes Placeholder 2"/>
+          <p:cNvSpPr>
+            <a:spLocks noGrp="1"/>
+          </p:cNvSpPr>
+          <p:nvPr>
+            <p:ph type="body" idx="1"/>
+          </p:nvPr>
+        </p:nvSpPr>
+        <p:spPr/>
+        <p:txBody>
+          <a:bodyPr/>
+          <a:lstStyle/>
+          <a:p>
+            <a:r>
+              <a:rPr lang="en-US" dirty="0"/>
+              <a:t>So that Auto Scaling group can create instance in all three subnets.</a:t>
+            </a:r>
+            <a:endParaRPr lang="en-IN" dirty="0"/>
+          </a:p>
+        </p:txBody>
+      </p:sp>
+      <p:sp>
+        <p:nvSpPr>
+          <p:cNvPr id="4" name="Slide Number Placeholder 3"/>
+          <p:cNvSpPr>
+            <a:spLocks noGrp="1"/>
+          </p:cNvSpPr>
+          <p:nvPr>
+            <p:ph type="sldNum" sz="quarter" idx="5"/>
+          </p:nvPr>
+        </p:nvSpPr>
+        <p:spPr/>
+        <p:txBody>
+          <a:bodyPr/>
+          <a:lstStyle/>
+          <a:p>
+            <a:fld id="{39A69C21-17BE-4261-9969-AB5EA457C0D5}" type="slidenum">
+              <a:rPr lang="en-IN" smtClean="0"/>
+              <a:t>24</a:t>
+            </a:fld>
+            <a:endParaRPr lang="en-IN"/>
+          </a:p>
+        </p:txBody>
+      </p:sp>
+    </p:spTree>
+    <p:extLst>
+      <p:ext uri="{BB962C8B-B14F-4D97-AF65-F5344CB8AC3E}">
+        <p14:creationId xmlns:p14="http://schemas.microsoft.com/office/powerpoint/2010/main" val="35752357"/>
+      </p:ext>
+    </p:extLst>
+  </p:cSld>
+  <p:clrMapOvr>
+    <a:masterClrMapping/>
+  </p:clrMapOvr>
+</p:notes>
+</file>
+
+<file path=ppt/notesSlides/notesSlide2.xml><?xml version="1.0" encoding="utf-8"?>
+<p:notes xmlns:a="http://schemas.openxmlformats.org/drawingml/2006/main" xmlns:r="http://schemas.openxmlformats.org/officeDocument/2006/relationships" xmlns:p="http://schemas.openxmlformats.org/presentationml/2006/main">
+  <p:cSld>
+    <p:spTree>
+      <p:nvGrpSpPr>
+        <p:cNvPr id="1" name=""/>
+        <p:cNvGrpSpPr/>
+        <p:nvPr/>
+      </p:nvGrpSpPr>
+      <p:grpSpPr>
+        <a:xfrm>
+          <a:off x="0" y="0"/>
+          <a:ext cx="0" cy="0"/>
+          <a:chOff x="0" y="0"/>
+          <a:chExt cx="0" cy="0"/>
+        </a:xfrm>
+      </p:grpSpPr>
+      <p:sp>
+        <p:nvSpPr>
+          <p:cNvPr id="2" name="Slide Image Placeholder 1"/>
+          <p:cNvSpPr>
+            <a:spLocks noGrp="1" noRot="1" noChangeAspect="1"/>
+          </p:cNvSpPr>
+          <p:nvPr>
+            <p:ph type="sldImg"/>
+          </p:nvPr>
+        </p:nvSpPr>
+        <p:spPr/>
+      </p:sp>
+      <p:sp>
+        <p:nvSpPr>
+          <p:cNvPr id="3" name="Notes Placeholder 2"/>
+          <p:cNvSpPr>
+            <a:spLocks noGrp="1"/>
+          </p:cNvSpPr>
+          <p:nvPr>
+            <p:ph type="body" idx="1"/>
+          </p:nvPr>
+        </p:nvSpPr>
+        <p:spPr/>
+        <p:txBody>
+          <a:bodyPr/>
+          <a:lstStyle/>
+          <a:p>
+            <a:endParaRPr lang="en-IN" dirty="0"/>
+          </a:p>
+        </p:txBody>
+      </p:sp>
+      <p:sp>
+        <p:nvSpPr>
+          <p:cNvPr id="4" name="Slide Number Placeholder 3"/>
+          <p:cNvSpPr>
+            <a:spLocks noGrp="1"/>
+          </p:cNvSpPr>
+          <p:nvPr>
+            <p:ph type="sldNum" sz="quarter" idx="5"/>
+          </p:nvPr>
+        </p:nvSpPr>
+        <p:spPr/>
+        <p:txBody>
+          <a:bodyPr/>
+          <a:lstStyle/>
+          <a:p>
+            <a:fld id="{39A69C21-17BE-4261-9969-AB5EA457C0D5}" type="slidenum">
+              <a:rPr lang="en-IN" smtClean="0"/>
+              <a:t>25</a:t>
+            </a:fld>
+            <a:endParaRPr lang="en-IN"/>
+          </a:p>
+        </p:txBody>
+      </p:sp>
+    </p:spTree>
+    <p:extLst>
+      <p:ext uri="{BB962C8B-B14F-4D97-AF65-F5344CB8AC3E}">
+        <p14:creationId xmlns:p14="http://schemas.microsoft.com/office/powerpoint/2010/main" val="2683543343"/>
+      </p:ext>
+    </p:extLst>
+  </p:cSld>
+  <p:clrMapOvr>
+    <a:masterClrMapping/>
+  </p:clrMapOvr>
+</p:notes>
+</file>
+
+<file path=ppt/notesSlides/notesSlide3.xml><?xml version="1.0" encoding="utf-8"?>
+<p:notes xmlns:a="http://schemas.openxmlformats.org/drawingml/2006/main" xmlns:r="http://schemas.openxmlformats.org/officeDocument/2006/relationships" xmlns:p="http://schemas.openxmlformats.org/presentationml/2006/main">
+  <p:cSld>
+    <p:spTree>
+      <p:nvGrpSpPr>
+        <p:cNvPr id="1" name=""/>
+        <p:cNvGrpSpPr/>
+        <p:nvPr/>
+      </p:nvGrpSpPr>
+      <p:grpSpPr>
+        <a:xfrm>
+          <a:off x="0" y="0"/>
+          <a:ext cx="0" cy="0"/>
+          <a:chOff x="0" y="0"/>
+          <a:chExt cx="0" cy="0"/>
+        </a:xfrm>
+      </p:grpSpPr>
+      <p:sp>
+        <p:nvSpPr>
+          <p:cNvPr id="2" name="Slide Image Placeholder 1"/>
+          <p:cNvSpPr>
+            <a:spLocks noGrp="1" noRot="1" noChangeAspect="1"/>
+          </p:cNvSpPr>
+          <p:nvPr>
+            <p:ph type="sldImg"/>
+          </p:nvPr>
+        </p:nvSpPr>
+        <p:spPr/>
+      </p:sp>
+      <p:sp>
+        <p:nvSpPr>
+          <p:cNvPr id="3" name="Notes Placeholder 2"/>
+          <p:cNvSpPr>
+            <a:spLocks noGrp="1"/>
+          </p:cNvSpPr>
+          <p:nvPr>
+            <p:ph type="body" idx="1"/>
+          </p:nvPr>
+        </p:nvSpPr>
+        <p:spPr/>
+        <p:txBody>
+          <a:bodyPr/>
+          <a:lstStyle/>
+          <a:p>
+            <a:endParaRPr lang="en-IN" dirty="0"/>
+          </a:p>
+        </p:txBody>
+      </p:sp>
+      <p:sp>
+        <p:nvSpPr>
+          <p:cNvPr id="4" name="Slide Number Placeholder 3"/>
+          <p:cNvSpPr>
+            <a:spLocks noGrp="1"/>
+          </p:cNvSpPr>
+          <p:nvPr>
+            <p:ph type="sldNum" sz="quarter" idx="5"/>
+          </p:nvPr>
+        </p:nvSpPr>
+        <p:spPr/>
+        <p:txBody>
+          <a:bodyPr/>
+          <a:lstStyle/>
+          <a:p>
+            <a:fld id="{39A69C21-17BE-4261-9969-AB5EA457C0D5}" type="slidenum">
+              <a:rPr lang="en-IN" smtClean="0"/>
+              <a:t>26</a:t>
+            </a:fld>
+            <a:endParaRPr lang="en-IN"/>
+          </a:p>
+        </p:txBody>
+      </p:sp>
+    </p:spTree>
+    <p:extLst>
+      <p:ext uri="{BB962C8B-B14F-4D97-AF65-F5344CB8AC3E}">
+        <p14:creationId xmlns:p14="http://schemas.microsoft.com/office/powerpoint/2010/main" val="260606757"/>
+      </p:ext>
+    </p:extLst>
+  </p:cSld>
+  <p:clrMapOvr>
+    <a:masterClrMapping/>
+  </p:clrMapOvr>
+</p:notes>
+</file>
+
+<file path=ppt/notesSlides/notesSlide4.xml><?xml version="1.0" encoding="utf-8"?>
+<p:notes xmlns:a="http://schemas.openxmlformats.org/drawingml/2006/main" xmlns:r="http://schemas.openxmlformats.org/officeDocument/2006/relationships" xmlns:p="http://schemas.openxmlformats.org/presentationml/2006/main">
+  <p:cSld>
+    <p:spTree>
+      <p:nvGrpSpPr>
+        <p:cNvPr id="1" name=""/>
+        <p:cNvGrpSpPr/>
+        <p:nvPr/>
+      </p:nvGrpSpPr>
+      <p:grpSpPr>
+        <a:xfrm>
+          <a:off x="0" y="0"/>
+          <a:ext cx="0" cy="0"/>
+          <a:chOff x="0" y="0"/>
+          <a:chExt cx="0" cy="0"/>
+        </a:xfrm>
+      </p:grpSpPr>
+      <p:sp>
+        <p:nvSpPr>
+          <p:cNvPr id="2" name="Slide Image Placeholder 1"/>
+          <p:cNvSpPr>
+            <a:spLocks noGrp="1" noRot="1" noChangeAspect="1"/>
+          </p:cNvSpPr>
+          <p:nvPr>
+            <p:ph type="sldImg"/>
+          </p:nvPr>
+        </p:nvSpPr>
+        <p:spPr/>
+      </p:sp>
+      <p:sp>
+        <p:nvSpPr>
+          <p:cNvPr id="3" name="Notes Placeholder 2"/>
+          <p:cNvSpPr>
+            <a:spLocks noGrp="1"/>
+          </p:cNvSpPr>
+          <p:nvPr>
+            <p:ph type="body" idx="1"/>
+          </p:nvPr>
+        </p:nvSpPr>
+        <p:spPr/>
+        <p:txBody>
+          <a:bodyPr/>
+          <a:lstStyle/>
+          <a:p>
+            <a:endParaRPr lang="en-IN" dirty="0"/>
+          </a:p>
+        </p:txBody>
+      </p:sp>
+      <p:sp>
+        <p:nvSpPr>
+          <p:cNvPr id="4" name="Slide Number Placeholder 3"/>
+          <p:cNvSpPr>
+            <a:spLocks noGrp="1"/>
+          </p:cNvSpPr>
+          <p:nvPr>
+            <p:ph type="sldNum" sz="quarter" idx="5"/>
+          </p:nvPr>
+        </p:nvSpPr>
+        <p:spPr/>
+        <p:txBody>
+          <a:bodyPr/>
+          <a:lstStyle/>
+          <a:p>
+            <a:fld id="{39A69C21-17BE-4261-9969-AB5EA457C0D5}" type="slidenum">
+              <a:rPr lang="en-IN" smtClean="0"/>
+              <a:t>27</a:t>
+            </a:fld>
+            <a:endParaRPr lang="en-IN"/>
+          </a:p>
+        </p:txBody>
+      </p:sp>
+    </p:spTree>
+    <p:extLst>
+      <p:ext uri="{BB962C8B-B14F-4D97-AF65-F5344CB8AC3E}">
+        <p14:creationId xmlns:p14="http://schemas.microsoft.com/office/powerpoint/2010/main" val="3768023433"/>
+      </p:ext>
+    </p:extLst>
+  </p:cSld>
+  <p:clrMapOvr>
+    <a:masterClrMapping/>
+  </p:clrMapOvr>
+</p:notes>
+</file>
+
+<file path=ppt/notesSlides/notesSlide5.xml><?xml version="1.0" encoding="utf-8"?>
+<p:notes xmlns:a="http://schemas.openxmlformats.org/drawingml/2006/main" xmlns:r="http://schemas.openxmlformats.org/officeDocument/2006/relationships" xmlns:p="http://schemas.openxmlformats.org/presentationml/2006/main">
+  <p:cSld>
+    <p:spTree>
+      <p:nvGrpSpPr>
+        <p:cNvPr id="1" name=""/>
+        <p:cNvGrpSpPr/>
+        <p:nvPr/>
+      </p:nvGrpSpPr>
+      <p:grpSpPr>
+        <a:xfrm>
+          <a:off x="0" y="0"/>
+          <a:ext cx="0" cy="0"/>
+          <a:chOff x="0" y="0"/>
+          <a:chExt cx="0" cy="0"/>
+        </a:xfrm>
+      </p:grpSpPr>
+      <p:sp>
+        <p:nvSpPr>
+          <p:cNvPr id="2" name="Slide Image Placeholder 1"/>
+          <p:cNvSpPr>
+            <a:spLocks noGrp="1" noRot="1" noChangeAspect="1"/>
+          </p:cNvSpPr>
+          <p:nvPr>
+            <p:ph type="sldImg"/>
+          </p:nvPr>
+        </p:nvSpPr>
+        <p:spPr/>
+      </p:sp>
+      <p:sp>
+        <p:nvSpPr>
+          <p:cNvPr id="3" name="Notes Placeholder 2"/>
+          <p:cNvSpPr>
+            <a:spLocks noGrp="1"/>
+          </p:cNvSpPr>
+          <p:nvPr>
+            <p:ph type="body" idx="1"/>
+          </p:nvPr>
+        </p:nvSpPr>
+        <p:spPr/>
+        <p:txBody>
+          <a:bodyPr/>
+          <a:lstStyle/>
+          <a:p>
+            <a:endParaRPr lang="en-IN" dirty="0"/>
+          </a:p>
+        </p:txBody>
+      </p:sp>
+      <p:sp>
+        <p:nvSpPr>
+          <p:cNvPr id="4" name="Slide Number Placeholder 3"/>
+          <p:cNvSpPr>
+            <a:spLocks noGrp="1"/>
+          </p:cNvSpPr>
+          <p:nvPr>
+            <p:ph type="sldNum" sz="quarter" idx="5"/>
+          </p:nvPr>
+        </p:nvSpPr>
+        <p:spPr/>
+        <p:txBody>
+          <a:bodyPr/>
+          <a:lstStyle/>
+          <a:p>
+            <a:fld id="{39A69C21-17BE-4261-9969-AB5EA457C0D5}" type="slidenum">
+              <a:rPr lang="en-IN" smtClean="0"/>
+              <a:t>28</a:t>
+            </a:fld>
+            <a:endParaRPr lang="en-IN"/>
+          </a:p>
+        </p:txBody>
+      </p:sp>
+    </p:spTree>
+    <p:extLst>
+      <p:ext uri="{BB962C8B-B14F-4D97-AF65-F5344CB8AC3E}">
+        <p14:creationId xmlns:p14="http://schemas.microsoft.com/office/powerpoint/2010/main" val="2836382528"/>
+      </p:ext>
+    </p:extLst>
+  </p:cSld>
+  <p:clrMapOvr>
+    <a:masterClrMapping/>
+  </p:clrMapOvr>
+</p:notes>
+</file>
+
+<file path=ppt/notesSlides/notesSlide6.xml><?xml version="1.0" encoding="utf-8"?>
+<p:notes xmlns:a="http://schemas.openxmlformats.org/drawingml/2006/main" xmlns:r="http://schemas.openxmlformats.org/officeDocument/2006/relationships" xmlns:p="http://schemas.openxmlformats.org/presentationml/2006/main">
+  <p:cSld>
+    <p:spTree>
+      <p:nvGrpSpPr>
+        <p:cNvPr id="1" name=""/>
+        <p:cNvGrpSpPr/>
+        <p:nvPr/>
+      </p:nvGrpSpPr>
+      <p:grpSpPr>
+        <a:xfrm>
+          <a:off x="0" y="0"/>
+          <a:ext cx="0" cy="0"/>
+          <a:chOff x="0" y="0"/>
+          <a:chExt cx="0" cy="0"/>
+        </a:xfrm>
+      </p:grpSpPr>
+      <p:sp>
+        <p:nvSpPr>
+          <p:cNvPr id="2" name="Slide Image Placeholder 1"/>
+          <p:cNvSpPr>
+            <a:spLocks noGrp="1" noRot="1" noChangeAspect="1"/>
+          </p:cNvSpPr>
+          <p:nvPr>
+            <p:ph type="sldImg"/>
+          </p:nvPr>
+        </p:nvSpPr>
+        <p:spPr/>
+      </p:sp>
+      <p:sp>
+        <p:nvSpPr>
+          <p:cNvPr id="3" name="Notes Placeholder 2"/>
+          <p:cNvSpPr>
+            <a:spLocks noGrp="1"/>
+          </p:cNvSpPr>
+          <p:nvPr>
+            <p:ph type="body" idx="1"/>
+          </p:nvPr>
+        </p:nvSpPr>
+        <p:spPr/>
+        <p:txBody>
+          <a:bodyPr/>
+          <a:lstStyle/>
+          <a:p>
+            <a:r>
+              <a:rPr lang="en-US" dirty="0"/>
+              <a:t>ASG will check if on target-group-1 requests are more than target value then it will scale out the EC2 instances in any three availability zone and register that EC2 with target group assigned while we attached a load balancer to it.</a:t>
+            </a:r>
+            <a:endParaRPr lang="en-IN" dirty="0"/>
+          </a:p>
+        </p:txBody>
+      </p:sp>
+      <p:sp>
+        <p:nvSpPr>
+          <p:cNvPr id="4" name="Slide Number Placeholder 3"/>
+          <p:cNvSpPr>
+            <a:spLocks noGrp="1"/>
+          </p:cNvSpPr>
+          <p:nvPr>
+            <p:ph type="sldNum" sz="quarter" idx="5"/>
+          </p:nvPr>
+        </p:nvSpPr>
+        <p:spPr/>
+        <p:txBody>
+          <a:bodyPr/>
+          <a:lstStyle/>
+          <a:p>
+            <a:fld id="{39A69C21-17BE-4261-9969-AB5EA457C0D5}" type="slidenum">
+              <a:rPr lang="en-IN" smtClean="0"/>
+              <a:t>29</a:t>
+            </a:fld>
+            <a:endParaRPr lang="en-IN"/>
+          </a:p>
+        </p:txBody>
+      </p:sp>
+    </p:spTree>
+    <p:extLst>
+      <p:ext uri="{BB962C8B-B14F-4D97-AF65-F5344CB8AC3E}">
+        <p14:creationId xmlns:p14="http://schemas.microsoft.com/office/powerpoint/2010/main" val="1643339796"/>
+      </p:ext>
+    </p:extLst>
+  </p:cSld>
+  <p:clrMapOvr>
+    <a:masterClrMapping/>
+  </p:clrMapOvr>
+</p:notes>
 </file>
 
 <file path=ppt/slideLayouts/slideLayout1.xml><?xml version="1.0" encoding="utf-8"?>
@@ -285,7 +1168,7 @@
           <a:p>
             <a:fld id="{A004BDE6-7414-45A4-9686-81E70042D974}" type="datetimeFigureOut">
               <a:rPr lang="en-IN" smtClean="0"/>
-              <a:t>07-05-2021</a:t>
+              <a:t>08-05-2021</a:t>
             </a:fld>
             <a:endParaRPr lang="en-IN"/>
           </a:p>
@@ -455,7 +1338,7 @@
           <a:p>
             <a:fld id="{A004BDE6-7414-45A4-9686-81E70042D974}" type="datetimeFigureOut">
               <a:rPr lang="en-IN" smtClean="0"/>
-              <a:t>07-05-2021</a:t>
+              <a:t>08-05-2021</a:t>
             </a:fld>
             <a:endParaRPr lang="en-IN"/>
           </a:p>
@@ -635,7 +1518,7 @@
           <a:p>
             <a:fld id="{A004BDE6-7414-45A4-9686-81E70042D974}" type="datetimeFigureOut">
               <a:rPr lang="en-IN" smtClean="0"/>
-              <a:t>07-05-2021</a:t>
+              <a:t>08-05-2021</a:t>
             </a:fld>
             <a:endParaRPr lang="en-IN"/>
           </a:p>
@@ -876,7 +1759,7 @@
           <a:p>
             <a:fld id="{1D8BD707-D9CF-40AE-B4C6-C98DA3205C09}" type="datetimeFigureOut">
               <a:rPr lang="en-US"/>
-              <a:t>5/7/2021</a:t>
+              <a:t>5/8/2021</a:t>
             </a:fld>
             <a:endParaRPr lang="en-US"/>
           </a:p>
@@ -1036,7 +1919,7 @@
           <a:p>
             <a:fld id="{A004BDE6-7414-45A4-9686-81E70042D974}" type="datetimeFigureOut">
               <a:rPr lang="en-IN" smtClean="0"/>
-              <a:t>07-05-2021</a:t>
+              <a:t>08-05-2021</a:t>
             </a:fld>
             <a:endParaRPr lang="en-IN"/>
           </a:p>
@@ -1304,7 +2187,7 @@
           <a:p>
             <a:fld id="{A004BDE6-7414-45A4-9686-81E70042D974}" type="datetimeFigureOut">
               <a:rPr lang="en-IN" smtClean="0"/>
-              <a:t>07-05-2021</a:t>
+              <a:t>08-05-2021</a:t>
             </a:fld>
             <a:endParaRPr lang="en-IN"/>
           </a:p>
@@ -1536,7 +2419,7 @@
           <a:p>
             <a:fld id="{A004BDE6-7414-45A4-9686-81E70042D974}" type="datetimeFigureOut">
               <a:rPr lang="en-IN" smtClean="0"/>
-              <a:t>07-05-2021</a:t>
+              <a:t>08-05-2021</a:t>
             </a:fld>
             <a:endParaRPr lang="en-IN"/>
           </a:p>
@@ -1895,7 +2778,7 @@
           <a:p>
             <a:fld id="{A004BDE6-7414-45A4-9686-81E70042D974}" type="datetimeFigureOut">
               <a:rPr lang="en-IN" smtClean="0"/>
-              <a:t>07-05-2021</a:t>
+              <a:t>08-05-2021</a:t>
             </a:fld>
             <a:endParaRPr lang="en-IN"/>
           </a:p>
@@ -2036,7 +2919,7 @@
           <a:p>
             <a:fld id="{A004BDE6-7414-45A4-9686-81E70042D974}" type="datetimeFigureOut">
               <a:rPr lang="en-IN" smtClean="0"/>
-              <a:t>07-05-2021</a:t>
+              <a:t>08-05-2021</a:t>
             </a:fld>
             <a:endParaRPr lang="en-IN"/>
           </a:p>
@@ -2131,7 +3014,7 @@
           <a:p>
             <a:fld id="{A004BDE6-7414-45A4-9686-81E70042D974}" type="datetimeFigureOut">
               <a:rPr lang="en-IN" smtClean="0"/>
-              <a:t>07-05-2021</a:t>
+              <a:t>08-05-2021</a:t>
             </a:fld>
             <a:endParaRPr lang="en-IN"/>
           </a:p>
@@ -2488,7 +3371,7 @@
           <a:p>
             <a:fld id="{A004BDE6-7414-45A4-9686-81E70042D974}" type="datetimeFigureOut">
               <a:rPr lang="en-IN" smtClean="0"/>
-              <a:t>07-05-2021</a:t>
+              <a:t>08-05-2021</a:t>
             </a:fld>
             <a:endParaRPr lang="en-IN"/>
           </a:p>
@@ -2845,7 +3728,7 @@
           <a:p>
             <a:fld id="{A004BDE6-7414-45A4-9686-81E70042D974}" type="datetimeFigureOut">
               <a:rPr lang="en-IN" smtClean="0"/>
-              <a:t>07-05-2021</a:t>
+              <a:t>08-05-2021</a:t>
             </a:fld>
             <a:endParaRPr lang="en-IN"/>
           </a:p>
@@ -3087,7 +3970,7 @@
           <a:p>
             <a:fld id="{A004BDE6-7414-45A4-9686-81E70042D974}" type="datetimeFigureOut">
               <a:rPr lang="en-IN" smtClean="0"/>
-              <a:t>07-05-2021</a:t>
+              <a:t>08-05-2021</a:t>
             </a:fld>
             <a:endParaRPr lang="en-IN"/>
           </a:p>
@@ -3542,87 +4425,7 @@
       </p:grpSpPr>
       <p:sp>
         <p:nvSpPr>
-          <p:cNvPr id="2" name="Title 1">
-            <a:extLst>
-              <a:ext uri="{FF2B5EF4-FFF2-40B4-BE49-F238E27FC236}">
-                <a16:creationId xmlns:a16="http://schemas.microsoft.com/office/drawing/2014/main" id="{B04BC34D-540C-43C7-ABA4-88A1306EBA8F}"/>
-              </a:ext>
-            </a:extLst>
-          </p:cNvPr>
-          <p:cNvSpPr>
-            <a:spLocks noGrp="1"/>
-          </p:cNvSpPr>
-          <p:nvPr>
-            <p:ph type="title"/>
-          </p:nvPr>
-        </p:nvSpPr>
-        <p:spPr/>
-        <p:txBody>
-          <a:bodyPr/>
-          <a:lstStyle/>
-          <a:p>
-            <a:endParaRPr lang="en-IN"/>
-          </a:p>
-        </p:txBody>
-      </p:sp>
-      <p:sp>
-        <p:nvSpPr>
-          <p:cNvPr id="3" name="Content Placeholder 2">
-            <a:extLst>
-              <a:ext uri="{FF2B5EF4-FFF2-40B4-BE49-F238E27FC236}">
-                <a16:creationId xmlns:a16="http://schemas.microsoft.com/office/drawing/2014/main" id="{AA076AA9-03F9-42E6-BCE2-7C8A62DB6E45}"/>
-              </a:ext>
-            </a:extLst>
-          </p:cNvPr>
-          <p:cNvSpPr>
-            <a:spLocks noGrp="1"/>
-          </p:cNvSpPr>
-          <p:nvPr>
-            <p:ph idx="1"/>
-          </p:nvPr>
-        </p:nvSpPr>
-        <p:spPr/>
-        <p:txBody>
-          <a:bodyPr/>
-          <a:lstStyle/>
-          <a:p>
-            <a:endParaRPr lang="en-IN"/>
-          </a:p>
-        </p:txBody>
-      </p:sp>
-    </p:spTree>
-    <p:extLst>
-      <p:ext uri="{BB962C8B-B14F-4D97-AF65-F5344CB8AC3E}">
-        <p14:creationId xmlns:p14="http://schemas.microsoft.com/office/powerpoint/2010/main" val="1988305561"/>
-      </p:ext>
-    </p:extLst>
-  </p:cSld>
-  <p:clrMapOvr>
-    <a:masterClrMapping/>
-  </p:clrMapOvr>
-</p:sld>
-</file>
-
-<file path=ppt/slides/slide10.xml><?xml version="1.0" encoding="utf-8"?>
-<p:sld xmlns:a="http://schemas.openxmlformats.org/drawingml/2006/main" xmlns:r="http://schemas.openxmlformats.org/officeDocument/2006/relationships" xmlns:p="http://schemas.openxmlformats.org/presentationml/2006/main">
-  <p:cSld>
-    <p:spTree>
-      <p:nvGrpSpPr>
-        <p:cNvPr id="1" name=""/>
-        <p:cNvGrpSpPr/>
-        <p:nvPr/>
-      </p:nvGrpSpPr>
-      <p:grpSpPr>
-        <a:xfrm>
-          <a:off x="0" y="0"/>
-          <a:ext cx="0" cy="0"/>
-          <a:chOff x="0" y="0"/>
-          <a:chExt cx="0" cy="0"/>
-        </a:xfrm>
-      </p:grpSpPr>
-      <p:sp>
-        <p:nvSpPr>
-          <p:cNvPr id="4" name="object 4"/>
+          <p:cNvPr id="3" name="object 3"/>
           <p:cNvSpPr txBox="1">
             <a:spLocks noGrp="1"/>
           </p:cNvSpPr>
@@ -3632,8 +4435,8 @@
         </p:nvSpPr>
         <p:spPr>
           <a:xfrm>
-            <a:off x="916939" y="493407"/>
-            <a:ext cx="7607934" cy="443711"/>
+            <a:off x="2283623" y="115569"/>
+            <a:ext cx="6179185" cy="443711"/>
           </a:xfrm>
           <a:prstGeom prst="rect">
             <a:avLst/>
@@ -3654,17 +4457,87 @@
               </a:spcBef>
             </a:pPr>
             <a:r>
-              <a:rPr spc="-50" dirty="0">
-                <a:latin typeface="Roboto Light" panose="02000000000000000000" pitchFamily="2" charset="0"/>
-                <a:ea typeface="Roboto Light" panose="02000000000000000000" pitchFamily="2" charset="0"/>
-              </a:rPr>
-              <a:t>ASGs</a:t>
+              <a:rPr spc="-30" dirty="0">
+                <a:latin typeface="Roboto Light" panose="02000000000000000000" pitchFamily="2" charset="0"/>
+                <a:ea typeface="Roboto Light" panose="02000000000000000000" pitchFamily="2" charset="0"/>
+              </a:rPr>
+              <a:t>S</a:t>
+            </a:r>
+            <a:r>
+              <a:rPr spc="-25" dirty="0">
+                <a:latin typeface="Roboto Light" panose="02000000000000000000" pitchFamily="2" charset="0"/>
+                <a:ea typeface="Roboto Light" panose="02000000000000000000" pitchFamily="2" charset="0"/>
+              </a:rPr>
+              <a:t>c</a:t>
             </a:r>
             <a:r>
               <a:rPr spc="-5" dirty="0">
                 <a:latin typeface="Roboto Light" panose="02000000000000000000" pitchFamily="2" charset="0"/>
                 <a:ea typeface="Roboto Light" panose="02000000000000000000" pitchFamily="2" charset="0"/>
               </a:rPr>
+              <a:t>a</a:t>
+            </a:r>
+            <a:r>
+              <a:rPr spc="-55" dirty="0">
+                <a:latin typeface="Roboto Light" panose="02000000000000000000" pitchFamily="2" charset="0"/>
+                <a:ea typeface="Roboto Light" panose="02000000000000000000" pitchFamily="2" charset="0"/>
+              </a:rPr>
+              <a:t>l</a:t>
+            </a:r>
+            <a:r>
+              <a:rPr spc="-105" dirty="0">
+                <a:latin typeface="Roboto Light" panose="02000000000000000000" pitchFamily="2" charset="0"/>
+                <a:ea typeface="Roboto Light" panose="02000000000000000000" pitchFamily="2" charset="0"/>
+              </a:rPr>
+              <a:t>a</a:t>
+            </a:r>
+            <a:r>
+              <a:rPr spc="35" dirty="0">
+                <a:latin typeface="Roboto Light" panose="02000000000000000000" pitchFamily="2" charset="0"/>
+                <a:ea typeface="Roboto Light" panose="02000000000000000000" pitchFamily="2" charset="0"/>
+              </a:rPr>
+              <a:t>b</a:t>
+            </a:r>
+            <a:r>
+              <a:rPr spc="-130" dirty="0">
+                <a:latin typeface="Roboto Light" panose="02000000000000000000" pitchFamily="2" charset="0"/>
+                <a:ea typeface="Roboto Light" panose="02000000000000000000" pitchFamily="2" charset="0"/>
+              </a:rPr>
+              <a:t>ili</a:t>
+            </a:r>
+            <a:r>
+              <a:rPr spc="-195" dirty="0">
+                <a:latin typeface="Roboto Light" panose="02000000000000000000" pitchFamily="2" charset="0"/>
+                <a:ea typeface="Roboto Light" panose="02000000000000000000" pitchFamily="2" charset="0"/>
+              </a:rPr>
+              <a:t>t</a:t>
+            </a:r>
+            <a:r>
+              <a:rPr spc="-95" dirty="0">
+                <a:latin typeface="Roboto Light" panose="02000000000000000000" pitchFamily="2" charset="0"/>
+                <a:ea typeface="Roboto Light" panose="02000000000000000000" pitchFamily="2" charset="0"/>
+              </a:rPr>
+              <a:t>y</a:t>
+            </a:r>
+            <a:r>
+              <a:rPr spc="5" dirty="0">
+                <a:latin typeface="Roboto Light" panose="02000000000000000000" pitchFamily="2" charset="0"/>
+                <a:ea typeface="Roboto Light" panose="02000000000000000000" pitchFamily="2" charset="0"/>
+              </a:rPr>
+              <a:t> </a:t>
+            </a:r>
+            <a:r>
+              <a:rPr spc="-45" dirty="0">
+                <a:latin typeface="Roboto Light" panose="02000000000000000000" pitchFamily="2" charset="0"/>
+                <a:ea typeface="Roboto Light" panose="02000000000000000000" pitchFamily="2" charset="0"/>
+              </a:rPr>
+              <a:t>&amp;</a:t>
+            </a:r>
+            <a:r>
+              <a:rPr spc="10" dirty="0">
+                <a:latin typeface="Roboto Light" panose="02000000000000000000" pitchFamily="2" charset="0"/>
+                <a:ea typeface="Roboto Light" panose="02000000000000000000" pitchFamily="2" charset="0"/>
+              </a:rPr>
               <a:t> </a:t>
             </a:r>
             <a:r>
@@ -3672,80 +4545,115 @@
                 <a:latin typeface="Roboto Light" panose="02000000000000000000" pitchFamily="2" charset="0"/>
                 <a:ea typeface="Roboto Light" panose="02000000000000000000" pitchFamily="2" charset="0"/>
               </a:rPr>
-              <a:t>have</a:t>
+              <a:t>Hig</a:t>
+            </a:r>
+            <a:r>
+              <a:rPr spc="-45" dirty="0">
+                <a:latin typeface="Roboto Light" panose="02000000000000000000" pitchFamily="2" charset="0"/>
+                <a:ea typeface="Roboto Light" panose="02000000000000000000" pitchFamily="2" charset="0"/>
+              </a:rPr>
+              <a:t>h</a:t>
+            </a:r>
+            <a:r>
+              <a:rPr spc="-260" dirty="0">
+                <a:latin typeface="Roboto Light" panose="02000000000000000000" pitchFamily="2" charset="0"/>
+                <a:ea typeface="Roboto Light" panose="02000000000000000000" pitchFamily="2" charset="0"/>
+              </a:rPr>
+              <a:t> </a:t>
+            </a:r>
+            <a:r>
+              <a:rPr spc="-130" dirty="0">
+                <a:latin typeface="Roboto Light" panose="02000000000000000000" pitchFamily="2" charset="0"/>
+                <a:ea typeface="Roboto Light" panose="02000000000000000000" pitchFamily="2" charset="0"/>
+              </a:rPr>
+              <a:t>A</a:t>
+            </a:r>
+            <a:r>
+              <a:rPr spc="-55" dirty="0">
+                <a:latin typeface="Roboto Light" panose="02000000000000000000" pitchFamily="2" charset="0"/>
+                <a:ea typeface="Roboto Light" panose="02000000000000000000" pitchFamily="2" charset="0"/>
+              </a:rPr>
+              <a:t>v</a:t>
             </a:r>
             <a:r>
               <a:rPr spc="-5" dirty="0">
                 <a:latin typeface="Roboto Light" panose="02000000000000000000" pitchFamily="2" charset="0"/>
                 <a:ea typeface="Roboto Light" panose="02000000000000000000" pitchFamily="2" charset="0"/>
               </a:rPr>
-              <a:t> </a:t>
-            </a:r>
-            <a:r>
-              <a:rPr spc="-65" dirty="0">
-                <a:latin typeface="Roboto Light" panose="02000000000000000000" pitchFamily="2" charset="0"/>
-                <a:ea typeface="Roboto Light" panose="02000000000000000000" pitchFamily="2" charset="0"/>
-              </a:rPr>
-              <a:t>the</a:t>
-            </a:r>
-            <a:r>
-              <a:rPr spc="-5" dirty="0">
-                <a:latin typeface="Roboto Light" panose="02000000000000000000" pitchFamily="2" charset="0"/>
-                <a:ea typeface="Roboto Light" panose="02000000000000000000" pitchFamily="2" charset="0"/>
-              </a:rPr>
-              <a:t> </a:t>
-            </a:r>
-            <a:r>
-              <a:rPr spc="-85" dirty="0">
-                <a:latin typeface="Roboto Light" panose="02000000000000000000" pitchFamily="2" charset="0"/>
-                <a:ea typeface="Roboto Light" panose="02000000000000000000" pitchFamily="2" charset="0"/>
-              </a:rPr>
-              <a:t>following</a:t>
-            </a:r>
-            <a:r>
-              <a:rPr spc="-20" dirty="0">
-                <a:latin typeface="Roboto Light" panose="02000000000000000000" pitchFamily="2" charset="0"/>
-                <a:ea typeface="Roboto Light" panose="02000000000000000000" pitchFamily="2" charset="0"/>
-              </a:rPr>
-              <a:t> </a:t>
+              <a:t>a</a:t>
+            </a:r>
+            <a:r>
+              <a:rPr spc="-75" dirty="0">
+                <a:latin typeface="Roboto Light" panose="02000000000000000000" pitchFamily="2" charset="0"/>
+                <a:ea typeface="Roboto Light" panose="02000000000000000000" pitchFamily="2" charset="0"/>
+              </a:rPr>
+              <a:t>il</a:t>
+            </a:r>
+            <a:r>
+              <a:rPr spc="-150" dirty="0">
+                <a:latin typeface="Roboto Light" panose="02000000000000000000" pitchFamily="2" charset="0"/>
+                <a:ea typeface="Roboto Light" panose="02000000000000000000" pitchFamily="2" charset="0"/>
+              </a:rPr>
+              <a:t>a</a:t>
+            </a:r>
+            <a:r>
+              <a:rPr spc="35" dirty="0">
+                <a:latin typeface="Roboto Light" panose="02000000000000000000" pitchFamily="2" charset="0"/>
+                <a:ea typeface="Roboto Light" panose="02000000000000000000" pitchFamily="2" charset="0"/>
+              </a:rPr>
+              <a:t>b</a:t>
+            </a:r>
+            <a:r>
+              <a:rPr spc="-130" dirty="0">
+                <a:latin typeface="Roboto Light" panose="02000000000000000000" pitchFamily="2" charset="0"/>
+                <a:ea typeface="Roboto Light" panose="02000000000000000000" pitchFamily="2" charset="0"/>
+              </a:rPr>
+              <a:t>ili</a:t>
+            </a:r>
+            <a:r>
+              <a:rPr spc="-195" dirty="0">
+                <a:latin typeface="Roboto Light" panose="02000000000000000000" pitchFamily="2" charset="0"/>
+                <a:ea typeface="Roboto Light" panose="02000000000000000000" pitchFamily="2" charset="0"/>
+              </a:rPr>
+              <a:t>t</a:t>
             </a:r>
             <a:r>
               <a:rPr spc="-95" dirty="0">
                 <a:latin typeface="Roboto Light" panose="02000000000000000000" pitchFamily="2" charset="0"/>
                 <a:ea typeface="Roboto Light" panose="02000000000000000000" pitchFamily="2" charset="0"/>
               </a:rPr>
-              <a:t>attributes</a:t>
+              <a:t>y</a:t>
             </a:r>
           </a:p>
         </p:txBody>
       </p:sp>
       <p:sp>
         <p:nvSpPr>
-          <p:cNvPr id="5" name="object 5"/>
+          <p:cNvPr id="4" name="object 4"/>
           <p:cNvSpPr txBox="1"/>
           <p:nvPr/>
         </p:nvSpPr>
         <p:spPr>
           <a:xfrm>
-            <a:off x="916939" y="1376849"/>
-            <a:ext cx="5247640" cy="4957126"/>
+            <a:off x="916939" y="1414779"/>
+            <a:ext cx="9968865" cy="4147289"/>
           </a:xfrm>
           <a:prstGeom prst="rect">
             <a:avLst/>
           </a:prstGeom>
         </p:spPr>
         <p:txBody>
-          <a:bodyPr vert="horz" wrap="square" lIns="0" tIns="50165" rIns="0" bIns="0" rtlCol="0">
+          <a:bodyPr vert="horz" wrap="square" lIns="0" tIns="63500" rIns="0" bIns="0" rtlCol="0">
             <a:spAutoFit/>
           </a:bodyPr>
           <a:lstStyle/>
           <a:p>
-            <a:pPr marL="241300" indent="-228600">
+            <a:pPr marL="241300" marR="5080" indent="-228600">
               <a:lnSpc>
-                <a:spcPct val="100000"/>
+                <a:spcPts val="3000"/>
               </a:lnSpc>
               <a:spcBef>
-                <a:spcPts val="395"/>
+                <a:spcPts val="500"/>
               </a:spcBef>
               <a:buFont typeface="Arial"/>
               <a:buChar char="•"/>
@@ -3754,6 +4662,61 @@
               </a:tabLst>
             </a:pPr>
             <a:r>
+              <a:rPr sz="2800" spc="-50" dirty="0">
+                <a:solidFill>
+                  <a:srgbClr val="444949"/>
+                </a:solidFill>
+                <a:latin typeface="Roboto Light" panose="02000000000000000000" pitchFamily="2" charset="0"/>
+                <a:ea typeface="Roboto Light" panose="02000000000000000000" pitchFamily="2" charset="0"/>
+                <a:cs typeface="Gill Sans MT"/>
+              </a:rPr>
+              <a:t>Scalability</a:t>
+            </a:r>
+            <a:r>
+              <a:rPr sz="2800" spc="-10" dirty="0">
+                <a:solidFill>
+                  <a:srgbClr val="444949"/>
+                </a:solidFill>
+                <a:latin typeface="Roboto Light" panose="02000000000000000000" pitchFamily="2" charset="0"/>
+                <a:ea typeface="Roboto Light" panose="02000000000000000000" pitchFamily="2" charset="0"/>
+                <a:cs typeface="Gill Sans MT"/>
+              </a:rPr>
+              <a:t> </a:t>
+            </a:r>
+            <a:r>
+              <a:rPr sz="2800" spc="-25" dirty="0">
+                <a:solidFill>
+                  <a:srgbClr val="444949"/>
+                </a:solidFill>
+                <a:latin typeface="Roboto Light" panose="02000000000000000000" pitchFamily="2" charset="0"/>
+                <a:ea typeface="Roboto Light" panose="02000000000000000000" pitchFamily="2" charset="0"/>
+                <a:cs typeface="Gill Sans MT"/>
+              </a:rPr>
+              <a:t>means</a:t>
+            </a:r>
+            <a:r>
+              <a:rPr sz="2800" spc="-10" dirty="0">
+                <a:solidFill>
+                  <a:srgbClr val="444949"/>
+                </a:solidFill>
+                <a:latin typeface="Roboto Light" panose="02000000000000000000" pitchFamily="2" charset="0"/>
+                <a:ea typeface="Roboto Light" panose="02000000000000000000" pitchFamily="2" charset="0"/>
+                <a:cs typeface="Gill Sans MT"/>
+              </a:rPr>
+              <a:t> </a:t>
+            </a:r>
+            <a:r>
+              <a:rPr sz="2800" spc="-50" dirty="0">
+                <a:solidFill>
+                  <a:srgbClr val="444949"/>
+                </a:solidFill>
+                <a:latin typeface="Roboto Light" panose="02000000000000000000" pitchFamily="2" charset="0"/>
+                <a:ea typeface="Roboto Light" panose="02000000000000000000" pitchFamily="2" charset="0"/>
+                <a:cs typeface="Gill Sans MT"/>
+              </a:rPr>
+              <a:t>that</a:t>
+            </a:r>
+            <a:r>
               <a:rPr sz="2800" dirty="0">
                 <a:solidFill>
                   <a:srgbClr val="444949"/>
@@ -3762,7 +4725,117 @@
                 <a:ea typeface="Roboto Light" panose="02000000000000000000" pitchFamily="2" charset="0"/>
                 <a:cs typeface="Gill Sans MT"/>
               </a:rPr>
-              <a:t>A</a:t>
+              <a:t> </a:t>
+            </a:r>
+            <a:r>
+              <a:rPr sz="2800" spc="-15" dirty="0">
+                <a:solidFill>
+                  <a:srgbClr val="444949"/>
+                </a:solidFill>
+                <a:latin typeface="Roboto Light" panose="02000000000000000000" pitchFamily="2" charset="0"/>
+                <a:ea typeface="Roboto Light" panose="02000000000000000000" pitchFamily="2" charset="0"/>
+                <a:cs typeface="Gill Sans MT"/>
+              </a:rPr>
+              <a:t>an</a:t>
+            </a:r>
+            <a:r>
+              <a:rPr sz="2800" dirty="0">
+                <a:solidFill>
+                  <a:srgbClr val="444949"/>
+                </a:solidFill>
+                <a:latin typeface="Roboto Light" panose="02000000000000000000" pitchFamily="2" charset="0"/>
+                <a:ea typeface="Roboto Light" panose="02000000000000000000" pitchFamily="2" charset="0"/>
+                <a:cs typeface="Gill Sans MT"/>
+              </a:rPr>
+              <a:t> </a:t>
+            </a:r>
+            <a:r>
+              <a:rPr sz="2800" spc="-40" dirty="0">
+                <a:solidFill>
+                  <a:srgbClr val="444949"/>
+                </a:solidFill>
+                <a:latin typeface="Roboto Light" panose="02000000000000000000" pitchFamily="2" charset="0"/>
+                <a:ea typeface="Roboto Light" panose="02000000000000000000" pitchFamily="2" charset="0"/>
+                <a:cs typeface="Gill Sans MT"/>
+              </a:rPr>
+              <a:t>application</a:t>
+            </a:r>
+            <a:r>
+              <a:rPr sz="2800" spc="-5" dirty="0">
+                <a:solidFill>
+                  <a:srgbClr val="444949"/>
+                </a:solidFill>
+                <a:latin typeface="Roboto Light" panose="02000000000000000000" pitchFamily="2" charset="0"/>
+                <a:ea typeface="Roboto Light" panose="02000000000000000000" pitchFamily="2" charset="0"/>
+                <a:cs typeface="Gill Sans MT"/>
+              </a:rPr>
+              <a:t> </a:t>
+            </a:r>
+            <a:r>
+              <a:rPr sz="2800" dirty="0">
+                <a:solidFill>
+                  <a:srgbClr val="444949"/>
+                </a:solidFill>
+                <a:latin typeface="Roboto Light" panose="02000000000000000000" pitchFamily="2" charset="0"/>
+                <a:ea typeface="Roboto Light" panose="02000000000000000000" pitchFamily="2" charset="0"/>
+                <a:cs typeface="Gill Sans MT"/>
+              </a:rPr>
+              <a:t>/</a:t>
+            </a:r>
+            <a:r>
+              <a:rPr sz="2800" spc="-5" dirty="0">
+                <a:solidFill>
+                  <a:srgbClr val="444949"/>
+                </a:solidFill>
+                <a:latin typeface="Roboto Light" panose="02000000000000000000" pitchFamily="2" charset="0"/>
+                <a:ea typeface="Roboto Light" panose="02000000000000000000" pitchFamily="2" charset="0"/>
+                <a:cs typeface="Gill Sans MT"/>
+              </a:rPr>
+              <a:t> </a:t>
+            </a:r>
+            <a:r>
+              <a:rPr sz="2800" spc="-60" dirty="0">
+                <a:solidFill>
+                  <a:srgbClr val="444949"/>
+                </a:solidFill>
+                <a:latin typeface="Roboto Light" panose="02000000000000000000" pitchFamily="2" charset="0"/>
+                <a:ea typeface="Roboto Light" panose="02000000000000000000" pitchFamily="2" charset="0"/>
+                <a:cs typeface="Gill Sans MT"/>
+              </a:rPr>
+              <a:t>system</a:t>
+            </a:r>
+            <a:r>
+              <a:rPr sz="2800" dirty="0">
+                <a:solidFill>
+                  <a:srgbClr val="444949"/>
+                </a:solidFill>
+                <a:latin typeface="Roboto Light" panose="02000000000000000000" pitchFamily="2" charset="0"/>
+                <a:ea typeface="Roboto Light" panose="02000000000000000000" pitchFamily="2" charset="0"/>
+                <a:cs typeface="Gill Sans MT"/>
+              </a:rPr>
+              <a:t> </a:t>
+            </a:r>
+            <a:r>
+              <a:rPr sz="2800" spc="-35" dirty="0">
+                <a:solidFill>
+                  <a:srgbClr val="444949"/>
+                </a:solidFill>
+                <a:latin typeface="Roboto Light" panose="02000000000000000000" pitchFamily="2" charset="0"/>
+                <a:ea typeface="Roboto Light" panose="02000000000000000000" pitchFamily="2" charset="0"/>
+                <a:cs typeface="Gill Sans MT"/>
+              </a:rPr>
+              <a:t>can</a:t>
+            </a:r>
+            <a:r>
+              <a:rPr sz="2800" dirty="0">
+                <a:solidFill>
+                  <a:srgbClr val="444949"/>
+                </a:solidFill>
+                <a:latin typeface="Roboto Light" panose="02000000000000000000" pitchFamily="2" charset="0"/>
+                <a:ea typeface="Roboto Light" panose="02000000000000000000" pitchFamily="2" charset="0"/>
+                <a:cs typeface="Gill Sans MT"/>
+              </a:rPr>
+              <a:t> </a:t>
             </a:r>
             <a:r>
               <a:rPr sz="2800" spc="-25" dirty="0">
@@ -3773,6 +4846,61 @@
                 <a:ea typeface="Roboto Light" panose="02000000000000000000" pitchFamily="2" charset="0"/>
                 <a:cs typeface="Gill Sans MT"/>
               </a:rPr>
+              <a:t>handle</a:t>
+            </a:r>
+            <a:r>
+              <a:rPr sz="2800" spc="-10" dirty="0">
+                <a:solidFill>
+                  <a:srgbClr val="444949"/>
+                </a:solidFill>
+                <a:latin typeface="Roboto Light" panose="02000000000000000000" pitchFamily="2" charset="0"/>
+                <a:ea typeface="Roboto Light" panose="02000000000000000000" pitchFamily="2" charset="0"/>
+                <a:cs typeface="Gill Sans MT"/>
+              </a:rPr>
+              <a:t> </a:t>
+            </a:r>
+            <a:r>
+              <a:rPr sz="2800" spc="-65" dirty="0">
+                <a:solidFill>
+                  <a:srgbClr val="444949"/>
+                </a:solidFill>
+                <a:latin typeface="Roboto Light" panose="02000000000000000000" pitchFamily="2" charset="0"/>
+                <a:ea typeface="Roboto Light" panose="02000000000000000000" pitchFamily="2" charset="0"/>
+                <a:cs typeface="Gill Sans MT"/>
+              </a:rPr>
+              <a:t>greater</a:t>
+            </a:r>
+            <a:r>
+              <a:rPr sz="2800" dirty="0">
+                <a:solidFill>
+                  <a:srgbClr val="444949"/>
+                </a:solidFill>
+                <a:latin typeface="Roboto Light" panose="02000000000000000000" pitchFamily="2" charset="0"/>
+                <a:ea typeface="Roboto Light" panose="02000000000000000000" pitchFamily="2" charset="0"/>
+                <a:cs typeface="Gill Sans MT"/>
+              </a:rPr>
+              <a:t> </a:t>
+            </a:r>
+            <a:r>
+              <a:rPr sz="2800" spc="-45" dirty="0">
+                <a:solidFill>
+                  <a:srgbClr val="444949"/>
+                </a:solidFill>
+                <a:latin typeface="Roboto Light" panose="02000000000000000000" pitchFamily="2" charset="0"/>
+                <a:ea typeface="Roboto Light" panose="02000000000000000000" pitchFamily="2" charset="0"/>
+                <a:cs typeface="Gill Sans MT"/>
+              </a:rPr>
+              <a:t>loads </a:t>
+            </a:r>
+            <a:r>
+              <a:rPr sz="2800" spc="-760" dirty="0">
+                <a:solidFill>
+                  <a:srgbClr val="444949"/>
+                </a:solidFill>
+                <a:latin typeface="Roboto Light" panose="02000000000000000000" pitchFamily="2" charset="0"/>
+                <a:ea typeface="Roboto Light" panose="02000000000000000000" pitchFamily="2" charset="0"/>
+                <a:cs typeface="Gill Sans MT"/>
+              </a:rPr>
               <a:t> </a:t>
             </a:r>
             <a:r>
@@ -3784,29 +4912,170 @@
                 <a:ea typeface="Roboto Light" panose="02000000000000000000" pitchFamily="2" charset="0"/>
                 <a:cs typeface="Gill Sans MT"/>
               </a:rPr>
-              <a:t>launch</a:t>
-            </a:r>
-            <a:r>
-              <a:rPr sz="2800" spc="-10" dirty="0">
-                <a:solidFill>
-                  <a:srgbClr val="444949"/>
-                </a:solidFill>
-                <a:latin typeface="Roboto Light" panose="02000000000000000000" pitchFamily="2" charset="0"/>
-                <a:ea typeface="Roboto Light" panose="02000000000000000000" pitchFamily="2" charset="0"/>
-                <a:cs typeface="Gill Sans MT"/>
-              </a:rPr>
-              <a:t> </a:t>
-            </a:r>
-            <a:r>
-              <a:rPr sz="2800" spc="-55" dirty="0">
-                <a:solidFill>
-                  <a:srgbClr val="444949"/>
-                </a:solidFill>
-                <a:latin typeface="Roboto Light" panose="02000000000000000000" pitchFamily="2" charset="0"/>
-                <a:ea typeface="Roboto Light" panose="02000000000000000000" pitchFamily="2" charset="0"/>
-                <a:cs typeface="Gill Sans MT"/>
-              </a:rPr>
-              <a:t>configuration</a:t>
+              <a:t>by</a:t>
+            </a:r>
+            <a:r>
+              <a:rPr sz="2800" spc="-15" dirty="0">
+                <a:solidFill>
+                  <a:srgbClr val="444949"/>
+                </a:solidFill>
+                <a:latin typeface="Roboto Light" panose="02000000000000000000" pitchFamily="2" charset="0"/>
+                <a:ea typeface="Roboto Light" panose="02000000000000000000" pitchFamily="2" charset="0"/>
+                <a:cs typeface="Gill Sans MT"/>
+              </a:rPr>
+              <a:t> </a:t>
+            </a:r>
+            <a:r>
+              <a:rPr sz="2800" spc="-35" dirty="0">
+                <a:solidFill>
+                  <a:srgbClr val="444949"/>
+                </a:solidFill>
+                <a:latin typeface="Roboto Light" panose="02000000000000000000" pitchFamily="2" charset="0"/>
+                <a:ea typeface="Roboto Light" panose="02000000000000000000" pitchFamily="2" charset="0"/>
+                <a:cs typeface="Gill Sans MT"/>
+              </a:rPr>
+              <a:t>adapting.</a:t>
+            </a:r>
+            <a:endParaRPr sz="2800" dirty="0">
+              <a:latin typeface="Roboto Light" panose="02000000000000000000" pitchFamily="2" charset="0"/>
+              <a:ea typeface="Roboto Light" panose="02000000000000000000" pitchFamily="2" charset="0"/>
+              <a:cs typeface="Gill Sans MT"/>
+            </a:endParaRPr>
+          </a:p>
+          <a:p>
+            <a:pPr marL="241300" indent="-228600">
+              <a:lnSpc>
+                <a:spcPct val="100000"/>
+              </a:lnSpc>
+              <a:spcBef>
+                <a:spcPts val="705"/>
+              </a:spcBef>
+              <a:buFont typeface="Arial"/>
+              <a:buChar char="•"/>
+              <a:tabLst>
+                <a:tab pos="241300" algn="l"/>
+              </a:tabLst>
+            </a:pPr>
+            <a:r>
+              <a:rPr sz="2800" spc="-65" dirty="0">
+                <a:solidFill>
+                  <a:srgbClr val="444949"/>
+                </a:solidFill>
+                <a:latin typeface="Roboto Light" panose="02000000000000000000" pitchFamily="2" charset="0"/>
+                <a:ea typeface="Roboto Light" panose="02000000000000000000" pitchFamily="2" charset="0"/>
+                <a:cs typeface="Gill Sans MT"/>
+              </a:rPr>
+              <a:t>There</a:t>
+            </a:r>
+            <a:r>
+              <a:rPr sz="2800" spc="-20" dirty="0">
+                <a:solidFill>
+                  <a:srgbClr val="444949"/>
+                </a:solidFill>
+                <a:latin typeface="Roboto Light" panose="02000000000000000000" pitchFamily="2" charset="0"/>
+                <a:ea typeface="Roboto Light" panose="02000000000000000000" pitchFamily="2" charset="0"/>
+                <a:cs typeface="Gill Sans MT"/>
+              </a:rPr>
+              <a:t> </a:t>
+            </a:r>
+            <a:r>
+              <a:rPr sz="2800" spc="-60" dirty="0">
+                <a:solidFill>
+                  <a:srgbClr val="444949"/>
+                </a:solidFill>
+                <a:latin typeface="Roboto Light" panose="02000000000000000000" pitchFamily="2" charset="0"/>
+                <a:ea typeface="Roboto Light" panose="02000000000000000000" pitchFamily="2" charset="0"/>
+                <a:cs typeface="Gill Sans MT"/>
+              </a:rPr>
+              <a:t>are</a:t>
+            </a:r>
+            <a:r>
+              <a:rPr sz="2800" spc="-15" dirty="0">
+                <a:solidFill>
+                  <a:srgbClr val="444949"/>
+                </a:solidFill>
+                <a:latin typeface="Roboto Light" panose="02000000000000000000" pitchFamily="2" charset="0"/>
+                <a:ea typeface="Roboto Light" panose="02000000000000000000" pitchFamily="2" charset="0"/>
+                <a:cs typeface="Gill Sans MT"/>
+              </a:rPr>
+              <a:t> </a:t>
+            </a:r>
+            <a:r>
+              <a:rPr sz="2800" spc="-65" dirty="0">
+                <a:solidFill>
+                  <a:srgbClr val="444949"/>
+                </a:solidFill>
+                <a:latin typeface="Roboto Light" panose="02000000000000000000" pitchFamily="2" charset="0"/>
+                <a:ea typeface="Roboto Light" panose="02000000000000000000" pitchFamily="2" charset="0"/>
+                <a:cs typeface="Gill Sans MT"/>
+              </a:rPr>
+              <a:t>two</a:t>
+            </a:r>
+            <a:r>
+              <a:rPr sz="2800" spc="-15" dirty="0">
+                <a:solidFill>
+                  <a:srgbClr val="444949"/>
+                </a:solidFill>
+                <a:latin typeface="Roboto Light" panose="02000000000000000000" pitchFamily="2" charset="0"/>
+                <a:ea typeface="Roboto Light" panose="02000000000000000000" pitchFamily="2" charset="0"/>
+                <a:cs typeface="Gill Sans MT"/>
+              </a:rPr>
+              <a:t> </a:t>
+            </a:r>
+            <a:r>
+              <a:rPr sz="2800" spc="-75" dirty="0">
+                <a:solidFill>
+                  <a:srgbClr val="444949"/>
+                </a:solidFill>
+                <a:latin typeface="Roboto Light" panose="02000000000000000000" pitchFamily="2" charset="0"/>
+                <a:ea typeface="Roboto Light" panose="02000000000000000000" pitchFamily="2" charset="0"/>
+                <a:cs typeface="Gill Sans MT"/>
+              </a:rPr>
+              <a:t>kinds</a:t>
+            </a:r>
+            <a:r>
+              <a:rPr sz="2800" spc="-15" dirty="0">
+                <a:solidFill>
+                  <a:srgbClr val="444949"/>
+                </a:solidFill>
+                <a:latin typeface="Roboto Light" panose="02000000000000000000" pitchFamily="2" charset="0"/>
+                <a:ea typeface="Roboto Light" panose="02000000000000000000" pitchFamily="2" charset="0"/>
+                <a:cs typeface="Gill Sans MT"/>
+              </a:rPr>
+              <a:t> </a:t>
+            </a:r>
+            <a:r>
+              <a:rPr sz="2800" spc="-30" dirty="0">
+                <a:solidFill>
+                  <a:srgbClr val="444949"/>
+                </a:solidFill>
+                <a:latin typeface="Roboto Light" panose="02000000000000000000" pitchFamily="2" charset="0"/>
+                <a:ea typeface="Roboto Light" panose="02000000000000000000" pitchFamily="2" charset="0"/>
+                <a:cs typeface="Gill Sans MT"/>
+              </a:rPr>
+              <a:t>of</a:t>
+            </a:r>
+            <a:r>
+              <a:rPr sz="2800" spc="-5" dirty="0">
+                <a:solidFill>
+                  <a:srgbClr val="444949"/>
+                </a:solidFill>
+                <a:latin typeface="Roboto Light" panose="02000000000000000000" pitchFamily="2" charset="0"/>
+                <a:ea typeface="Roboto Light" panose="02000000000000000000" pitchFamily="2" charset="0"/>
+                <a:cs typeface="Gill Sans MT"/>
+              </a:rPr>
+              <a:t> </a:t>
+            </a:r>
+            <a:r>
+              <a:rPr sz="2800" spc="-65" dirty="0">
+                <a:solidFill>
+                  <a:srgbClr val="444949"/>
+                </a:solidFill>
+                <a:latin typeface="Roboto Light" panose="02000000000000000000" pitchFamily="2" charset="0"/>
+                <a:ea typeface="Roboto Light" panose="02000000000000000000" pitchFamily="2" charset="0"/>
+                <a:cs typeface="Gill Sans MT"/>
+              </a:rPr>
+              <a:t>scalability:</a:t>
             </a:r>
             <a:endParaRPr sz="2800" dirty="0">
               <a:latin typeface="Roboto Light" panose="02000000000000000000" pitchFamily="2" charset="0"/>
@@ -3820,7 +5089,7 @@
                 <a:spcPct val="100000"/>
               </a:lnSpc>
               <a:spcBef>
-                <a:spcPts val="259"/>
+                <a:spcPts val="254"/>
               </a:spcBef>
               <a:buFont typeface="Arial"/>
               <a:buChar char="•"/>
@@ -3829,169 +5098,37 @@
               </a:tabLst>
             </a:pPr>
             <a:r>
-              <a:rPr sz="2400" spc="-5" dirty="0">
-                <a:solidFill>
-                  <a:srgbClr val="444949"/>
-                </a:solidFill>
-                <a:latin typeface="Roboto Light" panose="02000000000000000000" pitchFamily="2" charset="0"/>
-                <a:ea typeface="Roboto Light" panose="02000000000000000000" pitchFamily="2" charset="0"/>
-                <a:cs typeface="Gill Sans MT"/>
-              </a:rPr>
-              <a:t>A</a:t>
-            </a:r>
-            <a:r>
-              <a:rPr sz="2400" dirty="0">
-                <a:solidFill>
-                  <a:srgbClr val="444949"/>
-                </a:solidFill>
-                <a:latin typeface="Roboto Light" panose="02000000000000000000" pitchFamily="2" charset="0"/>
-                <a:ea typeface="Roboto Light" panose="02000000000000000000" pitchFamily="2" charset="0"/>
-                <a:cs typeface="Gill Sans MT"/>
-              </a:rPr>
-              <a:t>M</a:t>
-            </a:r>
-            <a:r>
-              <a:rPr sz="2400" spc="-105" dirty="0">
-                <a:solidFill>
-                  <a:srgbClr val="444949"/>
-                </a:solidFill>
-                <a:latin typeface="Roboto Light" panose="02000000000000000000" pitchFamily="2" charset="0"/>
-                <a:ea typeface="Roboto Light" panose="02000000000000000000" pitchFamily="2" charset="0"/>
-                <a:cs typeface="Gill Sans MT"/>
-              </a:rPr>
-              <a:t>I</a:t>
-            </a:r>
-            <a:r>
-              <a:rPr sz="2400" spc="-5" dirty="0">
-                <a:solidFill>
-                  <a:srgbClr val="444949"/>
-                </a:solidFill>
-                <a:latin typeface="Roboto Light" panose="02000000000000000000" pitchFamily="2" charset="0"/>
-                <a:ea typeface="Roboto Light" panose="02000000000000000000" pitchFamily="2" charset="0"/>
-                <a:cs typeface="Gill Sans MT"/>
-              </a:rPr>
-              <a:t> </a:t>
-            </a:r>
-            <a:r>
-              <a:rPr sz="2400" spc="180" dirty="0">
-                <a:solidFill>
-                  <a:srgbClr val="444949"/>
-                </a:solidFill>
-                <a:latin typeface="Roboto Light" panose="02000000000000000000" pitchFamily="2" charset="0"/>
-                <a:ea typeface="Roboto Light" panose="02000000000000000000" pitchFamily="2" charset="0"/>
-                <a:cs typeface="Gill Sans MT"/>
-              </a:rPr>
-              <a:t>+</a:t>
-            </a:r>
-            <a:r>
-              <a:rPr sz="2400" spc="-5" dirty="0">
-                <a:solidFill>
-                  <a:srgbClr val="444949"/>
-                </a:solidFill>
-                <a:latin typeface="Roboto Light" panose="02000000000000000000" pitchFamily="2" charset="0"/>
-                <a:ea typeface="Roboto Light" panose="02000000000000000000" pitchFamily="2" charset="0"/>
-                <a:cs typeface="Gill Sans MT"/>
-              </a:rPr>
-              <a:t> </a:t>
-            </a:r>
-            <a:r>
-              <a:rPr sz="2400" spc="-105" dirty="0">
-                <a:solidFill>
-                  <a:srgbClr val="444949"/>
-                </a:solidFill>
-                <a:latin typeface="Roboto Light" panose="02000000000000000000" pitchFamily="2" charset="0"/>
-                <a:ea typeface="Roboto Light" panose="02000000000000000000" pitchFamily="2" charset="0"/>
-                <a:cs typeface="Gill Sans MT"/>
-              </a:rPr>
-              <a:t>I</a:t>
-            </a:r>
-            <a:r>
-              <a:rPr sz="2400" spc="-60" dirty="0">
-                <a:solidFill>
-                  <a:srgbClr val="444949"/>
-                </a:solidFill>
-                <a:latin typeface="Roboto Light" panose="02000000000000000000" pitchFamily="2" charset="0"/>
-                <a:ea typeface="Roboto Light" panose="02000000000000000000" pitchFamily="2" charset="0"/>
-                <a:cs typeface="Gill Sans MT"/>
-              </a:rPr>
-              <a:t>n</a:t>
-            </a:r>
-            <a:r>
-              <a:rPr sz="2400" spc="-45" dirty="0">
-                <a:solidFill>
-                  <a:srgbClr val="444949"/>
-                </a:solidFill>
-                <a:latin typeface="Roboto Light" panose="02000000000000000000" pitchFamily="2" charset="0"/>
-                <a:ea typeface="Roboto Light" panose="02000000000000000000" pitchFamily="2" charset="0"/>
-                <a:cs typeface="Gill Sans MT"/>
-              </a:rPr>
-              <a:t>s</a:t>
-            </a:r>
-            <a:r>
-              <a:rPr sz="2400" spc="-35" dirty="0">
-                <a:solidFill>
-                  <a:srgbClr val="444949"/>
-                </a:solidFill>
-                <a:latin typeface="Roboto Light" panose="02000000000000000000" pitchFamily="2" charset="0"/>
-                <a:ea typeface="Roboto Light" panose="02000000000000000000" pitchFamily="2" charset="0"/>
-                <a:cs typeface="Gill Sans MT"/>
-              </a:rPr>
-              <a:t>tance</a:t>
-            </a:r>
-            <a:r>
-              <a:rPr sz="2400" spc="-340" dirty="0">
-                <a:solidFill>
-                  <a:srgbClr val="444949"/>
-                </a:solidFill>
-                <a:latin typeface="Roboto Light" panose="02000000000000000000" pitchFamily="2" charset="0"/>
-                <a:ea typeface="Roboto Light" panose="02000000000000000000" pitchFamily="2" charset="0"/>
-                <a:cs typeface="Gill Sans MT"/>
-              </a:rPr>
-              <a:t> </a:t>
-            </a:r>
-            <a:r>
-              <a:rPr sz="2400" spc="-365" dirty="0">
-                <a:solidFill>
-                  <a:srgbClr val="444949"/>
-                </a:solidFill>
-                <a:latin typeface="Roboto Light" panose="02000000000000000000" pitchFamily="2" charset="0"/>
-                <a:ea typeface="Roboto Light" panose="02000000000000000000" pitchFamily="2" charset="0"/>
-                <a:cs typeface="Gill Sans MT"/>
-              </a:rPr>
-              <a:t>T</a:t>
-            </a:r>
-            <a:r>
-              <a:rPr sz="2400" spc="-20" dirty="0">
-                <a:solidFill>
-                  <a:srgbClr val="444949"/>
-                </a:solidFill>
-                <a:latin typeface="Roboto Light" panose="02000000000000000000" pitchFamily="2" charset="0"/>
-                <a:ea typeface="Roboto Light" panose="02000000000000000000" pitchFamily="2" charset="0"/>
-                <a:cs typeface="Gill Sans MT"/>
-              </a:rPr>
-              <a:t>y</a:t>
-            </a:r>
-            <a:r>
-              <a:rPr sz="2400" spc="-15" dirty="0">
-                <a:solidFill>
-                  <a:srgbClr val="444949"/>
-                </a:solidFill>
-                <a:latin typeface="Roboto Light" panose="02000000000000000000" pitchFamily="2" charset="0"/>
-                <a:ea typeface="Roboto Light" panose="02000000000000000000" pitchFamily="2" charset="0"/>
-                <a:cs typeface="Gill Sans MT"/>
-              </a:rPr>
-              <a:t>p</a:t>
-            </a:r>
-            <a:r>
-              <a:rPr sz="2400" dirty="0">
-                <a:solidFill>
-                  <a:srgbClr val="444949"/>
-                </a:solidFill>
-                <a:latin typeface="Roboto Light" panose="02000000000000000000" pitchFamily="2" charset="0"/>
-                <a:ea typeface="Roboto Light" panose="02000000000000000000" pitchFamily="2" charset="0"/>
-                <a:cs typeface="Gill Sans MT"/>
-              </a:rPr>
-              <a:t>e</a:t>
+              <a:rPr sz="2400" spc="-55" dirty="0">
+                <a:solidFill>
+                  <a:srgbClr val="444949"/>
+                </a:solidFill>
+                <a:latin typeface="Roboto Light" panose="02000000000000000000" pitchFamily="2" charset="0"/>
+                <a:ea typeface="Roboto Light" panose="02000000000000000000" pitchFamily="2" charset="0"/>
+                <a:cs typeface="Gill Sans MT"/>
+              </a:rPr>
+              <a:t>Vertical</a:t>
+            </a:r>
+            <a:r>
+              <a:rPr sz="2400" spc="-25" dirty="0">
+                <a:solidFill>
+                  <a:srgbClr val="444949"/>
+                </a:solidFill>
+                <a:latin typeface="Roboto Light" panose="02000000000000000000" pitchFamily="2" charset="0"/>
+                <a:ea typeface="Roboto Light" panose="02000000000000000000" pitchFamily="2" charset="0"/>
+                <a:cs typeface="Gill Sans MT"/>
+              </a:rPr>
+              <a:t> </a:t>
+            </a:r>
+            <a:r>
+              <a:rPr sz="2400" spc="-40" dirty="0">
+                <a:solidFill>
+                  <a:srgbClr val="444949"/>
+                </a:solidFill>
+                <a:latin typeface="Roboto Light" panose="02000000000000000000" pitchFamily="2" charset="0"/>
+                <a:ea typeface="Roboto Light" panose="02000000000000000000" pitchFamily="2" charset="0"/>
+                <a:cs typeface="Gill Sans MT"/>
+              </a:rPr>
+              <a:t>Scalability</a:t>
             </a:r>
             <a:endParaRPr sz="2400" dirty="0">
               <a:latin typeface="Roboto Light" panose="02000000000000000000" pitchFamily="2" charset="0"/>
@@ -4014,81 +5151,6 @@
               </a:tabLst>
             </a:pPr>
             <a:r>
-              <a:rPr sz="2400" spc="-35" dirty="0">
-                <a:solidFill>
-                  <a:srgbClr val="444949"/>
-                </a:solidFill>
-                <a:latin typeface="Roboto Light" panose="02000000000000000000" pitchFamily="2" charset="0"/>
-                <a:ea typeface="Roboto Light" panose="02000000000000000000" pitchFamily="2" charset="0"/>
-                <a:cs typeface="Gill Sans MT"/>
-              </a:rPr>
-              <a:t>EC2</a:t>
-            </a:r>
-            <a:r>
-              <a:rPr sz="2400" spc="-20" dirty="0">
-                <a:solidFill>
-                  <a:srgbClr val="444949"/>
-                </a:solidFill>
-                <a:latin typeface="Roboto Light" panose="02000000000000000000" pitchFamily="2" charset="0"/>
-                <a:ea typeface="Roboto Light" panose="02000000000000000000" pitchFamily="2" charset="0"/>
-                <a:cs typeface="Gill Sans MT"/>
-              </a:rPr>
-              <a:t> </a:t>
-            </a:r>
-            <a:r>
-              <a:rPr sz="2400" spc="-65" dirty="0">
-                <a:solidFill>
-                  <a:srgbClr val="444949"/>
-                </a:solidFill>
-                <a:latin typeface="Roboto Light" panose="02000000000000000000" pitchFamily="2" charset="0"/>
-                <a:ea typeface="Roboto Light" panose="02000000000000000000" pitchFamily="2" charset="0"/>
-                <a:cs typeface="Gill Sans MT"/>
-              </a:rPr>
-              <a:t>User</a:t>
-            </a:r>
-            <a:r>
-              <a:rPr sz="2400" spc="-20" dirty="0">
-                <a:solidFill>
-                  <a:srgbClr val="444949"/>
-                </a:solidFill>
-                <a:latin typeface="Roboto Light" panose="02000000000000000000" pitchFamily="2" charset="0"/>
-                <a:ea typeface="Roboto Light" panose="02000000000000000000" pitchFamily="2" charset="0"/>
-                <a:cs typeface="Gill Sans MT"/>
-              </a:rPr>
-              <a:t> </a:t>
-            </a:r>
-            <a:r>
-              <a:rPr sz="2400" spc="-30" dirty="0">
-                <a:solidFill>
-                  <a:srgbClr val="444949"/>
-                </a:solidFill>
-                <a:latin typeface="Roboto Light" panose="02000000000000000000" pitchFamily="2" charset="0"/>
-                <a:ea typeface="Roboto Light" panose="02000000000000000000" pitchFamily="2" charset="0"/>
-                <a:cs typeface="Gill Sans MT"/>
-              </a:rPr>
-              <a:t>Data</a:t>
-            </a:r>
-            <a:endParaRPr sz="2400" dirty="0">
-              <a:latin typeface="Roboto Light" panose="02000000000000000000" pitchFamily="2" charset="0"/>
-              <a:ea typeface="Roboto Light" panose="02000000000000000000" pitchFamily="2" charset="0"/>
-              <a:cs typeface="Gill Sans MT"/>
-            </a:endParaRPr>
-          </a:p>
-          <a:p>
-            <a:pPr marL="698500" lvl="1" indent="-228600">
-              <a:lnSpc>
-                <a:spcPct val="100000"/>
-              </a:lnSpc>
-              <a:spcBef>
-                <a:spcPts val="215"/>
-              </a:spcBef>
-              <a:buFont typeface="Arial"/>
-              <a:buChar char="•"/>
-              <a:tabLst>
-                <a:tab pos="698500" algn="l"/>
-              </a:tabLst>
-            </a:pPr>
-            <a:r>
               <a:rPr sz="2400" spc="-55" dirty="0">
                 <a:solidFill>
                   <a:srgbClr val="444949"/>
@@ -4097,107 +5159,54 @@
                 <a:ea typeface="Roboto Light" panose="02000000000000000000" pitchFamily="2" charset="0"/>
                 <a:cs typeface="Gill Sans MT"/>
               </a:rPr>
-              <a:t>EB</a:t>
-            </a:r>
-            <a:r>
-              <a:rPr sz="2400" spc="25" dirty="0">
-                <a:solidFill>
-                  <a:srgbClr val="444949"/>
-                </a:solidFill>
-                <a:latin typeface="Roboto Light" panose="02000000000000000000" pitchFamily="2" charset="0"/>
-                <a:ea typeface="Roboto Light" panose="02000000000000000000" pitchFamily="2" charset="0"/>
-                <a:cs typeface="Gill Sans MT"/>
-              </a:rPr>
-              <a:t>S</a:t>
-            </a:r>
-            <a:r>
-              <a:rPr sz="2400" spc="-345" dirty="0">
-                <a:solidFill>
-                  <a:srgbClr val="444949"/>
-                </a:solidFill>
-                <a:latin typeface="Roboto Light" panose="02000000000000000000" pitchFamily="2" charset="0"/>
-                <a:ea typeface="Roboto Light" panose="02000000000000000000" pitchFamily="2" charset="0"/>
-                <a:cs typeface="Gill Sans MT"/>
-              </a:rPr>
-              <a:t> </a:t>
-            </a:r>
-            <a:r>
-              <a:rPr sz="2400" spc="-195" dirty="0">
-                <a:solidFill>
-                  <a:srgbClr val="444949"/>
-                </a:solidFill>
-                <a:latin typeface="Roboto Light" panose="02000000000000000000" pitchFamily="2" charset="0"/>
-                <a:ea typeface="Roboto Light" panose="02000000000000000000" pitchFamily="2" charset="0"/>
-                <a:cs typeface="Gill Sans MT"/>
-              </a:rPr>
-              <a:t>V</a:t>
-            </a:r>
-            <a:r>
-              <a:rPr sz="2400" spc="-30" dirty="0">
-                <a:solidFill>
-                  <a:srgbClr val="444949"/>
-                </a:solidFill>
-                <a:latin typeface="Roboto Light" panose="02000000000000000000" pitchFamily="2" charset="0"/>
-                <a:ea typeface="Roboto Light" panose="02000000000000000000" pitchFamily="2" charset="0"/>
-                <a:cs typeface="Gill Sans MT"/>
-              </a:rPr>
-              <a:t>olum</a:t>
-            </a:r>
-            <a:r>
-              <a:rPr sz="2400" spc="-25" dirty="0">
-                <a:solidFill>
-                  <a:srgbClr val="444949"/>
-                </a:solidFill>
-                <a:latin typeface="Roboto Light" panose="02000000000000000000" pitchFamily="2" charset="0"/>
-                <a:ea typeface="Roboto Light" panose="02000000000000000000" pitchFamily="2" charset="0"/>
-                <a:cs typeface="Gill Sans MT"/>
-              </a:rPr>
-              <a:t>e</a:t>
-            </a:r>
-            <a:r>
-              <a:rPr sz="2400" spc="-75" dirty="0">
-                <a:solidFill>
-                  <a:srgbClr val="444949"/>
-                </a:solidFill>
-                <a:latin typeface="Roboto Light" panose="02000000000000000000" pitchFamily="2" charset="0"/>
-                <a:ea typeface="Roboto Light" panose="02000000000000000000" pitchFamily="2" charset="0"/>
-                <a:cs typeface="Gill Sans MT"/>
-              </a:rPr>
-              <a:t>s</a:t>
-            </a:r>
-            <a:endParaRPr sz="2400" dirty="0">
-              <a:latin typeface="Roboto Light" panose="02000000000000000000" pitchFamily="2" charset="0"/>
-              <a:ea typeface="Roboto Light" panose="02000000000000000000" pitchFamily="2" charset="0"/>
-              <a:cs typeface="Gill Sans MT"/>
-            </a:endParaRPr>
-          </a:p>
-          <a:p>
-            <a:pPr marL="698500" lvl="1" indent="-228600">
-              <a:lnSpc>
-                <a:spcPct val="100000"/>
-              </a:lnSpc>
-              <a:spcBef>
-                <a:spcPts val="215"/>
-              </a:spcBef>
-              <a:buFont typeface="Arial"/>
-              <a:buChar char="•"/>
-              <a:tabLst>
-                <a:tab pos="698500" algn="l"/>
-              </a:tabLst>
-            </a:pPr>
-            <a:r>
-              <a:rPr sz="2400" spc="-50" dirty="0">
-                <a:solidFill>
-                  <a:srgbClr val="444949"/>
-                </a:solidFill>
-                <a:latin typeface="Roboto Light" panose="02000000000000000000" pitchFamily="2" charset="0"/>
-                <a:ea typeface="Roboto Light" panose="02000000000000000000" pitchFamily="2" charset="0"/>
-                <a:cs typeface="Gill Sans MT"/>
-              </a:rPr>
-              <a:t>Security</a:t>
-            </a:r>
-            <a:r>
-              <a:rPr sz="2400" spc="-25" dirty="0">
+              <a:t>Horizontal</a:t>
+            </a:r>
+            <a:r>
+              <a:rPr sz="2400" spc="-15" dirty="0">
+                <a:solidFill>
+                  <a:srgbClr val="444949"/>
+                </a:solidFill>
+                <a:latin typeface="Roboto Light" panose="02000000000000000000" pitchFamily="2" charset="0"/>
+                <a:ea typeface="Roboto Light" panose="02000000000000000000" pitchFamily="2" charset="0"/>
+                <a:cs typeface="Gill Sans MT"/>
+              </a:rPr>
+              <a:t> </a:t>
+            </a:r>
+            <a:r>
+              <a:rPr sz="2400" spc="-45" dirty="0">
+                <a:solidFill>
+                  <a:srgbClr val="444949"/>
+                </a:solidFill>
+                <a:latin typeface="Roboto Light" panose="02000000000000000000" pitchFamily="2" charset="0"/>
+                <a:ea typeface="Roboto Light" panose="02000000000000000000" pitchFamily="2" charset="0"/>
+                <a:cs typeface="Gill Sans MT"/>
+              </a:rPr>
+              <a:t>Scalability</a:t>
+            </a:r>
+            <a:r>
+              <a:rPr sz="2400" spc="-15" dirty="0">
+                <a:solidFill>
+                  <a:srgbClr val="444949"/>
+                </a:solidFill>
+                <a:latin typeface="Roboto Light" panose="02000000000000000000" pitchFamily="2" charset="0"/>
+                <a:ea typeface="Roboto Light" panose="02000000000000000000" pitchFamily="2" charset="0"/>
+                <a:cs typeface="Gill Sans MT"/>
+              </a:rPr>
+              <a:t> </a:t>
+            </a:r>
+            <a:r>
+              <a:rPr sz="2400" spc="100" dirty="0">
+                <a:solidFill>
+                  <a:srgbClr val="444949"/>
+                </a:solidFill>
+                <a:latin typeface="Roboto Light" panose="02000000000000000000" pitchFamily="2" charset="0"/>
+                <a:ea typeface="Roboto Light" panose="02000000000000000000" pitchFamily="2" charset="0"/>
+                <a:cs typeface="Gill Sans MT"/>
+              </a:rPr>
+              <a:t>(=</a:t>
+            </a:r>
+            <a:r>
+              <a:rPr sz="2400" spc="-5" dirty="0">
                 <a:solidFill>
                   <a:srgbClr val="444949"/>
                 </a:solidFill>
@@ -4216,82 +5225,7 @@
                 <a:ea typeface="Roboto Light" panose="02000000000000000000" pitchFamily="2" charset="0"/>
                 <a:cs typeface="Gill Sans MT"/>
               </a:rPr>
-              <a:t>Groups</a:t>
-            </a:r>
-            <a:endParaRPr sz="2400" dirty="0">
-              <a:latin typeface="Roboto Light" panose="02000000000000000000" pitchFamily="2" charset="0"/>
-              <a:ea typeface="Roboto Light" panose="02000000000000000000" pitchFamily="2" charset="0"/>
-              <a:cs typeface="Gill Sans MT"/>
-            </a:endParaRPr>
-          </a:p>
-          <a:p>
-            <a:pPr marL="698500" lvl="1" indent="-228600">
-              <a:lnSpc>
-                <a:spcPct val="100000"/>
-              </a:lnSpc>
-              <a:spcBef>
-                <a:spcPts val="215"/>
-              </a:spcBef>
-              <a:buFont typeface="Arial"/>
-              <a:buChar char="•"/>
-              <a:tabLst>
-                <a:tab pos="698500" algn="l"/>
-              </a:tabLst>
-            </a:pPr>
-            <a:r>
-              <a:rPr sz="2400" spc="5" dirty="0">
-                <a:solidFill>
-                  <a:srgbClr val="444949"/>
-                </a:solidFill>
-                <a:latin typeface="Roboto Light" panose="02000000000000000000" pitchFamily="2" charset="0"/>
-                <a:ea typeface="Roboto Light" panose="02000000000000000000" pitchFamily="2" charset="0"/>
-                <a:cs typeface="Gill Sans MT"/>
-              </a:rPr>
-              <a:t>SSH</a:t>
-            </a:r>
-            <a:r>
-              <a:rPr sz="2400" spc="-25" dirty="0">
-                <a:solidFill>
-                  <a:srgbClr val="444949"/>
-                </a:solidFill>
-                <a:latin typeface="Roboto Light" panose="02000000000000000000" pitchFamily="2" charset="0"/>
-                <a:ea typeface="Roboto Light" panose="02000000000000000000" pitchFamily="2" charset="0"/>
-                <a:cs typeface="Gill Sans MT"/>
-              </a:rPr>
-              <a:t> </a:t>
-            </a:r>
-            <a:r>
-              <a:rPr sz="2400" spc="-120" dirty="0">
-                <a:solidFill>
-                  <a:srgbClr val="444949"/>
-                </a:solidFill>
-                <a:latin typeface="Roboto Light" panose="02000000000000000000" pitchFamily="2" charset="0"/>
-                <a:ea typeface="Roboto Light" panose="02000000000000000000" pitchFamily="2" charset="0"/>
-                <a:cs typeface="Gill Sans MT"/>
-              </a:rPr>
-              <a:t>Key</a:t>
-            </a:r>
-            <a:r>
-              <a:rPr sz="2400" spc="-25" dirty="0">
-                <a:solidFill>
-                  <a:srgbClr val="444949"/>
-                </a:solidFill>
-                <a:latin typeface="Roboto Light" panose="02000000000000000000" pitchFamily="2" charset="0"/>
-                <a:ea typeface="Roboto Light" panose="02000000000000000000" pitchFamily="2" charset="0"/>
-                <a:cs typeface="Gill Sans MT"/>
-              </a:rPr>
-              <a:t> </a:t>
-            </a:r>
-            <a:r>
-              <a:rPr sz="2400" spc="-75" dirty="0">
-                <a:solidFill>
-                  <a:srgbClr val="444949"/>
-                </a:solidFill>
-                <a:latin typeface="Roboto Light" panose="02000000000000000000" pitchFamily="2" charset="0"/>
-                <a:ea typeface="Roboto Light" panose="02000000000000000000" pitchFamily="2" charset="0"/>
-                <a:cs typeface="Gill Sans MT"/>
-              </a:rPr>
-              <a:t>Pair</a:t>
+              <a:t>elasticity)</a:t>
             </a:r>
             <a:endParaRPr sz="2400" dirty="0">
               <a:latin typeface="Roboto Light" panose="02000000000000000000" pitchFamily="2" charset="0"/>
@@ -4305,8 +5239,9 @@
                 <a:spcPct val="100000"/>
               </a:lnSpc>
               <a:spcBef>
-                <a:spcPts val="635"/>
+                <a:spcPts val="660"/>
               </a:spcBef>
+              <a:buSzPct val="101818"/>
               <a:buFont typeface="Arial"/>
               <a:buChar char="•"/>
               <a:tabLst>
@@ -4314,149 +5249,191 @@
               </a:tabLst>
             </a:pPr>
             <a:r>
-              <a:rPr sz="2800" spc="-40" dirty="0">
-                <a:solidFill>
-                  <a:srgbClr val="444949"/>
-                </a:solidFill>
-                <a:latin typeface="Roboto Light" panose="02000000000000000000" pitchFamily="2" charset="0"/>
-                <a:ea typeface="Roboto Light" panose="02000000000000000000" pitchFamily="2" charset="0"/>
-                <a:cs typeface="Gill Sans MT"/>
-              </a:rPr>
-              <a:t>Min</a:t>
-            </a:r>
-            <a:r>
-              <a:rPr sz="2800" spc="-5" dirty="0">
-                <a:solidFill>
-                  <a:srgbClr val="444949"/>
-                </a:solidFill>
-                <a:latin typeface="Roboto Light" panose="02000000000000000000" pitchFamily="2" charset="0"/>
-                <a:ea typeface="Roboto Light" panose="02000000000000000000" pitchFamily="2" charset="0"/>
-                <a:cs typeface="Gill Sans MT"/>
-              </a:rPr>
-              <a:t> </a:t>
-            </a:r>
-            <a:r>
-              <a:rPr sz="2800" spc="-45" dirty="0">
-                <a:solidFill>
-                  <a:srgbClr val="444949"/>
-                </a:solidFill>
-                <a:latin typeface="Roboto Light" panose="02000000000000000000" pitchFamily="2" charset="0"/>
-                <a:ea typeface="Roboto Light" panose="02000000000000000000" pitchFamily="2" charset="0"/>
-                <a:cs typeface="Gill Sans MT"/>
-              </a:rPr>
-              <a:t>Size</a:t>
-            </a:r>
-            <a:r>
-              <a:rPr sz="2800" spc="-10" dirty="0">
-                <a:solidFill>
-                  <a:srgbClr val="444949"/>
-                </a:solidFill>
-                <a:latin typeface="Roboto Light" panose="02000000000000000000" pitchFamily="2" charset="0"/>
-                <a:ea typeface="Roboto Light" panose="02000000000000000000" pitchFamily="2" charset="0"/>
-                <a:cs typeface="Gill Sans MT"/>
-              </a:rPr>
-              <a:t> </a:t>
-            </a:r>
-            <a:r>
-              <a:rPr sz="2800" dirty="0">
-                <a:solidFill>
-                  <a:srgbClr val="444949"/>
-                </a:solidFill>
-                <a:latin typeface="Roboto Light" panose="02000000000000000000" pitchFamily="2" charset="0"/>
-                <a:ea typeface="Roboto Light" panose="02000000000000000000" pitchFamily="2" charset="0"/>
-                <a:cs typeface="Gill Sans MT"/>
-              </a:rPr>
-              <a:t>/ </a:t>
-            </a:r>
-            <a:r>
-              <a:rPr sz="2800" spc="-20" dirty="0">
-                <a:solidFill>
-                  <a:srgbClr val="444949"/>
-                </a:solidFill>
-                <a:latin typeface="Roboto Light" panose="02000000000000000000" pitchFamily="2" charset="0"/>
-                <a:ea typeface="Roboto Light" panose="02000000000000000000" pitchFamily="2" charset="0"/>
-                <a:cs typeface="Gill Sans MT"/>
-              </a:rPr>
-              <a:t>Max</a:t>
-            </a:r>
-            <a:r>
-              <a:rPr sz="2800" spc="-15" dirty="0">
-                <a:solidFill>
-                  <a:srgbClr val="444949"/>
-                </a:solidFill>
-                <a:latin typeface="Roboto Light" panose="02000000000000000000" pitchFamily="2" charset="0"/>
-                <a:ea typeface="Roboto Light" panose="02000000000000000000" pitchFamily="2" charset="0"/>
-                <a:cs typeface="Gill Sans MT"/>
-              </a:rPr>
-              <a:t> </a:t>
-            </a:r>
-            <a:r>
-              <a:rPr sz="2800" spc="-45" dirty="0">
-                <a:solidFill>
-                  <a:srgbClr val="444949"/>
-                </a:solidFill>
-                <a:latin typeface="Roboto Light" panose="02000000000000000000" pitchFamily="2" charset="0"/>
-                <a:ea typeface="Roboto Light" panose="02000000000000000000" pitchFamily="2" charset="0"/>
-                <a:cs typeface="Gill Sans MT"/>
-              </a:rPr>
-              <a:t>Size</a:t>
-            </a:r>
-            <a:r>
-              <a:rPr sz="2800" spc="-10" dirty="0">
-                <a:solidFill>
-                  <a:srgbClr val="444949"/>
-                </a:solidFill>
-                <a:latin typeface="Roboto Light" panose="02000000000000000000" pitchFamily="2" charset="0"/>
-                <a:ea typeface="Roboto Light" panose="02000000000000000000" pitchFamily="2" charset="0"/>
-                <a:cs typeface="Gill Sans MT"/>
-              </a:rPr>
-              <a:t> </a:t>
-            </a:r>
-            <a:r>
-              <a:rPr sz="2800" dirty="0">
-                <a:solidFill>
-                  <a:srgbClr val="444949"/>
-                </a:solidFill>
-                <a:latin typeface="Roboto Light" panose="02000000000000000000" pitchFamily="2" charset="0"/>
-                <a:ea typeface="Roboto Light" panose="02000000000000000000" pitchFamily="2" charset="0"/>
-                <a:cs typeface="Gill Sans MT"/>
-              </a:rPr>
-              <a:t>/ </a:t>
-            </a:r>
-            <a:r>
-              <a:rPr sz="2800" spc="-75" dirty="0">
-                <a:solidFill>
-                  <a:srgbClr val="444949"/>
-                </a:solidFill>
-                <a:latin typeface="Roboto Light" panose="02000000000000000000" pitchFamily="2" charset="0"/>
-                <a:ea typeface="Roboto Light" panose="02000000000000000000" pitchFamily="2" charset="0"/>
-                <a:cs typeface="Gill Sans MT"/>
-              </a:rPr>
-              <a:t>Initial</a:t>
-            </a:r>
-            <a:r>
-              <a:rPr sz="2800" spc="-10" dirty="0">
-                <a:solidFill>
-                  <a:srgbClr val="444949"/>
-                </a:solidFill>
-                <a:latin typeface="Roboto Light" panose="02000000000000000000" pitchFamily="2" charset="0"/>
-                <a:ea typeface="Roboto Light" panose="02000000000000000000" pitchFamily="2" charset="0"/>
-                <a:cs typeface="Gill Sans MT"/>
-              </a:rPr>
-              <a:t> </a:t>
-            </a:r>
-            <a:r>
-              <a:rPr sz="2800" spc="-50" dirty="0">
-                <a:solidFill>
-                  <a:srgbClr val="444949"/>
-                </a:solidFill>
-                <a:latin typeface="Roboto Light" panose="02000000000000000000" pitchFamily="2" charset="0"/>
-                <a:ea typeface="Roboto Light" panose="02000000000000000000" pitchFamily="2" charset="0"/>
-                <a:cs typeface="Gill Sans MT"/>
-              </a:rPr>
-              <a:t>Capacity</a:t>
-            </a:r>
-            <a:endParaRPr sz="2800" dirty="0">
+              <a:rPr sz="4125" spc="-44" baseline="1010" dirty="0">
+                <a:solidFill>
+                  <a:srgbClr val="444949"/>
+                </a:solidFill>
+                <a:latin typeface="Roboto Light" panose="02000000000000000000" pitchFamily="2" charset="0"/>
+                <a:ea typeface="Roboto Light" panose="02000000000000000000" pitchFamily="2" charset="0"/>
+                <a:cs typeface="Gill Sans MT"/>
+              </a:rPr>
+              <a:t>Scalability</a:t>
+            </a:r>
+            <a:r>
+              <a:rPr sz="4125" spc="15" baseline="1010" dirty="0">
+                <a:solidFill>
+                  <a:srgbClr val="444949"/>
+                </a:solidFill>
+                <a:latin typeface="Roboto Light" panose="02000000000000000000" pitchFamily="2" charset="0"/>
+                <a:ea typeface="Roboto Light" panose="02000000000000000000" pitchFamily="2" charset="0"/>
+                <a:cs typeface="Gill Sans MT"/>
+              </a:rPr>
+              <a:t> </a:t>
+            </a:r>
+            <a:r>
+              <a:rPr sz="4125" spc="-112" baseline="1010" dirty="0">
+                <a:solidFill>
+                  <a:srgbClr val="444949"/>
+                </a:solidFill>
+                <a:latin typeface="Roboto Light" panose="02000000000000000000" pitchFamily="2" charset="0"/>
+                <a:ea typeface="Roboto Light" panose="02000000000000000000" pitchFamily="2" charset="0"/>
+                <a:cs typeface="Gill Sans MT"/>
+              </a:rPr>
+              <a:t>is</a:t>
+            </a:r>
+            <a:r>
+              <a:rPr sz="4125" baseline="1010" dirty="0">
+                <a:solidFill>
+                  <a:srgbClr val="444949"/>
+                </a:solidFill>
+                <a:latin typeface="Roboto Light" panose="02000000000000000000" pitchFamily="2" charset="0"/>
+                <a:ea typeface="Roboto Light" panose="02000000000000000000" pitchFamily="2" charset="0"/>
+                <a:cs typeface="Gill Sans MT"/>
+              </a:rPr>
+              <a:t> </a:t>
+            </a:r>
+            <a:r>
+              <a:rPr sz="4125" spc="-67" baseline="1010" dirty="0">
+                <a:solidFill>
+                  <a:srgbClr val="444949"/>
+                </a:solidFill>
+                <a:latin typeface="Roboto Light" panose="02000000000000000000" pitchFamily="2" charset="0"/>
+                <a:ea typeface="Roboto Light" panose="02000000000000000000" pitchFamily="2" charset="0"/>
+                <a:cs typeface="Gill Sans MT"/>
+              </a:rPr>
+              <a:t>linked</a:t>
+            </a:r>
+            <a:r>
+              <a:rPr sz="4125" baseline="1010" dirty="0">
+                <a:solidFill>
+                  <a:srgbClr val="444949"/>
+                </a:solidFill>
+                <a:latin typeface="Roboto Light" panose="02000000000000000000" pitchFamily="2" charset="0"/>
+                <a:ea typeface="Roboto Light" panose="02000000000000000000" pitchFamily="2" charset="0"/>
+                <a:cs typeface="Gill Sans MT"/>
+              </a:rPr>
+              <a:t> </a:t>
+            </a:r>
+            <a:r>
+              <a:rPr sz="4125" spc="-30" baseline="1010" dirty="0">
+                <a:solidFill>
+                  <a:srgbClr val="444949"/>
+                </a:solidFill>
+                <a:latin typeface="Roboto Light" panose="02000000000000000000" pitchFamily="2" charset="0"/>
+                <a:ea typeface="Roboto Light" panose="02000000000000000000" pitchFamily="2" charset="0"/>
+                <a:cs typeface="Gill Sans MT"/>
+              </a:rPr>
+              <a:t>but</a:t>
+            </a:r>
+            <a:r>
+              <a:rPr sz="4125" spc="22" baseline="1010" dirty="0">
+                <a:solidFill>
+                  <a:srgbClr val="444949"/>
+                </a:solidFill>
+                <a:latin typeface="Roboto Light" panose="02000000000000000000" pitchFamily="2" charset="0"/>
+                <a:ea typeface="Roboto Light" panose="02000000000000000000" pitchFamily="2" charset="0"/>
+                <a:cs typeface="Gill Sans MT"/>
+              </a:rPr>
+              <a:t> </a:t>
+            </a:r>
+            <a:r>
+              <a:rPr sz="4125" spc="-60" baseline="1010" dirty="0">
+                <a:solidFill>
+                  <a:srgbClr val="444949"/>
+                </a:solidFill>
+                <a:latin typeface="Roboto Light" panose="02000000000000000000" pitchFamily="2" charset="0"/>
+                <a:ea typeface="Roboto Light" panose="02000000000000000000" pitchFamily="2" charset="0"/>
+                <a:cs typeface="Gill Sans MT"/>
+              </a:rPr>
+              <a:t>different</a:t>
+            </a:r>
+            <a:r>
+              <a:rPr sz="4125" spc="15" baseline="1010" dirty="0">
+                <a:solidFill>
+                  <a:srgbClr val="444949"/>
+                </a:solidFill>
+                <a:latin typeface="Roboto Light" panose="02000000000000000000" pitchFamily="2" charset="0"/>
+                <a:ea typeface="Roboto Light" panose="02000000000000000000" pitchFamily="2" charset="0"/>
+                <a:cs typeface="Gill Sans MT"/>
+              </a:rPr>
+              <a:t> </a:t>
+            </a:r>
+            <a:r>
+              <a:rPr sz="4125" spc="-52" baseline="1010" dirty="0">
+                <a:solidFill>
+                  <a:srgbClr val="444949"/>
+                </a:solidFill>
+                <a:latin typeface="Roboto Light" panose="02000000000000000000" pitchFamily="2" charset="0"/>
+                <a:ea typeface="Roboto Light" panose="02000000000000000000" pitchFamily="2" charset="0"/>
+                <a:cs typeface="Gill Sans MT"/>
+              </a:rPr>
+              <a:t>to</a:t>
+            </a:r>
+            <a:r>
+              <a:rPr sz="4125" spc="15" baseline="1010" dirty="0">
+                <a:solidFill>
+                  <a:srgbClr val="444949"/>
+                </a:solidFill>
+                <a:latin typeface="Roboto Light" panose="02000000000000000000" pitchFamily="2" charset="0"/>
+                <a:ea typeface="Roboto Light" panose="02000000000000000000" pitchFamily="2" charset="0"/>
+                <a:cs typeface="Gill Sans MT"/>
+              </a:rPr>
+              <a:t> </a:t>
+            </a:r>
+            <a:r>
+              <a:rPr sz="4125" spc="-22" baseline="1010" dirty="0">
+                <a:solidFill>
+                  <a:srgbClr val="444949"/>
+                </a:solidFill>
+                <a:latin typeface="Roboto Light" panose="02000000000000000000" pitchFamily="2" charset="0"/>
+                <a:ea typeface="Roboto Light" panose="02000000000000000000" pitchFamily="2" charset="0"/>
+                <a:cs typeface="Gill Sans MT"/>
+              </a:rPr>
+              <a:t>High</a:t>
+            </a:r>
+            <a:r>
+              <a:rPr sz="4125" spc="-240" baseline="1010" dirty="0">
+                <a:solidFill>
+                  <a:srgbClr val="444949"/>
+                </a:solidFill>
+                <a:latin typeface="Roboto Light" panose="02000000000000000000" pitchFamily="2" charset="0"/>
+                <a:ea typeface="Roboto Light" panose="02000000000000000000" pitchFamily="2" charset="0"/>
+                <a:cs typeface="Gill Sans MT"/>
+              </a:rPr>
+              <a:t> </a:t>
+            </a:r>
+            <a:r>
+              <a:rPr sz="4125" spc="-60" baseline="1010" dirty="0">
+                <a:solidFill>
+                  <a:srgbClr val="444949"/>
+                </a:solidFill>
+                <a:latin typeface="Roboto Light" panose="02000000000000000000" pitchFamily="2" charset="0"/>
+                <a:ea typeface="Roboto Light" panose="02000000000000000000" pitchFamily="2" charset="0"/>
+                <a:cs typeface="Gill Sans MT"/>
+              </a:rPr>
+              <a:t>Availability</a:t>
+            </a:r>
+            <a:endParaRPr sz="4125" baseline="1010" dirty="0">
+              <a:latin typeface="Roboto Light" panose="02000000000000000000" pitchFamily="2" charset="0"/>
+              <a:ea typeface="Roboto Light" panose="02000000000000000000" pitchFamily="2" charset="0"/>
+              <a:cs typeface="Gill Sans MT"/>
+            </a:endParaRPr>
+          </a:p>
+          <a:p>
+            <a:pPr>
+              <a:lnSpc>
+                <a:spcPct val="100000"/>
+              </a:lnSpc>
+              <a:spcBef>
+                <a:spcPts val="25"/>
+              </a:spcBef>
+              <a:buClr>
+                <a:srgbClr val="444949"/>
+              </a:buClr>
+              <a:buFont typeface="Arial"/>
+              <a:buChar char="•"/>
+            </a:pPr>
+            <a:endParaRPr sz="4000" dirty="0">
               <a:latin typeface="Roboto Light" panose="02000000000000000000" pitchFamily="2" charset="0"/>
               <a:ea typeface="Roboto Light" panose="02000000000000000000" pitchFamily="2" charset="0"/>
               <a:cs typeface="Gill Sans MT"/>
@@ -4467,9 +5444,6 @@
               <a:lnSpc>
                 <a:spcPct val="100000"/>
               </a:lnSpc>
-              <a:spcBef>
-                <a:spcPts val="645"/>
-              </a:spcBef>
               <a:buFont typeface="Arial"/>
               <a:buChar char="•"/>
               <a:tabLst>
@@ -4477,6 +5451,171 @@
               </a:tabLst>
             </a:pPr>
             <a:r>
+              <a:rPr sz="2800" spc="-95" dirty="0">
+                <a:solidFill>
+                  <a:srgbClr val="444949"/>
+                </a:solidFill>
+                <a:latin typeface="Roboto Light" panose="02000000000000000000" pitchFamily="2" charset="0"/>
+                <a:ea typeface="Roboto Light" panose="02000000000000000000" pitchFamily="2" charset="0"/>
+                <a:cs typeface="Gill Sans MT"/>
+              </a:rPr>
+              <a:t>Let’s</a:t>
+            </a:r>
+            <a:r>
+              <a:rPr sz="2800" spc="-10" dirty="0">
+                <a:solidFill>
+                  <a:srgbClr val="444949"/>
+                </a:solidFill>
+                <a:latin typeface="Roboto Light" panose="02000000000000000000" pitchFamily="2" charset="0"/>
+                <a:ea typeface="Roboto Light" panose="02000000000000000000" pitchFamily="2" charset="0"/>
+                <a:cs typeface="Gill Sans MT"/>
+              </a:rPr>
+              <a:t> </a:t>
+            </a:r>
+            <a:r>
+              <a:rPr sz="2800" dirty="0">
+                <a:solidFill>
+                  <a:srgbClr val="444949"/>
+                </a:solidFill>
+                <a:latin typeface="Roboto Light" panose="02000000000000000000" pitchFamily="2" charset="0"/>
+                <a:ea typeface="Roboto Light" panose="02000000000000000000" pitchFamily="2" charset="0"/>
+                <a:cs typeface="Gill Sans MT"/>
+              </a:rPr>
+              <a:t>deep</a:t>
+            </a:r>
+            <a:r>
+              <a:rPr sz="2800" spc="-5" dirty="0">
+                <a:solidFill>
+                  <a:srgbClr val="444949"/>
+                </a:solidFill>
+                <a:latin typeface="Roboto Light" panose="02000000000000000000" pitchFamily="2" charset="0"/>
+                <a:ea typeface="Roboto Light" panose="02000000000000000000" pitchFamily="2" charset="0"/>
+                <a:cs typeface="Gill Sans MT"/>
+              </a:rPr>
+              <a:t> </a:t>
+            </a:r>
+            <a:r>
+              <a:rPr sz="2800" spc="-45" dirty="0">
+                <a:solidFill>
+                  <a:srgbClr val="444949"/>
+                </a:solidFill>
+                <a:latin typeface="Roboto Light" panose="02000000000000000000" pitchFamily="2" charset="0"/>
+                <a:ea typeface="Roboto Light" panose="02000000000000000000" pitchFamily="2" charset="0"/>
+                <a:cs typeface="Gill Sans MT"/>
+              </a:rPr>
+              <a:t>dive</a:t>
+            </a:r>
+            <a:r>
+              <a:rPr sz="2800" spc="-10" dirty="0">
+                <a:solidFill>
+                  <a:srgbClr val="444949"/>
+                </a:solidFill>
+                <a:latin typeface="Roboto Light" panose="02000000000000000000" pitchFamily="2" charset="0"/>
+                <a:ea typeface="Roboto Light" panose="02000000000000000000" pitchFamily="2" charset="0"/>
+                <a:cs typeface="Gill Sans MT"/>
+              </a:rPr>
+              <a:t> </a:t>
+            </a:r>
+            <a:r>
+              <a:rPr sz="2800" spc="-60" dirty="0">
+                <a:solidFill>
+                  <a:srgbClr val="444949"/>
+                </a:solidFill>
+                <a:latin typeface="Roboto Light" panose="02000000000000000000" pitchFamily="2" charset="0"/>
+                <a:ea typeface="Roboto Light" panose="02000000000000000000" pitchFamily="2" charset="0"/>
+                <a:cs typeface="Gill Sans MT"/>
+              </a:rPr>
+              <a:t>into</a:t>
+            </a:r>
+            <a:r>
+              <a:rPr sz="2800" spc="-5" dirty="0">
+                <a:solidFill>
+                  <a:srgbClr val="444949"/>
+                </a:solidFill>
+                <a:latin typeface="Roboto Light" panose="02000000000000000000" pitchFamily="2" charset="0"/>
+                <a:ea typeface="Roboto Light" panose="02000000000000000000" pitchFamily="2" charset="0"/>
+                <a:cs typeface="Gill Sans MT"/>
+              </a:rPr>
+              <a:t> </a:t>
+            </a:r>
+            <a:r>
+              <a:rPr sz="2800" spc="-40" dirty="0">
+                <a:solidFill>
+                  <a:srgbClr val="444949"/>
+                </a:solidFill>
+                <a:latin typeface="Roboto Light" panose="02000000000000000000" pitchFamily="2" charset="0"/>
+                <a:ea typeface="Roboto Light" panose="02000000000000000000" pitchFamily="2" charset="0"/>
+                <a:cs typeface="Gill Sans MT"/>
+              </a:rPr>
+              <a:t>the</a:t>
+            </a:r>
+            <a:r>
+              <a:rPr sz="2800" spc="-5" dirty="0">
+                <a:solidFill>
+                  <a:srgbClr val="444949"/>
+                </a:solidFill>
+                <a:latin typeface="Roboto Light" panose="02000000000000000000" pitchFamily="2" charset="0"/>
+                <a:ea typeface="Roboto Light" panose="02000000000000000000" pitchFamily="2" charset="0"/>
+                <a:cs typeface="Gill Sans MT"/>
+              </a:rPr>
+              <a:t> </a:t>
+            </a:r>
+            <a:r>
+              <a:rPr sz="2800" spc="-70" dirty="0">
+                <a:solidFill>
+                  <a:srgbClr val="444949"/>
+                </a:solidFill>
+                <a:latin typeface="Roboto Light" panose="02000000000000000000" pitchFamily="2" charset="0"/>
+                <a:ea typeface="Roboto Light" panose="02000000000000000000" pitchFamily="2" charset="0"/>
+                <a:cs typeface="Gill Sans MT"/>
+              </a:rPr>
+              <a:t>distinction,</a:t>
+            </a:r>
+            <a:r>
+              <a:rPr sz="2800" spc="-225" dirty="0">
+                <a:solidFill>
+                  <a:srgbClr val="444949"/>
+                </a:solidFill>
+                <a:latin typeface="Roboto Light" panose="02000000000000000000" pitchFamily="2" charset="0"/>
+                <a:ea typeface="Roboto Light" panose="02000000000000000000" pitchFamily="2" charset="0"/>
+                <a:cs typeface="Gill Sans MT"/>
+              </a:rPr>
+              <a:t> </a:t>
+            </a:r>
+            <a:r>
+              <a:rPr sz="2800" spc="-50" dirty="0">
+                <a:solidFill>
+                  <a:srgbClr val="444949"/>
+                </a:solidFill>
+                <a:latin typeface="Roboto Light" panose="02000000000000000000" pitchFamily="2" charset="0"/>
+                <a:ea typeface="Roboto Light" panose="02000000000000000000" pitchFamily="2" charset="0"/>
+                <a:cs typeface="Gill Sans MT"/>
+              </a:rPr>
+              <a:t>using</a:t>
+            </a:r>
+            <a:r>
+              <a:rPr sz="2800" spc="5" dirty="0">
+                <a:solidFill>
+                  <a:srgbClr val="444949"/>
+                </a:solidFill>
+                <a:latin typeface="Roboto Light" panose="02000000000000000000" pitchFamily="2" charset="0"/>
+                <a:ea typeface="Roboto Light" panose="02000000000000000000" pitchFamily="2" charset="0"/>
+                <a:cs typeface="Gill Sans MT"/>
+              </a:rPr>
+              <a:t> </a:t>
+            </a:r>
+            <a:r>
+              <a:rPr sz="2800" dirty="0">
+                <a:solidFill>
+                  <a:srgbClr val="444949"/>
+                </a:solidFill>
+                <a:latin typeface="Roboto Light" panose="02000000000000000000" pitchFamily="2" charset="0"/>
+                <a:ea typeface="Roboto Light" panose="02000000000000000000" pitchFamily="2" charset="0"/>
+                <a:cs typeface="Gill Sans MT"/>
+              </a:rPr>
+              <a:t>a </a:t>
+            </a:r>
+            <a:r>
               <a:rPr sz="2800" spc="-65" dirty="0">
                 <a:solidFill>
                   <a:srgbClr val="444949"/>
@@ -4485,7 +5624,51 @@
                 <a:ea typeface="Roboto Light" panose="02000000000000000000" pitchFamily="2" charset="0"/>
                 <a:cs typeface="Gill Sans MT"/>
               </a:rPr>
-              <a:t>Network</a:t>
+              <a:t>call</a:t>
+            </a:r>
+            <a:r>
+              <a:rPr sz="2800" dirty="0">
+                <a:solidFill>
+                  <a:srgbClr val="444949"/>
+                </a:solidFill>
+                <a:latin typeface="Roboto Light" panose="02000000000000000000" pitchFamily="2" charset="0"/>
+                <a:ea typeface="Roboto Light" panose="02000000000000000000" pitchFamily="2" charset="0"/>
+                <a:cs typeface="Gill Sans MT"/>
+              </a:rPr>
+              <a:t> </a:t>
+            </a:r>
+            <a:r>
+              <a:rPr sz="2800" spc="-65" dirty="0">
+                <a:solidFill>
+                  <a:srgbClr val="444949"/>
+                </a:solidFill>
+                <a:latin typeface="Roboto Light" panose="02000000000000000000" pitchFamily="2" charset="0"/>
+                <a:ea typeface="Roboto Light" panose="02000000000000000000" pitchFamily="2" charset="0"/>
+                <a:cs typeface="Gill Sans MT"/>
+              </a:rPr>
+              <a:t>center</a:t>
+            </a:r>
+            <a:r>
+              <a:rPr sz="2800" dirty="0">
+                <a:solidFill>
+                  <a:srgbClr val="444949"/>
+                </a:solidFill>
+                <a:latin typeface="Roboto Light" panose="02000000000000000000" pitchFamily="2" charset="0"/>
+                <a:ea typeface="Roboto Light" panose="02000000000000000000" pitchFamily="2" charset="0"/>
+                <a:cs typeface="Gill Sans MT"/>
+              </a:rPr>
+              <a:t> </a:t>
+            </a:r>
+            <a:r>
+              <a:rPr sz="2800" spc="-45" dirty="0">
+                <a:solidFill>
+                  <a:srgbClr val="444949"/>
+                </a:solidFill>
+                <a:latin typeface="Roboto Light" panose="02000000000000000000" pitchFamily="2" charset="0"/>
+                <a:ea typeface="Roboto Light" panose="02000000000000000000" pitchFamily="2" charset="0"/>
+                <a:cs typeface="Gill Sans MT"/>
+              </a:rPr>
+              <a:t>as</a:t>
             </a:r>
             <a:r>
               <a:rPr sz="2800" spc="-5" dirty="0">
@@ -4499,90 +5682,26 @@
               <a:t> </a:t>
             </a:r>
             <a:r>
-              <a:rPr sz="2800" spc="210" dirty="0">
-                <a:solidFill>
-                  <a:srgbClr val="444949"/>
-                </a:solidFill>
-                <a:latin typeface="Roboto Light" panose="02000000000000000000" pitchFamily="2" charset="0"/>
-                <a:ea typeface="Roboto Light" panose="02000000000000000000" pitchFamily="2" charset="0"/>
-                <a:cs typeface="Gill Sans MT"/>
-              </a:rPr>
-              <a:t>+</a:t>
-            </a:r>
-            <a:r>
-              <a:rPr sz="2800" spc="-10" dirty="0">
-                <a:solidFill>
-                  <a:srgbClr val="444949"/>
-                </a:solidFill>
-                <a:latin typeface="Roboto Light" panose="02000000000000000000" pitchFamily="2" charset="0"/>
-                <a:ea typeface="Roboto Light" panose="02000000000000000000" pitchFamily="2" charset="0"/>
-                <a:cs typeface="Gill Sans MT"/>
-              </a:rPr>
-              <a:t> </a:t>
-            </a:r>
-            <a:r>
-              <a:rPr sz="2800" spc="-30" dirty="0">
-                <a:solidFill>
-                  <a:srgbClr val="444949"/>
-                </a:solidFill>
-                <a:latin typeface="Roboto Light" panose="02000000000000000000" pitchFamily="2" charset="0"/>
-                <a:ea typeface="Roboto Light" panose="02000000000000000000" pitchFamily="2" charset="0"/>
-                <a:cs typeface="Gill Sans MT"/>
-              </a:rPr>
-              <a:t>Subnets</a:t>
-            </a:r>
-            <a:r>
-              <a:rPr sz="2800" spc="-10" dirty="0">
-                <a:solidFill>
-                  <a:srgbClr val="444949"/>
-                </a:solidFill>
-                <a:latin typeface="Roboto Light" panose="02000000000000000000" pitchFamily="2" charset="0"/>
-                <a:ea typeface="Roboto Light" panose="02000000000000000000" pitchFamily="2" charset="0"/>
-                <a:cs typeface="Gill Sans MT"/>
-              </a:rPr>
-              <a:t> </a:t>
-            </a:r>
-            <a:r>
-              <a:rPr sz="2800" spc="-55" dirty="0">
-                <a:solidFill>
-                  <a:srgbClr val="444949"/>
-                </a:solidFill>
-                <a:latin typeface="Roboto Light" panose="02000000000000000000" pitchFamily="2" charset="0"/>
-                <a:ea typeface="Roboto Light" panose="02000000000000000000" pitchFamily="2" charset="0"/>
-                <a:cs typeface="Gill Sans MT"/>
-              </a:rPr>
-              <a:t>Information</a:t>
-            </a:r>
-            <a:endParaRPr sz="2800" dirty="0">
-              <a:latin typeface="Roboto Light" panose="02000000000000000000" pitchFamily="2" charset="0"/>
-              <a:ea typeface="Roboto Light" panose="02000000000000000000" pitchFamily="2" charset="0"/>
-              <a:cs typeface="Gill Sans MT"/>
-            </a:endParaRPr>
-          </a:p>
-          <a:p>
-            <a:pPr marL="241300" indent="-228600">
-              <a:lnSpc>
-                <a:spcPct val="100000"/>
-              </a:lnSpc>
-              <a:spcBef>
-                <a:spcPts val="720"/>
-              </a:spcBef>
-              <a:buFont typeface="Arial"/>
-              <a:buChar char="•"/>
-              <a:tabLst>
-                <a:tab pos="241300" algn="l"/>
-              </a:tabLst>
-            </a:pPr>
-            <a:r>
-              <a:rPr sz="2800" spc="-25" dirty="0">
-                <a:solidFill>
-                  <a:srgbClr val="444949"/>
-                </a:solidFill>
-                <a:latin typeface="Roboto Light" panose="02000000000000000000" pitchFamily="2" charset="0"/>
-                <a:ea typeface="Roboto Light" panose="02000000000000000000" pitchFamily="2" charset="0"/>
-                <a:cs typeface="Gill Sans MT"/>
-              </a:rPr>
-              <a:t>Load</a:t>
+              <a:rPr sz="2800" spc="-15" dirty="0">
+                <a:solidFill>
+                  <a:srgbClr val="444949"/>
+                </a:solidFill>
+                <a:latin typeface="Roboto Light" panose="02000000000000000000" pitchFamily="2" charset="0"/>
+                <a:ea typeface="Roboto Light" panose="02000000000000000000" pitchFamily="2" charset="0"/>
+                <a:cs typeface="Gill Sans MT"/>
+              </a:rPr>
+              <a:t>an</a:t>
+            </a:r>
+            <a:r>
+              <a:rPr sz="2800" dirty="0">
+                <a:solidFill>
+                  <a:srgbClr val="444949"/>
+                </a:solidFill>
+                <a:latin typeface="Roboto Light" panose="02000000000000000000" pitchFamily="2" charset="0"/>
+                <a:ea typeface="Roboto Light" panose="02000000000000000000" pitchFamily="2" charset="0"/>
+                <a:cs typeface="Gill Sans MT"/>
+              </a:rPr>
+              <a:t> </a:t>
             </a:r>
             <a:r>
               <a:rPr sz="2800" spc="-20" dirty="0">
@@ -4593,93 +5712,7 @@
                 <a:ea typeface="Roboto Light" panose="02000000000000000000" pitchFamily="2" charset="0"/>
                 <a:cs typeface="Gill Sans MT"/>
               </a:rPr>
-              <a:t> </a:t>
-            </a:r>
-            <a:r>
-              <a:rPr sz="2800" spc="-60" dirty="0">
-                <a:solidFill>
-                  <a:srgbClr val="444949"/>
-                </a:solidFill>
-                <a:latin typeface="Roboto Light" panose="02000000000000000000" pitchFamily="2" charset="0"/>
-                <a:ea typeface="Roboto Light" panose="02000000000000000000" pitchFamily="2" charset="0"/>
-                <a:cs typeface="Gill Sans MT"/>
-              </a:rPr>
-              <a:t>Balancer</a:t>
-            </a:r>
-            <a:r>
-              <a:rPr sz="2800" spc="-5" dirty="0">
-                <a:solidFill>
-                  <a:srgbClr val="444949"/>
-                </a:solidFill>
-                <a:latin typeface="Roboto Light" panose="02000000000000000000" pitchFamily="2" charset="0"/>
-                <a:ea typeface="Roboto Light" panose="02000000000000000000" pitchFamily="2" charset="0"/>
-                <a:cs typeface="Gill Sans MT"/>
-              </a:rPr>
-              <a:t> </a:t>
-            </a:r>
-            <a:r>
-              <a:rPr sz="2800" spc="-55" dirty="0">
-                <a:solidFill>
-                  <a:srgbClr val="444949"/>
-                </a:solidFill>
-                <a:latin typeface="Roboto Light" panose="02000000000000000000" pitchFamily="2" charset="0"/>
-                <a:ea typeface="Roboto Light" panose="02000000000000000000" pitchFamily="2" charset="0"/>
-                <a:cs typeface="Gill Sans MT"/>
-              </a:rPr>
-              <a:t>Information</a:t>
-            </a:r>
-            <a:endParaRPr sz="2800" dirty="0">
-              <a:latin typeface="Roboto Light" panose="02000000000000000000" pitchFamily="2" charset="0"/>
-              <a:ea typeface="Roboto Light" panose="02000000000000000000" pitchFamily="2" charset="0"/>
-              <a:cs typeface="Gill Sans MT"/>
-            </a:endParaRPr>
-          </a:p>
-          <a:p>
-            <a:pPr marL="241300" indent="-228600">
-              <a:lnSpc>
-                <a:spcPct val="100000"/>
-              </a:lnSpc>
-              <a:spcBef>
-                <a:spcPts val="650"/>
-              </a:spcBef>
-              <a:buFont typeface="Arial"/>
-              <a:buChar char="•"/>
-              <a:tabLst>
-                <a:tab pos="241300" algn="l"/>
-              </a:tabLst>
-            </a:pPr>
-            <a:r>
-              <a:rPr sz="2800" spc="-40" dirty="0">
-                <a:solidFill>
-                  <a:srgbClr val="444949"/>
-                </a:solidFill>
-                <a:latin typeface="Roboto Light" panose="02000000000000000000" pitchFamily="2" charset="0"/>
-                <a:ea typeface="Roboto Light" panose="02000000000000000000" pitchFamily="2" charset="0"/>
-                <a:cs typeface="Gill Sans MT"/>
-              </a:rPr>
-              <a:t>Scaling</a:t>
-            </a:r>
-            <a:r>
-              <a:rPr sz="2800" spc="-15" dirty="0">
-                <a:solidFill>
-                  <a:srgbClr val="444949"/>
-                </a:solidFill>
-                <a:latin typeface="Roboto Light" panose="02000000000000000000" pitchFamily="2" charset="0"/>
-                <a:ea typeface="Roboto Light" panose="02000000000000000000" pitchFamily="2" charset="0"/>
-                <a:cs typeface="Gill Sans MT"/>
-              </a:rPr>
-              <a:t> </a:t>
-            </a:r>
-            <a:r>
-              <a:rPr sz="2800" spc="-80" dirty="0">
-                <a:solidFill>
-                  <a:srgbClr val="444949"/>
-                </a:solidFill>
-                <a:latin typeface="Roboto Light" panose="02000000000000000000" pitchFamily="2" charset="0"/>
-                <a:ea typeface="Roboto Light" panose="02000000000000000000" pitchFamily="2" charset="0"/>
-                <a:cs typeface="Gill Sans MT"/>
-              </a:rPr>
-              <a:t>Policies</a:t>
+              <a:t>example</a:t>
             </a:r>
             <a:endParaRPr sz="2800" dirty="0">
               <a:latin typeface="Roboto Light" panose="02000000000000000000" pitchFamily="2" charset="0"/>
@@ -4697,7 +5730,7 @@
 </p:sld>
 </file>
 
-<file path=ppt/slides/slide11.xml><?xml version="1.0" encoding="utf-8"?>
+<file path=ppt/slides/slide10.xml><?xml version="1.0" encoding="utf-8"?>
 <p:sld xmlns:a="http://schemas.openxmlformats.org/drawingml/2006/main" xmlns:r="http://schemas.openxmlformats.org/officeDocument/2006/relationships" xmlns:p="http://schemas.openxmlformats.org/presentationml/2006/main">
   <p:cSld>
     <p:spTree>
@@ -7336,7 +8369,7 @@
 </p:sld>
 </file>
 
-<file path=ppt/slides/slide12.xml><?xml version="1.0" encoding="utf-8"?>
+<file path=ppt/slides/slide11.xml><?xml version="1.0" encoding="utf-8"?>
 <p:sld xmlns:a="http://schemas.openxmlformats.org/drawingml/2006/main" xmlns:r="http://schemas.openxmlformats.org/officeDocument/2006/relationships" xmlns:p="http://schemas.openxmlformats.org/presentationml/2006/main">
   <p:cSld>
     <p:spTree>
@@ -8655,7 +9688,7 @@
 </p:sld>
 </file>
 
-<file path=ppt/slides/slide13.xml><?xml version="1.0" encoding="utf-8"?>
+<file path=ppt/slides/slide12.xml><?xml version="1.0" encoding="utf-8"?>
 <p:sld xmlns:a="http://schemas.openxmlformats.org/drawingml/2006/main" xmlns:r="http://schemas.openxmlformats.org/officeDocument/2006/relationships" xmlns:p="http://schemas.openxmlformats.org/presentationml/2006/main">
   <p:cSld>
     <p:spTree>
@@ -10009,7 +11042,7 @@
 </p:sld>
 </file>
 
-<file path=ppt/slides/slide14.xml><?xml version="1.0" encoding="utf-8"?>
+<file path=ppt/slides/slide13.xml><?xml version="1.0" encoding="utf-8"?>
 <p:sld xmlns:a="http://schemas.openxmlformats.org/drawingml/2006/main" xmlns:r="http://schemas.openxmlformats.org/officeDocument/2006/relationships" xmlns:p="http://schemas.openxmlformats.org/presentationml/2006/main">
   <p:cSld>
     <p:spTree>
@@ -13226,7 +14259,7 @@
 </p:sld>
 </file>
 
-<file path=ppt/slides/slide15.xml><?xml version="1.0" encoding="utf-8"?>
+<file path=ppt/slides/slide14.xml><?xml version="1.0" encoding="utf-8"?>
 <p:sld xmlns:a="http://schemas.openxmlformats.org/drawingml/2006/main" xmlns:r="http://schemas.openxmlformats.org/officeDocument/2006/relationships" xmlns:p="http://schemas.openxmlformats.org/presentationml/2006/main">
   <p:cSld>
     <p:spTree>
@@ -15215,7 +16248,7 @@
 </p:sld>
 </file>
 
-<file path=ppt/slides/slide16.xml><?xml version="1.0" encoding="utf-8"?>
+<file path=ppt/slides/slide15.xml><?xml version="1.0" encoding="utf-8"?>
 <p:sld xmlns:a="http://schemas.openxmlformats.org/drawingml/2006/main" xmlns:r="http://schemas.openxmlformats.org/officeDocument/2006/relationships" xmlns:p="http://schemas.openxmlformats.org/presentationml/2006/main">
   <p:cSld>
     <p:spTree>
@@ -18831,7 +19864,7 @@
 </p:sld>
 </file>
 
-<file path=ppt/slides/slide2.xml><?xml version="1.0" encoding="utf-8"?>
+<file path=ppt/slides/slide16.xml><?xml version="1.0" encoding="utf-8"?>
 <p:sld xmlns:a="http://schemas.openxmlformats.org/drawingml/2006/main" xmlns:r="http://schemas.openxmlformats.org/officeDocument/2006/relationships" xmlns:p="http://schemas.openxmlformats.org/presentationml/2006/main">
   <p:cSld>
     <p:spTree>
@@ -18860,8 +19893,8 @@
         </p:nvSpPr>
         <p:spPr>
           <a:xfrm>
-            <a:off x="2283623" y="115569"/>
-            <a:ext cx="6179185" cy="443711"/>
+            <a:off x="1192242" y="0"/>
+            <a:ext cx="9193530" cy="443711"/>
           </a:xfrm>
           <a:prstGeom prst="rect">
             <a:avLst/>
@@ -18880,1274 +19913,60 @@
               <a:spcBef>
                 <a:spcPts val="100"/>
               </a:spcBef>
+              <a:tabLst>
+                <a:tab pos="6644005" algn="l"/>
+              </a:tabLst>
             </a:pPr>
             <a:r>
-              <a:rPr spc="-30" dirty="0">
-                <a:latin typeface="Roboto Light" panose="02000000000000000000" pitchFamily="2" charset="0"/>
-                <a:ea typeface="Roboto Light" panose="02000000000000000000" pitchFamily="2" charset="0"/>
-              </a:rPr>
-              <a:t>S</a:t>
-            </a:r>
-            <a:r>
-              <a:rPr spc="-25" dirty="0">
-                <a:latin typeface="Roboto Light" panose="02000000000000000000" pitchFamily="2" charset="0"/>
-                <a:ea typeface="Roboto Light" panose="02000000000000000000" pitchFamily="2" charset="0"/>
-              </a:rPr>
-              <a:t>c</a:t>
-            </a:r>
-            <a:r>
-              <a:rPr spc="-5" dirty="0">
-                <a:latin typeface="Roboto Light" panose="02000000000000000000" pitchFamily="2" charset="0"/>
-                <a:ea typeface="Roboto Light" panose="02000000000000000000" pitchFamily="2" charset="0"/>
-              </a:rPr>
-              <a:t>a</a:t>
-            </a:r>
-            <a:r>
-              <a:rPr spc="-55" dirty="0">
-                <a:latin typeface="Roboto Light" panose="02000000000000000000" pitchFamily="2" charset="0"/>
-                <a:ea typeface="Roboto Light" panose="02000000000000000000" pitchFamily="2" charset="0"/>
-              </a:rPr>
-              <a:t>l</a:t>
-            </a:r>
-            <a:r>
-              <a:rPr spc="-105" dirty="0">
-                <a:latin typeface="Roboto Light" panose="02000000000000000000" pitchFamily="2" charset="0"/>
-                <a:ea typeface="Roboto Light" panose="02000000000000000000" pitchFamily="2" charset="0"/>
-              </a:rPr>
-              <a:t>a</a:t>
-            </a:r>
-            <a:r>
-              <a:rPr spc="35" dirty="0">
-                <a:latin typeface="Roboto Light" panose="02000000000000000000" pitchFamily="2" charset="0"/>
-                <a:ea typeface="Roboto Light" panose="02000000000000000000" pitchFamily="2" charset="0"/>
-              </a:rPr>
-              <a:t>b</a:t>
-            </a:r>
-            <a:r>
-              <a:rPr spc="-130" dirty="0">
-                <a:latin typeface="Roboto Light" panose="02000000000000000000" pitchFamily="2" charset="0"/>
-                <a:ea typeface="Roboto Light" panose="02000000000000000000" pitchFamily="2" charset="0"/>
-              </a:rPr>
-              <a:t>ili</a:t>
-            </a:r>
-            <a:r>
-              <a:rPr spc="-195" dirty="0">
-                <a:latin typeface="Roboto Light" panose="02000000000000000000" pitchFamily="2" charset="0"/>
-                <a:ea typeface="Roboto Light" panose="02000000000000000000" pitchFamily="2" charset="0"/>
-              </a:rPr>
-              <a:t>t</a:t>
-            </a:r>
-            <a:r>
-              <a:rPr spc="-95" dirty="0">
-                <a:latin typeface="Roboto Light" panose="02000000000000000000" pitchFamily="2" charset="0"/>
-                <a:ea typeface="Roboto Light" panose="02000000000000000000" pitchFamily="2" charset="0"/>
-              </a:rPr>
-              <a:t>y</a:t>
-            </a:r>
-            <a:r>
-              <a:rPr spc="5" dirty="0">
-                <a:latin typeface="Roboto Light" panose="02000000000000000000" pitchFamily="2" charset="0"/>
-                <a:ea typeface="Roboto Light" panose="02000000000000000000" pitchFamily="2" charset="0"/>
-              </a:rPr>
-              <a:t> </a:t>
-            </a:r>
-            <a:r>
-              <a:rPr spc="-45" dirty="0">
-                <a:latin typeface="Roboto Light" panose="02000000000000000000" pitchFamily="2" charset="0"/>
-                <a:ea typeface="Roboto Light" panose="02000000000000000000" pitchFamily="2" charset="0"/>
-              </a:rPr>
-              <a:t>&amp;</a:t>
-            </a:r>
-            <a:r>
-              <a:rPr spc="10" dirty="0">
-                <a:latin typeface="Roboto Light" panose="02000000000000000000" pitchFamily="2" charset="0"/>
-                <a:ea typeface="Roboto Light" panose="02000000000000000000" pitchFamily="2" charset="0"/>
-              </a:rPr>
-              <a:t> </a:t>
-            </a:r>
-            <a:r>
-              <a:rPr spc="-70" dirty="0">
-                <a:latin typeface="Roboto Light" panose="02000000000000000000" pitchFamily="2" charset="0"/>
-                <a:ea typeface="Roboto Light" panose="02000000000000000000" pitchFamily="2" charset="0"/>
-              </a:rPr>
-              <a:t>Hig</a:t>
-            </a:r>
-            <a:r>
-              <a:rPr spc="-45" dirty="0">
-                <a:latin typeface="Roboto Light" panose="02000000000000000000" pitchFamily="2" charset="0"/>
-                <a:ea typeface="Roboto Light" panose="02000000000000000000" pitchFamily="2" charset="0"/>
-              </a:rPr>
-              <a:t>h</a:t>
-            </a:r>
-            <a:r>
-              <a:rPr spc="-260" dirty="0">
-                <a:latin typeface="Roboto Light" panose="02000000000000000000" pitchFamily="2" charset="0"/>
-                <a:ea typeface="Roboto Light" panose="02000000000000000000" pitchFamily="2" charset="0"/>
-              </a:rPr>
-              <a:t> </a:t>
-            </a:r>
-            <a:r>
-              <a:rPr spc="-130" dirty="0">
-                <a:latin typeface="Roboto Light" panose="02000000000000000000" pitchFamily="2" charset="0"/>
-                <a:ea typeface="Roboto Light" panose="02000000000000000000" pitchFamily="2" charset="0"/>
-              </a:rPr>
-              <a:t>A</a:t>
-            </a:r>
-            <a:r>
-              <a:rPr spc="-55" dirty="0">
-                <a:latin typeface="Roboto Light" panose="02000000000000000000" pitchFamily="2" charset="0"/>
-                <a:ea typeface="Roboto Light" panose="02000000000000000000" pitchFamily="2" charset="0"/>
-              </a:rPr>
-              <a:t>v</a:t>
-            </a:r>
-            <a:r>
-              <a:rPr spc="-5" dirty="0">
-                <a:latin typeface="Roboto Light" panose="02000000000000000000" pitchFamily="2" charset="0"/>
-                <a:ea typeface="Roboto Light" panose="02000000000000000000" pitchFamily="2" charset="0"/>
-              </a:rPr>
-              <a:t>a</a:t>
-            </a:r>
-            <a:r>
-              <a:rPr spc="-75" dirty="0">
-                <a:latin typeface="Roboto Light" panose="02000000000000000000" pitchFamily="2" charset="0"/>
-                <a:ea typeface="Roboto Light" panose="02000000000000000000" pitchFamily="2" charset="0"/>
-              </a:rPr>
-              <a:t>il</a:t>
-            </a:r>
-            <a:r>
-              <a:rPr spc="-150" dirty="0">
-                <a:latin typeface="Roboto Light" panose="02000000000000000000" pitchFamily="2" charset="0"/>
-                <a:ea typeface="Roboto Light" panose="02000000000000000000" pitchFamily="2" charset="0"/>
-              </a:rPr>
-              <a:t>a</a:t>
-            </a:r>
-            <a:r>
-              <a:rPr spc="35" dirty="0">
-                <a:latin typeface="Roboto Light" panose="02000000000000000000" pitchFamily="2" charset="0"/>
-                <a:ea typeface="Roboto Light" panose="02000000000000000000" pitchFamily="2" charset="0"/>
-              </a:rPr>
-              <a:t>b</a:t>
-            </a:r>
-            <a:r>
-              <a:rPr spc="-130" dirty="0">
-                <a:latin typeface="Roboto Light" panose="02000000000000000000" pitchFamily="2" charset="0"/>
-                <a:ea typeface="Roboto Light" panose="02000000000000000000" pitchFamily="2" charset="0"/>
-              </a:rPr>
-              <a:t>ili</a:t>
-            </a:r>
-            <a:r>
-              <a:rPr spc="-195" dirty="0">
-                <a:latin typeface="Roboto Light" panose="02000000000000000000" pitchFamily="2" charset="0"/>
-                <a:ea typeface="Roboto Light" panose="02000000000000000000" pitchFamily="2" charset="0"/>
-              </a:rPr>
-              <a:t>t</a:t>
-            </a:r>
-            <a:r>
-              <a:rPr spc="-95" dirty="0">
-                <a:latin typeface="Roboto Light" panose="02000000000000000000" pitchFamily="2" charset="0"/>
-                <a:ea typeface="Roboto Light" panose="02000000000000000000" pitchFamily="2" charset="0"/>
-              </a:rPr>
-              <a:t>y</a:t>
-            </a:r>
+              <a:rPr lang="en-US" spc="-140" dirty="0">
+                <a:latin typeface="Roboto Light" panose="02000000000000000000" pitchFamily="2" charset="0"/>
+                <a:ea typeface="Roboto Light" panose="02000000000000000000" pitchFamily="2" charset="0"/>
+              </a:rPr>
+              <a:t>CREATING      AUTOSCALING     GROUPS</a:t>
+            </a:r>
+            <a:endParaRPr spc="-140" dirty="0">
+              <a:latin typeface="Roboto Light" panose="02000000000000000000" pitchFamily="2" charset="0"/>
+              <a:ea typeface="Roboto Light" panose="02000000000000000000" pitchFamily="2" charset="0"/>
+            </a:endParaRPr>
           </a:p>
         </p:txBody>
       </p:sp>
-      <p:sp>
-        <p:nvSpPr>
-          <p:cNvPr id="4" name="object 4"/>
-          <p:cNvSpPr txBox="1"/>
+      <p:pic>
+        <p:nvPicPr>
+          <p:cNvPr id="7" name="Picture 6">
+            <a:extLst>
+              <a:ext uri="{FF2B5EF4-FFF2-40B4-BE49-F238E27FC236}">
+                <a16:creationId xmlns:a16="http://schemas.microsoft.com/office/drawing/2014/main" id="{CDB58D5B-3734-4D80-A817-AA6C5BF3599E}"/>
+              </a:ext>
+            </a:extLst>
+          </p:cNvPr>
+          <p:cNvPicPr>
+            <a:picLocks noChangeAspect="1"/>
+          </p:cNvPicPr>
           <p:nvPr/>
-        </p:nvSpPr>
+        </p:nvPicPr>
+        <p:blipFill>
+          <a:blip r:embed="rId2"/>
+          <a:stretch>
+            <a:fillRect/>
+          </a:stretch>
+        </p:blipFill>
         <p:spPr>
           <a:xfrm>
-            <a:off x="916939" y="1414779"/>
-            <a:ext cx="9968865" cy="4147289"/>
+            <a:off x="0" y="443712"/>
+            <a:ext cx="12192000" cy="6414288"/>
           </a:xfrm>
           <a:prstGeom prst="rect">
             <a:avLst/>
           </a:prstGeom>
         </p:spPr>
-        <p:txBody>
-          <a:bodyPr vert="horz" wrap="square" lIns="0" tIns="63500" rIns="0" bIns="0" rtlCol="0">
-            <a:spAutoFit/>
-          </a:bodyPr>
-          <a:lstStyle/>
-          <a:p>
-            <a:pPr marL="241300" marR="5080" indent="-228600">
-              <a:lnSpc>
-                <a:spcPts val="3000"/>
-              </a:lnSpc>
-              <a:spcBef>
-                <a:spcPts val="500"/>
-              </a:spcBef>
-              <a:buFont typeface="Arial"/>
-              <a:buChar char="•"/>
-              <a:tabLst>
-                <a:tab pos="241300" algn="l"/>
-              </a:tabLst>
-            </a:pPr>
-            <a:r>
-              <a:rPr sz="2800" spc="-50" dirty="0">
-                <a:solidFill>
-                  <a:srgbClr val="444949"/>
-                </a:solidFill>
-                <a:latin typeface="Roboto Light" panose="02000000000000000000" pitchFamily="2" charset="0"/>
-                <a:ea typeface="Roboto Light" panose="02000000000000000000" pitchFamily="2" charset="0"/>
-                <a:cs typeface="Gill Sans MT"/>
-              </a:rPr>
-              <a:t>Scalability</a:t>
-            </a:r>
-            <a:r>
-              <a:rPr sz="2800" spc="-10" dirty="0">
-                <a:solidFill>
-                  <a:srgbClr val="444949"/>
-                </a:solidFill>
-                <a:latin typeface="Roboto Light" panose="02000000000000000000" pitchFamily="2" charset="0"/>
-                <a:ea typeface="Roboto Light" panose="02000000000000000000" pitchFamily="2" charset="0"/>
-                <a:cs typeface="Gill Sans MT"/>
-              </a:rPr>
-              <a:t> </a:t>
-            </a:r>
-            <a:r>
-              <a:rPr sz="2800" spc="-25" dirty="0">
-                <a:solidFill>
-                  <a:srgbClr val="444949"/>
-                </a:solidFill>
-                <a:latin typeface="Roboto Light" panose="02000000000000000000" pitchFamily="2" charset="0"/>
-                <a:ea typeface="Roboto Light" panose="02000000000000000000" pitchFamily="2" charset="0"/>
-                <a:cs typeface="Gill Sans MT"/>
-              </a:rPr>
-              <a:t>means</a:t>
-            </a:r>
-            <a:r>
-              <a:rPr sz="2800" spc="-10" dirty="0">
-                <a:solidFill>
-                  <a:srgbClr val="444949"/>
-                </a:solidFill>
-                <a:latin typeface="Roboto Light" panose="02000000000000000000" pitchFamily="2" charset="0"/>
-                <a:ea typeface="Roboto Light" panose="02000000000000000000" pitchFamily="2" charset="0"/>
-                <a:cs typeface="Gill Sans MT"/>
-              </a:rPr>
-              <a:t> </a:t>
-            </a:r>
-            <a:r>
-              <a:rPr sz="2800" spc="-50" dirty="0">
-                <a:solidFill>
-                  <a:srgbClr val="444949"/>
-                </a:solidFill>
-                <a:latin typeface="Roboto Light" panose="02000000000000000000" pitchFamily="2" charset="0"/>
-                <a:ea typeface="Roboto Light" panose="02000000000000000000" pitchFamily="2" charset="0"/>
-                <a:cs typeface="Gill Sans MT"/>
-              </a:rPr>
-              <a:t>that</a:t>
-            </a:r>
-            <a:r>
-              <a:rPr sz="2800" dirty="0">
-                <a:solidFill>
-                  <a:srgbClr val="444949"/>
-                </a:solidFill>
-                <a:latin typeface="Roboto Light" panose="02000000000000000000" pitchFamily="2" charset="0"/>
-                <a:ea typeface="Roboto Light" panose="02000000000000000000" pitchFamily="2" charset="0"/>
-                <a:cs typeface="Gill Sans MT"/>
-              </a:rPr>
-              <a:t> </a:t>
-            </a:r>
-            <a:r>
-              <a:rPr sz="2800" spc="-15" dirty="0">
-                <a:solidFill>
-                  <a:srgbClr val="444949"/>
-                </a:solidFill>
-                <a:latin typeface="Roboto Light" panose="02000000000000000000" pitchFamily="2" charset="0"/>
-                <a:ea typeface="Roboto Light" panose="02000000000000000000" pitchFamily="2" charset="0"/>
-                <a:cs typeface="Gill Sans MT"/>
-              </a:rPr>
-              <a:t>an</a:t>
-            </a:r>
-            <a:r>
-              <a:rPr sz="2800" dirty="0">
-                <a:solidFill>
-                  <a:srgbClr val="444949"/>
-                </a:solidFill>
-                <a:latin typeface="Roboto Light" panose="02000000000000000000" pitchFamily="2" charset="0"/>
-                <a:ea typeface="Roboto Light" panose="02000000000000000000" pitchFamily="2" charset="0"/>
-                <a:cs typeface="Gill Sans MT"/>
-              </a:rPr>
-              <a:t> </a:t>
-            </a:r>
-            <a:r>
-              <a:rPr sz="2800" spc="-40" dirty="0">
-                <a:solidFill>
-                  <a:srgbClr val="444949"/>
-                </a:solidFill>
-                <a:latin typeface="Roboto Light" panose="02000000000000000000" pitchFamily="2" charset="0"/>
-                <a:ea typeface="Roboto Light" panose="02000000000000000000" pitchFamily="2" charset="0"/>
-                <a:cs typeface="Gill Sans MT"/>
-              </a:rPr>
-              <a:t>application</a:t>
-            </a:r>
-            <a:r>
-              <a:rPr sz="2800" spc="-5" dirty="0">
-                <a:solidFill>
-                  <a:srgbClr val="444949"/>
-                </a:solidFill>
-                <a:latin typeface="Roboto Light" panose="02000000000000000000" pitchFamily="2" charset="0"/>
-                <a:ea typeface="Roboto Light" panose="02000000000000000000" pitchFamily="2" charset="0"/>
-                <a:cs typeface="Gill Sans MT"/>
-              </a:rPr>
-              <a:t> </a:t>
-            </a:r>
-            <a:r>
-              <a:rPr sz="2800" dirty="0">
-                <a:solidFill>
-                  <a:srgbClr val="444949"/>
-                </a:solidFill>
-                <a:latin typeface="Roboto Light" panose="02000000000000000000" pitchFamily="2" charset="0"/>
-                <a:ea typeface="Roboto Light" panose="02000000000000000000" pitchFamily="2" charset="0"/>
-                <a:cs typeface="Gill Sans MT"/>
-              </a:rPr>
-              <a:t>/</a:t>
-            </a:r>
-            <a:r>
-              <a:rPr sz="2800" spc="-5" dirty="0">
-                <a:solidFill>
-                  <a:srgbClr val="444949"/>
-                </a:solidFill>
-                <a:latin typeface="Roboto Light" panose="02000000000000000000" pitchFamily="2" charset="0"/>
-                <a:ea typeface="Roboto Light" panose="02000000000000000000" pitchFamily="2" charset="0"/>
-                <a:cs typeface="Gill Sans MT"/>
-              </a:rPr>
-              <a:t> </a:t>
-            </a:r>
-            <a:r>
-              <a:rPr sz="2800" spc="-60" dirty="0">
-                <a:solidFill>
-                  <a:srgbClr val="444949"/>
-                </a:solidFill>
-                <a:latin typeface="Roboto Light" panose="02000000000000000000" pitchFamily="2" charset="0"/>
-                <a:ea typeface="Roboto Light" panose="02000000000000000000" pitchFamily="2" charset="0"/>
-                <a:cs typeface="Gill Sans MT"/>
-              </a:rPr>
-              <a:t>system</a:t>
-            </a:r>
-            <a:r>
-              <a:rPr sz="2800" dirty="0">
-                <a:solidFill>
-                  <a:srgbClr val="444949"/>
-                </a:solidFill>
-                <a:latin typeface="Roboto Light" panose="02000000000000000000" pitchFamily="2" charset="0"/>
-                <a:ea typeface="Roboto Light" panose="02000000000000000000" pitchFamily="2" charset="0"/>
-                <a:cs typeface="Gill Sans MT"/>
-              </a:rPr>
-              <a:t> </a:t>
-            </a:r>
-            <a:r>
-              <a:rPr sz="2800" spc="-35" dirty="0">
-                <a:solidFill>
-                  <a:srgbClr val="444949"/>
-                </a:solidFill>
-                <a:latin typeface="Roboto Light" panose="02000000000000000000" pitchFamily="2" charset="0"/>
-                <a:ea typeface="Roboto Light" panose="02000000000000000000" pitchFamily="2" charset="0"/>
-                <a:cs typeface="Gill Sans MT"/>
-              </a:rPr>
-              <a:t>can</a:t>
-            </a:r>
-            <a:r>
-              <a:rPr sz="2800" dirty="0">
-                <a:solidFill>
-                  <a:srgbClr val="444949"/>
-                </a:solidFill>
-                <a:latin typeface="Roboto Light" panose="02000000000000000000" pitchFamily="2" charset="0"/>
-                <a:ea typeface="Roboto Light" panose="02000000000000000000" pitchFamily="2" charset="0"/>
-                <a:cs typeface="Gill Sans MT"/>
-              </a:rPr>
-              <a:t> </a:t>
-            </a:r>
-            <a:r>
-              <a:rPr sz="2800" spc="-25" dirty="0">
-                <a:solidFill>
-                  <a:srgbClr val="444949"/>
-                </a:solidFill>
-                <a:latin typeface="Roboto Light" panose="02000000000000000000" pitchFamily="2" charset="0"/>
-                <a:ea typeface="Roboto Light" panose="02000000000000000000" pitchFamily="2" charset="0"/>
-                <a:cs typeface="Gill Sans MT"/>
-              </a:rPr>
-              <a:t>handle</a:t>
-            </a:r>
-            <a:r>
-              <a:rPr sz="2800" spc="-10" dirty="0">
-                <a:solidFill>
-                  <a:srgbClr val="444949"/>
-                </a:solidFill>
-                <a:latin typeface="Roboto Light" panose="02000000000000000000" pitchFamily="2" charset="0"/>
-                <a:ea typeface="Roboto Light" panose="02000000000000000000" pitchFamily="2" charset="0"/>
-                <a:cs typeface="Gill Sans MT"/>
-              </a:rPr>
-              <a:t> </a:t>
-            </a:r>
-            <a:r>
-              <a:rPr sz="2800" spc="-65" dirty="0">
-                <a:solidFill>
-                  <a:srgbClr val="444949"/>
-                </a:solidFill>
-                <a:latin typeface="Roboto Light" panose="02000000000000000000" pitchFamily="2" charset="0"/>
-                <a:ea typeface="Roboto Light" panose="02000000000000000000" pitchFamily="2" charset="0"/>
-                <a:cs typeface="Gill Sans MT"/>
-              </a:rPr>
-              <a:t>greater</a:t>
-            </a:r>
-            <a:r>
-              <a:rPr sz="2800" dirty="0">
-                <a:solidFill>
-                  <a:srgbClr val="444949"/>
-                </a:solidFill>
-                <a:latin typeface="Roboto Light" panose="02000000000000000000" pitchFamily="2" charset="0"/>
-                <a:ea typeface="Roboto Light" panose="02000000000000000000" pitchFamily="2" charset="0"/>
-                <a:cs typeface="Gill Sans MT"/>
-              </a:rPr>
-              <a:t> </a:t>
-            </a:r>
-            <a:r>
-              <a:rPr sz="2800" spc="-45" dirty="0">
-                <a:solidFill>
-                  <a:srgbClr val="444949"/>
-                </a:solidFill>
-                <a:latin typeface="Roboto Light" panose="02000000000000000000" pitchFamily="2" charset="0"/>
-                <a:ea typeface="Roboto Light" panose="02000000000000000000" pitchFamily="2" charset="0"/>
-                <a:cs typeface="Gill Sans MT"/>
-              </a:rPr>
-              <a:t>loads </a:t>
-            </a:r>
-            <a:r>
-              <a:rPr sz="2800" spc="-760" dirty="0">
-                <a:solidFill>
-                  <a:srgbClr val="444949"/>
-                </a:solidFill>
-                <a:latin typeface="Roboto Light" panose="02000000000000000000" pitchFamily="2" charset="0"/>
-                <a:ea typeface="Roboto Light" panose="02000000000000000000" pitchFamily="2" charset="0"/>
-                <a:cs typeface="Gill Sans MT"/>
-              </a:rPr>
-              <a:t> </a:t>
-            </a:r>
-            <a:r>
-              <a:rPr sz="2800" spc="-40" dirty="0">
-                <a:solidFill>
-                  <a:srgbClr val="444949"/>
-                </a:solidFill>
-                <a:latin typeface="Roboto Light" panose="02000000000000000000" pitchFamily="2" charset="0"/>
-                <a:ea typeface="Roboto Light" panose="02000000000000000000" pitchFamily="2" charset="0"/>
-                <a:cs typeface="Gill Sans MT"/>
-              </a:rPr>
-              <a:t>by</a:t>
-            </a:r>
-            <a:r>
-              <a:rPr sz="2800" spc="-15" dirty="0">
-                <a:solidFill>
-                  <a:srgbClr val="444949"/>
-                </a:solidFill>
-                <a:latin typeface="Roboto Light" panose="02000000000000000000" pitchFamily="2" charset="0"/>
-                <a:ea typeface="Roboto Light" panose="02000000000000000000" pitchFamily="2" charset="0"/>
-                <a:cs typeface="Gill Sans MT"/>
-              </a:rPr>
-              <a:t> </a:t>
-            </a:r>
-            <a:r>
-              <a:rPr sz="2800" spc="-35" dirty="0">
-                <a:solidFill>
-                  <a:srgbClr val="444949"/>
-                </a:solidFill>
-                <a:latin typeface="Roboto Light" panose="02000000000000000000" pitchFamily="2" charset="0"/>
-                <a:ea typeface="Roboto Light" panose="02000000000000000000" pitchFamily="2" charset="0"/>
-                <a:cs typeface="Gill Sans MT"/>
-              </a:rPr>
-              <a:t>adapting.</a:t>
-            </a:r>
-            <a:endParaRPr sz="2800" dirty="0">
-              <a:latin typeface="Roboto Light" panose="02000000000000000000" pitchFamily="2" charset="0"/>
-              <a:ea typeface="Roboto Light" panose="02000000000000000000" pitchFamily="2" charset="0"/>
-              <a:cs typeface="Gill Sans MT"/>
-            </a:endParaRPr>
-          </a:p>
-          <a:p>
-            <a:pPr marL="241300" indent="-228600">
-              <a:lnSpc>
-                <a:spcPct val="100000"/>
-              </a:lnSpc>
-              <a:spcBef>
-                <a:spcPts val="705"/>
-              </a:spcBef>
-              <a:buFont typeface="Arial"/>
-              <a:buChar char="•"/>
-              <a:tabLst>
-                <a:tab pos="241300" algn="l"/>
-              </a:tabLst>
-            </a:pPr>
-            <a:r>
-              <a:rPr sz="2800" spc="-65" dirty="0">
-                <a:solidFill>
-                  <a:srgbClr val="444949"/>
-                </a:solidFill>
-                <a:latin typeface="Roboto Light" panose="02000000000000000000" pitchFamily="2" charset="0"/>
-                <a:ea typeface="Roboto Light" panose="02000000000000000000" pitchFamily="2" charset="0"/>
-                <a:cs typeface="Gill Sans MT"/>
-              </a:rPr>
-              <a:t>There</a:t>
-            </a:r>
-            <a:r>
-              <a:rPr sz="2800" spc="-20" dirty="0">
-                <a:solidFill>
-                  <a:srgbClr val="444949"/>
-                </a:solidFill>
-                <a:latin typeface="Roboto Light" panose="02000000000000000000" pitchFamily="2" charset="0"/>
-                <a:ea typeface="Roboto Light" panose="02000000000000000000" pitchFamily="2" charset="0"/>
-                <a:cs typeface="Gill Sans MT"/>
-              </a:rPr>
-              <a:t> </a:t>
-            </a:r>
-            <a:r>
-              <a:rPr sz="2800" spc="-60" dirty="0">
-                <a:solidFill>
-                  <a:srgbClr val="444949"/>
-                </a:solidFill>
-                <a:latin typeface="Roboto Light" panose="02000000000000000000" pitchFamily="2" charset="0"/>
-                <a:ea typeface="Roboto Light" panose="02000000000000000000" pitchFamily="2" charset="0"/>
-                <a:cs typeface="Gill Sans MT"/>
-              </a:rPr>
-              <a:t>are</a:t>
-            </a:r>
-            <a:r>
-              <a:rPr sz="2800" spc="-15" dirty="0">
-                <a:solidFill>
-                  <a:srgbClr val="444949"/>
-                </a:solidFill>
-                <a:latin typeface="Roboto Light" panose="02000000000000000000" pitchFamily="2" charset="0"/>
-                <a:ea typeface="Roboto Light" panose="02000000000000000000" pitchFamily="2" charset="0"/>
-                <a:cs typeface="Gill Sans MT"/>
-              </a:rPr>
-              <a:t> </a:t>
-            </a:r>
-            <a:r>
-              <a:rPr sz="2800" spc="-65" dirty="0">
-                <a:solidFill>
-                  <a:srgbClr val="444949"/>
-                </a:solidFill>
-                <a:latin typeface="Roboto Light" panose="02000000000000000000" pitchFamily="2" charset="0"/>
-                <a:ea typeface="Roboto Light" panose="02000000000000000000" pitchFamily="2" charset="0"/>
-                <a:cs typeface="Gill Sans MT"/>
-              </a:rPr>
-              <a:t>two</a:t>
-            </a:r>
-            <a:r>
-              <a:rPr sz="2800" spc="-15" dirty="0">
-                <a:solidFill>
-                  <a:srgbClr val="444949"/>
-                </a:solidFill>
-                <a:latin typeface="Roboto Light" panose="02000000000000000000" pitchFamily="2" charset="0"/>
-                <a:ea typeface="Roboto Light" panose="02000000000000000000" pitchFamily="2" charset="0"/>
-                <a:cs typeface="Gill Sans MT"/>
-              </a:rPr>
-              <a:t> </a:t>
-            </a:r>
-            <a:r>
-              <a:rPr sz="2800" spc="-75" dirty="0">
-                <a:solidFill>
-                  <a:srgbClr val="444949"/>
-                </a:solidFill>
-                <a:latin typeface="Roboto Light" panose="02000000000000000000" pitchFamily="2" charset="0"/>
-                <a:ea typeface="Roboto Light" panose="02000000000000000000" pitchFamily="2" charset="0"/>
-                <a:cs typeface="Gill Sans MT"/>
-              </a:rPr>
-              <a:t>kinds</a:t>
-            </a:r>
-            <a:r>
-              <a:rPr sz="2800" spc="-15" dirty="0">
-                <a:solidFill>
-                  <a:srgbClr val="444949"/>
-                </a:solidFill>
-                <a:latin typeface="Roboto Light" panose="02000000000000000000" pitchFamily="2" charset="0"/>
-                <a:ea typeface="Roboto Light" panose="02000000000000000000" pitchFamily="2" charset="0"/>
-                <a:cs typeface="Gill Sans MT"/>
-              </a:rPr>
-              <a:t> </a:t>
-            </a:r>
-            <a:r>
-              <a:rPr sz="2800" spc="-30" dirty="0">
-                <a:solidFill>
-                  <a:srgbClr val="444949"/>
-                </a:solidFill>
-                <a:latin typeface="Roboto Light" panose="02000000000000000000" pitchFamily="2" charset="0"/>
-                <a:ea typeface="Roboto Light" panose="02000000000000000000" pitchFamily="2" charset="0"/>
-                <a:cs typeface="Gill Sans MT"/>
-              </a:rPr>
-              <a:t>of</a:t>
-            </a:r>
-            <a:r>
-              <a:rPr sz="2800" spc="-5" dirty="0">
-                <a:solidFill>
-                  <a:srgbClr val="444949"/>
-                </a:solidFill>
-                <a:latin typeface="Roboto Light" panose="02000000000000000000" pitchFamily="2" charset="0"/>
-                <a:ea typeface="Roboto Light" panose="02000000000000000000" pitchFamily="2" charset="0"/>
-                <a:cs typeface="Gill Sans MT"/>
-              </a:rPr>
-              <a:t> </a:t>
-            </a:r>
-            <a:r>
-              <a:rPr sz="2800" spc="-65" dirty="0">
-                <a:solidFill>
-                  <a:srgbClr val="444949"/>
-                </a:solidFill>
-                <a:latin typeface="Roboto Light" panose="02000000000000000000" pitchFamily="2" charset="0"/>
-                <a:ea typeface="Roboto Light" panose="02000000000000000000" pitchFamily="2" charset="0"/>
-                <a:cs typeface="Gill Sans MT"/>
-              </a:rPr>
-              <a:t>scalability:</a:t>
-            </a:r>
-            <a:endParaRPr sz="2800" dirty="0">
-              <a:latin typeface="Roboto Light" panose="02000000000000000000" pitchFamily="2" charset="0"/>
-              <a:ea typeface="Roboto Light" panose="02000000000000000000" pitchFamily="2" charset="0"/>
-              <a:cs typeface="Gill Sans MT"/>
-            </a:endParaRPr>
-          </a:p>
-          <a:p>
-            <a:pPr marL="698500" lvl="1" indent="-228600">
-              <a:lnSpc>
-                <a:spcPct val="100000"/>
-              </a:lnSpc>
-              <a:spcBef>
-                <a:spcPts val="254"/>
-              </a:spcBef>
-              <a:buFont typeface="Arial"/>
-              <a:buChar char="•"/>
-              <a:tabLst>
-                <a:tab pos="698500" algn="l"/>
-              </a:tabLst>
-            </a:pPr>
-            <a:r>
-              <a:rPr sz="2400" spc="-55" dirty="0">
-                <a:solidFill>
-                  <a:srgbClr val="444949"/>
-                </a:solidFill>
-                <a:latin typeface="Roboto Light" panose="02000000000000000000" pitchFamily="2" charset="0"/>
-                <a:ea typeface="Roboto Light" panose="02000000000000000000" pitchFamily="2" charset="0"/>
-                <a:cs typeface="Gill Sans MT"/>
-              </a:rPr>
-              <a:t>Vertical</a:t>
-            </a:r>
-            <a:r>
-              <a:rPr sz="2400" spc="-25" dirty="0">
-                <a:solidFill>
-                  <a:srgbClr val="444949"/>
-                </a:solidFill>
-                <a:latin typeface="Roboto Light" panose="02000000000000000000" pitchFamily="2" charset="0"/>
-                <a:ea typeface="Roboto Light" panose="02000000000000000000" pitchFamily="2" charset="0"/>
-                <a:cs typeface="Gill Sans MT"/>
-              </a:rPr>
-              <a:t> </a:t>
-            </a:r>
-            <a:r>
-              <a:rPr sz="2400" spc="-40" dirty="0">
-                <a:solidFill>
-                  <a:srgbClr val="444949"/>
-                </a:solidFill>
-                <a:latin typeface="Roboto Light" panose="02000000000000000000" pitchFamily="2" charset="0"/>
-                <a:ea typeface="Roboto Light" panose="02000000000000000000" pitchFamily="2" charset="0"/>
-                <a:cs typeface="Gill Sans MT"/>
-              </a:rPr>
-              <a:t>Scalability</a:t>
-            </a:r>
-            <a:endParaRPr sz="2400" dirty="0">
-              <a:latin typeface="Roboto Light" panose="02000000000000000000" pitchFamily="2" charset="0"/>
-              <a:ea typeface="Roboto Light" panose="02000000000000000000" pitchFamily="2" charset="0"/>
-              <a:cs typeface="Gill Sans MT"/>
-            </a:endParaRPr>
-          </a:p>
-          <a:p>
-            <a:pPr marL="698500" lvl="1" indent="-228600">
-              <a:lnSpc>
-                <a:spcPct val="100000"/>
-              </a:lnSpc>
-              <a:spcBef>
-                <a:spcPts val="215"/>
-              </a:spcBef>
-              <a:buFont typeface="Arial"/>
-              <a:buChar char="•"/>
-              <a:tabLst>
-                <a:tab pos="698500" algn="l"/>
-              </a:tabLst>
-            </a:pPr>
-            <a:r>
-              <a:rPr sz="2400" spc="-55" dirty="0">
-                <a:solidFill>
-                  <a:srgbClr val="444949"/>
-                </a:solidFill>
-                <a:latin typeface="Roboto Light" panose="02000000000000000000" pitchFamily="2" charset="0"/>
-                <a:ea typeface="Roboto Light" panose="02000000000000000000" pitchFamily="2" charset="0"/>
-                <a:cs typeface="Gill Sans MT"/>
-              </a:rPr>
-              <a:t>Horizontal</a:t>
-            </a:r>
-            <a:r>
-              <a:rPr sz="2400" spc="-15" dirty="0">
-                <a:solidFill>
-                  <a:srgbClr val="444949"/>
-                </a:solidFill>
-                <a:latin typeface="Roboto Light" panose="02000000000000000000" pitchFamily="2" charset="0"/>
-                <a:ea typeface="Roboto Light" panose="02000000000000000000" pitchFamily="2" charset="0"/>
-                <a:cs typeface="Gill Sans MT"/>
-              </a:rPr>
-              <a:t> </a:t>
-            </a:r>
-            <a:r>
-              <a:rPr sz="2400" spc="-45" dirty="0">
-                <a:solidFill>
-                  <a:srgbClr val="444949"/>
-                </a:solidFill>
-                <a:latin typeface="Roboto Light" panose="02000000000000000000" pitchFamily="2" charset="0"/>
-                <a:ea typeface="Roboto Light" panose="02000000000000000000" pitchFamily="2" charset="0"/>
-                <a:cs typeface="Gill Sans MT"/>
-              </a:rPr>
-              <a:t>Scalability</a:t>
-            </a:r>
-            <a:r>
-              <a:rPr sz="2400" spc="-15" dirty="0">
-                <a:solidFill>
-                  <a:srgbClr val="444949"/>
-                </a:solidFill>
-                <a:latin typeface="Roboto Light" panose="02000000000000000000" pitchFamily="2" charset="0"/>
-                <a:ea typeface="Roboto Light" panose="02000000000000000000" pitchFamily="2" charset="0"/>
-                <a:cs typeface="Gill Sans MT"/>
-              </a:rPr>
-              <a:t> </a:t>
-            </a:r>
-            <a:r>
-              <a:rPr sz="2400" spc="100" dirty="0">
-                <a:solidFill>
-                  <a:srgbClr val="444949"/>
-                </a:solidFill>
-                <a:latin typeface="Roboto Light" panose="02000000000000000000" pitchFamily="2" charset="0"/>
-                <a:ea typeface="Roboto Light" panose="02000000000000000000" pitchFamily="2" charset="0"/>
-                <a:cs typeface="Gill Sans MT"/>
-              </a:rPr>
-              <a:t>(=</a:t>
-            </a:r>
-            <a:r>
-              <a:rPr sz="2400" spc="-5" dirty="0">
-                <a:solidFill>
-                  <a:srgbClr val="444949"/>
-                </a:solidFill>
-                <a:latin typeface="Roboto Light" panose="02000000000000000000" pitchFamily="2" charset="0"/>
-                <a:ea typeface="Roboto Light" panose="02000000000000000000" pitchFamily="2" charset="0"/>
-                <a:cs typeface="Gill Sans MT"/>
-              </a:rPr>
-              <a:t> </a:t>
-            </a:r>
-            <a:r>
-              <a:rPr sz="2400" spc="-55" dirty="0">
-                <a:solidFill>
-                  <a:srgbClr val="444949"/>
-                </a:solidFill>
-                <a:latin typeface="Roboto Light" panose="02000000000000000000" pitchFamily="2" charset="0"/>
-                <a:ea typeface="Roboto Light" panose="02000000000000000000" pitchFamily="2" charset="0"/>
-                <a:cs typeface="Gill Sans MT"/>
-              </a:rPr>
-              <a:t>elasticity)</a:t>
-            </a:r>
-            <a:endParaRPr sz="2400" dirty="0">
-              <a:latin typeface="Roboto Light" panose="02000000000000000000" pitchFamily="2" charset="0"/>
-              <a:ea typeface="Roboto Light" panose="02000000000000000000" pitchFamily="2" charset="0"/>
-              <a:cs typeface="Gill Sans MT"/>
-            </a:endParaRPr>
-          </a:p>
-          <a:p>
-            <a:pPr marL="241300" indent="-228600">
-              <a:lnSpc>
-                <a:spcPct val="100000"/>
-              </a:lnSpc>
-              <a:spcBef>
-                <a:spcPts val="660"/>
-              </a:spcBef>
-              <a:buSzPct val="101818"/>
-              <a:buFont typeface="Arial"/>
-              <a:buChar char="•"/>
-              <a:tabLst>
-                <a:tab pos="241300" algn="l"/>
-              </a:tabLst>
-            </a:pPr>
-            <a:r>
-              <a:rPr sz="4125" spc="-44" baseline="1010" dirty="0">
-                <a:solidFill>
-                  <a:srgbClr val="444949"/>
-                </a:solidFill>
-                <a:latin typeface="Roboto Light" panose="02000000000000000000" pitchFamily="2" charset="0"/>
-                <a:ea typeface="Roboto Light" panose="02000000000000000000" pitchFamily="2" charset="0"/>
-                <a:cs typeface="Gill Sans MT"/>
-              </a:rPr>
-              <a:t>Scalability</a:t>
-            </a:r>
-            <a:r>
-              <a:rPr sz="4125" spc="15" baseline="1010" dirty="0">
-                <a:solidFill>
-                  <a:srgbClr val="444949"/>
-                </a:solidFill>
-                <a:latin typeface="Roboto Light" panose="02000000000000000000" pitchFamily="2" charset="0"/>
-                <a:ea typeface="Roboto Light" panose="02000000000000000000" pitchFamily="2" charset="0"/>
-                <a:cs typeface="Gill Sans MT"/>
-              </a:rPr>
-              <a:t> </a:t>
-            </a:r>
-            <a:r>
-              <a:rPr sz="4125" spc="-112" baseline="1010" dirty="0">
-                <a:solidFill>
-                  <a:srgbClr val="444949"/>
-                </a:solidFill>
-                <a:latin typeface="Roboto Light" panose="02000000000000000000" pitchFamily="2" charset="0"/>
-                <a:ea typeface="Roboto Light" panose="02000000000000000000" pitchFamily="2" charset="0"/>
-                <a:cs typeface="Gill Sans MT"/>
-              </a:rPr>
-              <a:t>is</a:t>
-            </a:r>
-            <a:r>
-              <a:rPr sz="4125" baseline="1010" dirty="0">
-                <a:solidFill>
-                  <a:srgbClr val="444949"/>
-                </a:solidFill>
-                <a:latin typeface="Roboto Light" panose="02000000000000000000" pitchFamily="2" charset="0"/>
-                <a:ea typeface="Roboto Light" panose="02000000000000000000" pitchFamily="2" charset="0"/>
-                <a:cs typeface="Gill Sans MT"/>
-              </a:rPr>
-              <a:t> </a:t>
-            </a:r>
-            <a:r>
-              <a:rPr sz="4125" spc="-67" baseline="1010" dirty="0">
-                <a:solidFill>
-                  <a:srgbClr val="444949"/>
-                </a:solidFill>
-                <a:latin typeface="Roboto Light" panose="02000000000000000000" pitchFamily="2" charset="0"/>
-                <a:ea typeface="Roboto Light" panose="02000000000000000000" pitchFamily="2" charset="0"/>
-                <a:cs typeface="Gill Sans MT"/>
-              </a:rPr>
-              <a:t>linked</a:t>
-            </a:r>
-            <a:r>
-              <a:rPr sz="4125" baseline="1010" dirty="0">
-                <a:solidFill>
-                  <a:srgbClr val="444949"/>
-                </a:solidFill>
-                <a:latin typeface="Roboto Light" panose="02000000000000000000" pitchFamily="2" charset="0"/>
-                <a:ea typeface="Roboto Light" panose="02000000000000000000" pitchFamily="2" charset="0"/>
-                <a:cs typeface="Gill Sans MT"/>
-              </a:rPr>
-              <a:t> </a:t>
-            </a:r>
-            <a:r>
-              <a:rPr sz="4125" spc="-30" baseline="1010" dirty="0">
-                <a:solidFill>
-                  <a:srgbClr val="444949"/>
-                </a:solidFill>
-                <a:latin typeface="Roboto Light" panose="02000000000000000000" pitchFamily="2" charset="0"/>
-                <a:ea typeface="Roboto Light" panose="02000000000000000000" pitchFamily="2" charset="0"/>
-                <a:cs typeface="Gill Sans MT"/>
-              </a:rPr>
-              <a:t>but</a:t>
-            </a:r>
-            <a:r>
-              <a:rPr sz="4125" spc="22" baseline="1010" dirty="0">
-                <a:solidFill>
-                  <a:srgbClr val="444949"/>
-                </a:solidFill>
-                <a:latin typeface="Roboto Light" panose="02000000000000000000" pitchFamily="2" charset="0"/>
-                <a:ea typeface="Roboto Light" panose="02000000000000000000" pitchFamily="2" charset="0"/>
-                <a:cs typeface="Gill Sans MT"/>
-              </a:rPr>
-              <a:t> </a:t>
-            </a:r>
-            <a:r>
-              <a:rPr sz="4125" spc="-60" baseline="1010" dirty="0">
-                <a:solidFill>
-                  <a:srgbClr val="444949"/>
-                </a:solidFill>
-                <a:latin typeface="Roboto Light" panose="02000000000000000000" pitchFamily="2" charset="0"/>
-                <a:ea typeface="Roboto Light" panose="02000000000000000000" pitchFamily="2" charset="0"/>
-                <a:cs typeface="Gill Sans MT"/>
-              </a:rPr>
-              <a:t>different</a:t>
-            </a:r>
-            <a:r>
-              <a:rPr sz="4125" spc="15" baseline="1010" dirty="0">
-                <a:solidFill>
-                  <a:srgbClr val="444949"/>
-                </a:solidFill>
-                <a:latin typeface="Roboto Light" panose="02000000000000000000" pitchFamily="2" charset="0"/>
-                <a:ea typeface="Roboto Light" panose="02000000000000000000" pitchFamily="2" charset="0"/>
-                <a:cs typeface="Gill Sans MT"/>
-              </a:rPr>
-              <a:t> </a:t>
-            </a:r>
-            <a:r>
-              <a:rPr sz="4125" spc="-52" baseline="1010" dirty="0">
-                <a:solidFill>
-                  <a:srgbClr val="444949"/>
-                </a:solidFill>
-                <a:latin typeface="Roboto Light" panose="02000000000000000000" pitchFamily="2" charset="0"/>
-                <a:ea typeface="Roboto Light" panose="02000000000000000000" pitchFamily="2" charset="0"/>
-                <a:cs typeface="Gill Sans MT"/>
-              </a:rPr>
-              <a:t>to</a:t>
-            </a:r>
-            <a:r>
-              <a:rPr sz="4125" spc="15" baseline="1010" dirty="0">
-                <a:solidFill>
-                  <a:srgbClr val="444949"/>
-                </a:solidFill>
-                <a:latin typeface="Roboto Light" panose="02000000000000000000" pitchFamily="2" charset="0"/>
-                <a:ea typeface="Roboto Light" panose="02000000000000000000" pitchFamily="2" charset="0"/>
-                <a:cs typeface="Gill Sans MT"/>
-              </a:rPr>
-              <a:t> </a:t>
-            </a:r>
-            <a:r>
-              <a:rPr sz="4125" spc="-22" baseline="1010" dirty="0">
-                <a:solidFill>
-                  <a:srgbClr val="444949"/>
-                </a:solidFill>
-                <a:latin typeface="Roboto Light" panose="02000000000000000000" pitchFamily="2" charset="0"/>
-                <a:ea typeface="Roboto Light" panose="02000000000000000000" pitchFamily="2" charset="0"/>
-                <a:cs typeface="Gill Sans MT"/>
-              </a:rPr>
-              <a:t>High</a:t>
-            </a:r>
-            <a:r>
-              <a:rPr sz="4125" spc="-240" baseline="1010" dirty="0">
-                <a:solidFill>
-                  <a:srgbClr val="444949"/>
-                </a:solidFill>
-                <a:latin typeface="Roboto Light" panose="02000000000000000000" pitchFamily="2" charset="0"/>
-                <a:ea typeface="Roboto Light" panose="02000000000000000000" pitchFamily="2" charset="0"/>
-                <a:cs typeface="Gill Sans MT"/>
-              </a:rPr>
-              <a:t> </a:t>
-            </a:r>
-            <a:r>
-              <a:rPr sz="4125" spc="-60" baseline="1010" dirty="0">
-                <a:solidFill>
-                  <a:srgbClr val="444949"/>
-                </a:solidFill>
-                <a:latin typeface="Roboto Light" panose="02000000000000000000" pitchFamily="2" charset="0"/>
-                <a:ea typeface="Roboto Light" panose="02000000000000000000" pitchFamily="2" charset="0"/>
-                <a:cs typeface="Gill Sans MT"/>
-              </a:rPr>
-              <a:t>Availability</a:t>
-            </a:r>
-            <a:endParaRPr sz="4125" baseline="1010" dirty="0">
-              <a:latin typeface="Roboto Light" panose="02000000000000000000" pitchFamily="2" charset="0"/>
-              <a:ea typeface="Roboto Light" panose="02000000000000000000" pitchFamily="2" charset="0"/>
-              <a:cs typeface="Gill Sans MT"/>
-            </a:endParaRPr>
-          </a:p>
-          <a:p>
-            <a:pPr>
-              <a:lnSpc>
-                <a:spcPct val="100000"/>
-              </a:lnSpc>
-              <a:spcBef>
-                <a:spcPts val="25"/>
-              </a:spcBef>
-              <a:buClr>
-                <a:srgbClr val="444949"/>
-              </a:buClr>
-              <a:buFont typeface="Arial"/>
-              <a:buChar char="•"/>
-            </a:pPr>
-            <a:endParaRPr sz="4000" dirty="0">
-              <a:latin typeface="Roboto Light" panose="02000000000000000000" pitchFamily="2" charset="0"/>
-              <a:ea typeface="Roboto Light" panose="02000000000000000000" pitchFamily="2" charset="0"/>
-              <a:cs typeface="Gill Sans MT"/>
-            </a:endParaRPr>
-          </a:p>
-          <a:p>
-            <a:pPr marL="241300" indent="-228600">
-              <a:lnSpc>
-                <a:spcPct val="100000"/>
-              </a:lnSpc>
-              <a:buFont typeface="Arial"/>
-              <a:buChar char="•"/>
-              <a:tabLst>
-                <a:tab pos="241300" algn="l"/>
-              </a:tabLst>
-            </a:pPr>
-            <a:r>
-              <a:rPr sz="2800" spc="-95" dirty="0">
-                <a:solidFill>
-                  <a:srgbClr val="444949"/>
-                </a:solidFill>
-                <a:latin typeface="Roboto Light" panose="02000000000000000000" pitchFamily="2" charset="0"/>
-                <a:ea typeface="Roboto Light" panose="02000000000000000000" pitchFamily="2" charset="0"/>
-                <a:cs typeface="Gill Sans MT"/>
-              </a:rPr>
-              <a:t>Let’s</a:t>
-            </a:r>
-            <a:r>
-              <a:rPr sz="2800" spc="-10" dirty="0">
-                <a:solidFill>
-                  <a:srgbClr val="444949"/>
-                </a:solidFill>
-                <a:latin typeface="Roboto Light" panose="02000000000000000000" pitchFamily="2" charset="0"/>
-                <a:ea typeface="Roboto Light" panose="02000000000000000000" pitchFamily="2" charset="0"/>
-                <a:cs typeface="Gill Sans MT"/>
-              </a:rPr>
-              <a:t> </a:t>
-            </a:r>
-            <a:r>
-              <a:rPr sz="2800" dirty="0">
-                <a:solidFill>
-                  <a:srgbClr val="444949"/>
-                </a:solidFill>
-                <a:latin typeface="Roboto Light" panose="02000000000000000000" pitchFamily="2" charset="0"/>
-                <a:ea typeface="Roboto Light" panose="02000000000000000000" pitchFamily="2" charset="0"/>
-                <a:cs typeface="Gill Sans MT"/>
-              </a:rPr>
-              <a:t>deep</a:t>
-            </a:r>
-            <a:r>
-              <a:rPr sz="2800" spc="-5" dirty="0">
-                <a:solidFill>
-                  <a:srgbClr val="444949"/>
-                </a:solidFill>
-                <a:latin typeface="Roboto Light" panose="02000000000000000000" pitchFamily="2" charset="0"/>
-                <a:ea typeface="Roboto Light" panose="02000000000000000000" pitchFamily="2" charset="0"/>
-                <a:cs typeface="Gill Sans MT"/>
-              </a:rPr>
-              <a:t> </a:t>
-            </a:r>
-            <a:r>
-              <a:rPr sz="2800" spc="-45" dirty="0">
-                <a:solidFill>
-                  <a:srgbClr val="444949"/>
-                </a:solidFill>
-                <a:latin typeface="Roboto Light" panose="02000000000000000000" pitchFamily="2" charset="0"/>
-                <a:ea typeface="Roboto Light" panose="02000000000000000000" pitchFamily="2" charset="0"/>
-                <a:cs typeface="Gill Sans MT"/>
-              </a:rPr>
-              <a:t>dive</a:t>
-            </a:r>
-            <a:r>
-              <a:rPr sz="2800" spc="-10" dirty="0">
-                <a:solidFill>
-                  <a:srgbClr val="444949"/>
-                </a:solidFill>
-                <a:latin typeface="Roboto Light" panose="02000000000000000000" pitchFamily="2" charset="0"/>
-                <a:ea typeface="Roboto Light" panose="02000000000000000000" pitchFamily="2" charset="0"/>
-                <a:cs typeface="Gill Sans MT"/>
-              </a:rPr>
-              <a:t> </a:t>
-            </a:r>
-            <a:r>
-              <a:rPr sz="2800" spc="-60" dirty="0">
-                <a:solidFill>
-                  <a:srgbClr val="444949"/>
-                </a:solidFill>
-                <a:latin typeface="Roboto Light" panose="02000000000000000000" pitchFamily="2" charset="0"/>
-                <a:ea typeface="Roboto Light" panose="02000000000000000000" pitchFamily="2" charset="0"/>
-                <a:cs typeface="Gill Sans MT"/>
-              </a:rPr>
-              <a:t>into</a:t>
-            </a:r>
-            <a:r>
-              <a:rPr sz="2800" spc="-5" dirty="0">
-                <a:solidFill>
-                  <a:srgbClr val="444949"/>
-                </a:solidFill>
-                <a:latin typeface="Roboto Light" panose="02000000000000000000" pitchFamily="2" charset="0"/>
-                <a:ea typeface="Roboto Light" panose="02000000000000000000" pitchFamily="2" charset="0"/>
-                <a:cs typeface="Gill Sans MT"/>
-              </a:rPr>
-              <a:t> </a:t>
-            </a:r>
-            <a:r>
-              <a:rPr sz="2800" spc="-40" dirty="0">
-                <a:solidFill>
-                  <a:srgbClr val="444949"/>
-                </a:solidFill>
-                <a:latin typeface="Roboto Light" panose="02000000000000000000" pitchFamily="2" charset="0"/>
-                <a:ea typeface="Roboto Light" panose="02000000000000000000" pitchFamily="2" charset="0"/>
-                <a:cs typeface="Gill Sans MT"/>
-              </a:rPr>
-              <a:t>the</a:t>
-            </a:r>
-            <a:r>
-              <a:rPr sz="2800" spc="-5" dirty="0">
-                <a:solidFill>
-                  <a:srgbClr val="444949"/>
-                </a:solidFill>
-                <a:latin typeface="Roboto Light" panose="02000000000000000000" pitchFamily="2" charset="0"/>
-                <a:ea typeface="Roboto Light" panose="02000000000000000000" pitchFamily="2" charset="0"/>
-                <a:cs typeface="Gill Sans MT"/>
-              </a:rPr>
-              <a:t> </a:t>
-            </a:r>
-            <a:r>
-              <a:rPr sz="2800" spc="-70" dirty="0">
-                <a:solidFill>
-                  <a:srgbClr val="444949"/>
-                </a:solidFill>
-                <a:latin typeface="Roboto Light" panose="02000000000000000000" pitchFamily="2" charset="0"/>
-                <a:ea typeface="Roboto Light" panose="02000000000000000000" pitchFamily="2" charset="0"/>
-                <a:cs typeface="Gill Sans MT"/>
-              </a:rPr>
-              <a:t>distinction,</a:t>
-            </a:r>
-            <a:r>
-              <a:rPr sz="2800" spc="-225" dirty="0">
-                <a:solidFill>
-                  <a:srgbClr val="444949"/>
-                </a:solidFill>
-                <a:latin typeface="Roboto Light" panose="02000000000000000000" pitchFamily="2" charset="0"/>
-                <a:ea typeface="Roboto Light" panose="02000000000000000000" pitchFamily="2" charset="0"/>
-                <a:cs typeface="Gill Sans MT"/>
-              </a:rPr>
-              <a:t> </a:t>
-            </a:r>
-            <a:r>
-              <a:rPr sz="2800" spc="-50" dirty="0">
-                <a:solidFill>
-                  <a:srgbClr val="444949"/>
-                </a:solidFill>
-                <a:latin typeface="Roboto Light" panose="02000000000000000000" pitchFamily="2" charset="0"/>
-                <a:ea typeface="Roboto Light" panose="02000000000000000000" pitchFamily="2" charset="0"/>
-                <a:cs typeface="Gill Sans MT"/>
-              </a:rPr>
-              <a:t>using</a:t>
-            </a:r>
-            <a:r>
-              <a:rPr sz="2800" spc="5" dirty="0">
-                <a:solidFill>
-                  <a:srgbClr val="444949"/>
-                </a:solidFill>
-                <a:latin typeface="Roboto Light" panose="02000000000000000000" pitchFamily="2" charset="0"/>
-                <a:ea typeface="Roboto Light" panose="02000000000000000000" pitchFamily="2" charset="0"/>
-                <a:cs typeface="Gill Sans MT"/>
-              </a:rPr>
-              <a:t> </a:t>
-            </a:r>
-            <a:r>
-              <a:rPr sz="2800" dirty="0">
-                <a:solidFill>
-                  <a:srgbClr val="444949"/>
-                </a:solidFill>
-                <a:latin typeface="Roboto Light" panose="02000000000000000000" pitchFamily="2" charset="0"/>
-                <a:ea typeface="Roboto Light" panose="02000000000000000000" pitchFamily="2" charset="0"/>
-                <a:cs typeface="Gill Sans MT"/>
-              </a:rPr>
-              <a:t>a </a:t>
-            </a:r>
-            <a:r>
-              <a:rPr sz="2800" spc="-65" dirty="0">
-                <a:solidFill>
-                  <a:srgbClr val="444949"/>
-                </a:solidFill>
-                <a:latin typeface="Roboto Light" panose="02000000000000000000" pitchFamily="2" charset="0"/>
-                <a:ea typeface="Roboto Light" panose="02000000000000000000" pitchFamily="2" charset="0"/>
-                <a:cs typeface="Gill Sans MT"/>
-              </a:rPr>
-              <a:t>call</a:t>
-            </a:r>
-            <a:r>
-              <a:rPr sz="2800" dirty="0">
-                <a:solidFill>
-                  <a:srgbClr val="444949"/>
-                </a:solidFill>
-                <a:latin typeface="Roboto Light" panose="02000000000000000000" pitchFamily="2" charset="0"/>
-                <a:ea typeface="Roboto Light" panose="02000000000000000000" pitchFamily="2" charset="0"/>
-                <a:cs typeface="Gill Sans MT"/>
-              </a:rPr>
-              <a:t> </a:t>
-            </a:r>
-            <a:r>
-              <a:rPr sz="2800" spc="-65" dirty="0">
-                <a:solidFill>
-                  <a:srgbClr val="444949"/>
-                </a:solidFill>
-                <a:latin typeface="Roboto Light" panose="02000000000000000000" pitchFamily="2" charset="0"/>
-                <a:ea typeface="Roboto Light" panose="02000000000000000000" pitchFamily="2" charset="0"/>
-                <a:cs typeface="Gill Sans MT"/>
-              </a:rPr>
-              <a:t>center</a:t>
-            </a:r>
-            <a:r>
-              <a:rPr sz="2800" dirty="0">
-                <a:solidFill>
-                  <a:srgbClr val="444949"/>
-                </a:solidFill>
-                <a:latin typeface="Roboto Light" panose="02000000000000000000" pitchFamily="2" charset="0"/>
-                <a:ea typeface="Roboto Light" panose="02000000000000000000" pitchFamily="2" charset="0"/>
-                <a:cs typeface="Gill Sans MT"/>
-              </a:rPr>
-              <a:t> </a:t>
-            </a:r>
-            <a:r>
-              <a:rPr sz="2800" spc="-45" dirty="0">
-                <a:solidFill>
-                  <a:srgbClr val="444949"/>
-                </a:solidFill>
-                <a:latin typeface="Roboto Light" panose="02000000000000000000" pitchFamily="2" charset="0"/>
-                <a:ea typeface="Roboto Light" panose="02000000000000000000" pitchFamily="2" charset="0"/>
-                <a:cs typeface="Gill Sans MT"/>
-              </a:rPr>
-              <a:t>as</a:t>
-            </a:r>
-            <a:r>
-              <a:rPr sz="2800" spc="-5" dirty="0">
-                <a:solidFill>
-                  <a:srgbClr val="444949"/>
-                </a:solidFill>
-                <a:latin typeface="Roboto Light" panose="02000000000000000000" pitchFamily="2" charset="0"/>
-                <a:ea typeface="Roboto Light" panose="02000000000000000000" pitchFamily="2" charset="0"/>
-                <a:cs typeface="Gill Sans MT"/>
-              </a:rPr>
-              <a:t> </a:t>
-            </a:r>
-            <a:r>
-              <a:rPr sz="2800" spc="-15" dirty="0">
-                <a:solidFill>
-                  <a:srgbClr val="444949"/>
-                </a:solidFill>
-                <a:latin typeface="Roboto Light" panose="02000000000000000000" pitchFamily="2" charset="0"/>
-                <a:ea typeface="Roboto Light" panose="02000000000000000000" pitchFamily="2" charset="0"/>
-                <a:cs typeface="Gill Sans MT"/>
-              </a:rPr>
-              <a:t>an</a:t>
-            </a:r>
-            <a:r>
-              <a:rPr sz="2800" dirty="0">
-                <a:solidFill>
-                  <a:srgbClr val="444949"/>
-                </a:solidFill>
-                <a:latin typeface="Roboto Light" panose="02000000000000000000" pitchFamily="2" charset="0"/>
-                <a:ea typeface="Roboto Light" panose="02000000000000000000" pitchFamily="2" charset="0"/>
-                <a:cs typeface="Gill Sans MT"/>
-              </a:rPr>
-              <a:t> </a:t>
-            </a:r>
-            <a:r>
-              <a:rPr sz="2800" spc="-20" dirty="0">
-                <a:solidFill>
-                  <a:srgbClr val="444949"/>
-                </a:solidFill>
-                <a:latin typeface="Roboto Light" panose="02000000000000000000" pitchFamily="2" charset="0"/>
-                <a:ea typeface="Roboto Light" panose="02000000000000000000" pitchFamily="2" charset="0"/>
-                <a:cs typeface="Gill Sans MT"/>
-              </a:rPr>
-              <a:t>example</a:t>
-            </a:r>
-            <a:endParaRPr sz="2800" dirty="0">
-              <a:latin typeface="Roboto Light" panose="02000000000000000000" pitchFamily="2" charset="0"/>
-              <a:ea typeface="Roboto Light" panose="02000000000000000000" pitchFamily="2" charset="0"/>
-              <a:cs typeface="Gill Sans MT"/>
-            </a:endParaRPr>
-          </a:p>
-        </p:txBody>
-      </p:sp>
+      </p:pic>
     </p:spTree>
+    <p:extLst>
+      <p:ext uri="{BB962C8B-B14F-4D97-AF65-F5344CB8AC3E}">
+        <p14:creationId xmlns:p14="http://schemas.microsoft.com/office/powerpoint/2010/main" val="2985748879"/>
+      </p:ext>
+    </p:extLst>
   </p:cSld>
   <p:clrMapOvr>
     <a:masterClrMapping/>
@@ -20155,7 +19974,187 @@
 </p:sld>
 </file>
 
-<file path=ppt/slides/slide3.xml><?xml version="1.0" encoding="utf-8"?>
+<file path=ppt/slides/slide17.xml><?xml version="1.0" encoding="utf-8"?>
+<p:sld xmlns:a="http://schemas.openxmlformats.org/drawingml/2006/main" xmlns:r="http://schemas.openxmlformats.org/officeDocument/2006/relationships" xmlns:p="http://schemas.openxmlformats.org/presentationml/2006/main">
+  <p:cSld>
+    <p:spTree>
+      <p:nvGrpSpPr>
+        <p:cNvPr id="1" name=""/>
+        <p:cNvGrpSpPr/>
+        <p:nvPr/>
+      </p:nvGrpSpPr>
+      <p:grpSpPr>
+        <a:xfrm>
+          <a:off x="0" y="0"/>
+          <a:ext cx="0" cy="0"/>
+          <a:chOff x="0" y="0"/>
+          <a:chExt cx="0" cy="0"/>
+        </a:xfrm>
+      </p:grpSpPr>
+      <p:pic>
+        <p:nvPicPr>
+          <p:cNvPr id="6" name="Picture 5">
+            <a:extLst>
+              <a:ext uri="{FF2B5EF4-FFF2-40B4-BE49-F238E27FC236}">
+                <a16:creationId xmlns:a16="http://schemas.microsoft.com/office/drawing/2014/main" id="{B598BCB9-213E-4DCE-95DA-E60CCB8495C8}"/>
+              </a:ext>
+            </a:extLst>
+          </p:cNvPr>
+          <p:cNvPicPr>
+            <a:picLocks noChangeAspect="1"/>
+          </p:cNvPicPr>
+          <p:nvPr/>
+        </p:nvPicPr>
+        <p:blipFill>
+          <a:blip r:embed="rId2"/>
+          <a:stretch>
+            <a:fillRect/>
+          </a:stretch>
+        </p:blipFill>
+        <p:spPr>
+          <a:xfrm>
+            <a:off x="2466975" y="923925"/>
+            <a:ext cx="7258050" cy="5010150"/>
+          </a:xfrm>
+          <a:prstGeom prst="rect">
+            <a:avLst/>
+          </a:prstGeom>
+        </p:spPr>
+      </p:pic>
+    </p:spTree>
+    <p:extLst>
+      <p:ext uri="{BB962C8B-B14F-4D97-AF65-F5344CB8AC3E}">
+        <p14:creationId xmlns:p14="http://schemas.microsoft.com/office/powerpoint/2010/main" val="593251037"/>
+      </p:ext>
+    </p:extLst>
+  </p:cSld>
+  <p:clrMapOvr>
+    <a:masterClrMapping/>
+  </p:clrMapOvr>
+</p:sld>
+</file>
+
+<file path=ppt/slides/slide18.xml><?xml version="1.0" encoding="utf-8"?>
+<p:sld xmlns:a="http://schemas.openxmlformats.org/drawingml/2006/main" xmlns:r="http://schemas.openxmlformats.org/officeDocument/2006/relationships" xmlns:p="http://schemas.openxmlformats.org/presentationml/2006/main">
+  <p:cSld>
+    <p:spTree>
+      <p:nvGrpSpPr>
+        <p:cNvPr id="1" name=""/>
+        <p:cNvGrpSpPr/>
+        <p:nvPr/>
+      </p:nvGrpSpPr>
+      <p:grpSpPr>
+        <a:xfrm>
+          <a:off x="0" y="0"/>
+          <a:ext cx="0" cy="0"/>
+          <a:chOff x="0" y="0"/>
+          <a:chExt cx="0" cy="0"/>
+        </a:xfrm>
+      </p:grpSpPr>
+      <p:pic>
+        <p:nvPicPr>
+          <p:cNvPr id="3" name="Picture 2">
+            <a:extLst>
+              <a:ext uri="{FF2B5EF4-FFF2-40B4-BE49-F238E27FC236}">
+                <a16:creationId xmlns:a16="http://schemas.microsoft.com/office/drawing/2014/main" id="{D641C95D-337A-4D90-945A-8A0EA3AF8850}"/>
+              </a:ext>
+            </a:extLst>
+          </p:cNvPr>
+          <p:cNvPicPr>
+            <a:picLocks noChangeAspect="1"/>
+          </p:cNvPicPr>
+          <p:nvPr/>
+        </p:nvPicPr>
+        <p:blipFill>
+          <a:blip r:embed="rId2"/>
+          <a:stretch>
+            <a:fillRect/>
+          </a:stretch>
+        </p:blipFill>
+        <p:spPr>
+          <a:xfrm>
+            <a:off x="814387" y="438150"/>
+            <a:ext cx="10563225" cy="5981700"/>
+          </a:xfrm>
+          <a:prstGeom prst="rect">
+            <a:avLst/>
+          </a:prstGeom>
+        </p:spPr>
+      </p:pic>
+    </p:spTree>
+    <p:extLst>
+      <p:ext uri="{BB962C8B-B14F-4D97-AF65-F5344CB8AC3E}">
+        <p14:creationId xmlns:p14="http://schemas.microsoft.com/office/powerpoint/2010/main" val="779784013"/>
+      </p:ext>
+    </p:extLst>
+  </p:cSld>
+  <p:clrMapOvr>
+    <a:masterClrMapping/>
+  </p:clrMapOvr>
+</p:sld>
+</file>
+
+<file path=ppt/slides/slide19.xml><?xml version="1.0" encoding="utf-8"?>
+<p:sld xmlns:a="http://schemas.openxmlformats.org/drawingml/2006/main" xmlns:r="http://schemas.openxmlformats.org/officeDocument/2006/relationships" xmlns:p="http://schemas.openxmlformats.org/presentationml/2006/main">
+  <p:cSld>
+    <p:spTree>
+      <p:nvGrpSpPr>
+        <p:cNvPr id="1" name=""/>
+        <p:cNvGrpSpPr/>
+        <p:nvPr/>
+      </p:nvGrpSpPr>
+      <p:grpSpPr>
+        <a:xfrm>
+          <a:off x="0" y="0"/>
+          <a:ext cx="0" cy="0"/>
+          <a:chOff x="0" y="0"/>
+          <a:chExt cx="0" cy="0"/>
+        </a:xfrm>
+      </p:grpSpPr>
+      <p:pic>
+        <p:nvPicPr>
+          <p:cNvPr id="4" name="Picture 3">
+            <a:extLst>
+              <a:ext uri="{FF2B5EF4-FFF2-40B4-BE49-F238E27FC236}">
+                <a16:creationId xmlns:a16="http://schemas.microsoft.com/office/drawing/2014/main" id="{67F4261C-6D60-482C-9B49-9366260C3447}"/>
+              </a:ext>
+            </a:extLst>
+          </p:cNvPr>
+          <p:cNvPicPr>
+            <a:picLocks noChangeAspect="1"/>
+          </p:cNvPicPr>
+          <p:nvPr/>
+        </p:nvPicPr>
+        <p:blipFill>
+          <a:blip r:embed="rId2"/>
+          <a:stretch>
+            <a:fillRect/>
+          </a:stretch>
+        </p:blipFill>
+        <p:spPr>
+          <a:xfrm>
+            <a:off x="1133475" y="333375"/>
+            <a:ext cx="9925050" cy="6191250"/>
+          </a:xfrm>
+          <a:prstGeom prst="rect">
+            <a:avLst/>
+          </a:prstGeom>
+        </p:spPr>
+      </p:pic>
+    </p:spTree>
+    <p:extLst>
+      <p:ext uri="{BB962C8B-B14F-4D97-AF65-F5344CB8AC3E}">
+        <p14:creationId xmlns:p14="http://schemas.microsoft.com/office/powerpoint/2010/main" val="4060987819"/>
+      </p:ext>
+    </p:extLst>
+  </p:cSld>
+  <p:clrMapOvr>
+    <a:masterClrMapping/>
+  </p:clrMapOvr>
+</p:sld>
+</file>
+
+<file path=ppt/slides/slide2.xml><?xml version="1.0" encoding="utf-8"?>
 <p:sld xmlns:a="http://schemas.openxmlformats.org/drawingml/2006/main" xmlns:r="http://schemas.openxmlformats.org/officeDocument/2006/relationships" xmlns:p="http://schemas.openxmlformats.org/presentationml/2006/main">
   <p:cSld>
     <p:spTree>
@@ -22558,7 +22557,607 @@
 </p:sld>
 </file>
 
-<file path=ppt/slides/slide4.xml><?xml version="1.0" encoding="utf-8"?>
+<file path=ppt/slides/slide20.xml><?xml version="1.0" encoding="utf-8"?>
+<p:sld xmlns:a="http://schemas.openxmlformats.org/drawingml/2006/main" xmlns:r="http://schemas.openxmlformats.org/officeDocument/2006/relationships" xmlns:p="http://schemas.openxmlformats.org/presentationml/2006/main">
+  <p:cSld>
+    <p:spTree>
+      <p:nvGrpSpPr>
+        <p:cNvPr id="1" name=""/>
+        <p:cNvGrpSpPr/>
+        <p:nvPr/>
+      </p:nvGrpSpPr>
+      <p:grpSpPr>
+        <a:xfrm>
+          <a:off x="0" y="0"/>
+          <a:ext cx="0" cy="0"/>
+          <a:chOff x="0" y="0"/>
+          <a:chExt cx="0" cy="0"/>
+        </a:xfrm>
+      </p:grpSpPr>
+      <p:pic>
+        <p:nvPicPr>
+          <p:cNvPr id="3" name="Picture 2">
+            <a:extLst>
+              <a:ext uri="{FF2B5EF4-FFF2-40B4-BE49-F238E27FC236}">
+                <a16:creationId xmlns:a16="http://schemas.microsoft.com/office/drawing/2014/main" id="{7F008BC7-C9AC-4D41-B60F-F0DAE52B5083}"/>
+              </a:ext>
+            </a:extLst>
+          </p:cNvPr>
+          <p:cNvPicPr>
+            <a:picLocks noChangeAspect="1"/>
+          </p:cNvPicPr>
+          <p:nvPr/>
+        </p:nvPicPr>
+        <p:blipFill>
+          <a:blip r:embed="rId2"/>
+          <a:stretch>
+            <a:fillRect/>
+          </a:stretch>
+        </p:blipFill>
+        <p:spPr>
+          <a:xfrm>
+            <a:off x="1487569" y="0"/>
+            <a:ext cx="9216861" cy="6858000"/>
+          </a:xfrm>
+          <a:prstGeom prst="rect">
+            <a:avLst/>
+          </a:prstGeom>
+        </p:spPr>
+      </p:pic>
+    </p:spTree>
+    <p:extLst>
+      <p:ext uri="{BB962C8B-B14F-4D97-AF65-F5344CB8AC3E}">
+        <p14:creationId xmlns:p14="http://schemas.microsoft.com/office/powerpoint/2010/main" val="2441082376"/>
+      </p:ext>
+    </p:extLst>
+  </p:cSld>
+  <p:clrMapOvr>
+    <a:masterClrMapping/>
+  </p:clrMapOvr>
+</p:sld>
+</file>
+
+<file path=ppt/slides/slide21.xml><?xml version="1.0" encoding="utf-8"?>
+<p:sld xmlns:a="http://schemas.openxmlformats.org/drawingml/2006/main" xmlns:r="http://schemas.openxmlformats.org/officeDocument/2006/relationships" xmlns:p="http://schemas.openxmlformats.org/presentationml/2006/main">
+  <p:cSld>
+    <p:spTree>
+      <p:nvGrpSpPr>
+        <p:cNvPr id="1" name=""/>
+        <p:cNvGrpSpPr/>
+        <p:nvPr/>
+      </p:nvGrpSpPr>
+      <p:grpSpPr>
+        <a:xfrm>
+          <a:off x="0" y="0"/>
+          <a:ext cx="0" cy="0"/>
+          <a:chOff x="0" y="0"/>
+          <a:chExt cx="0" cy="0"/>
+        </a:xfrm>
+      </p:grpSpPr>
+      <p:pic>
+        <p:nvPicPr>
+          <p:cNvPr id="4" name="Picture 3">
+            <a:extLst>
+              <a:ext uri="{FF2B5EF4-FFF2-40B4-BE49-F238E27FC236}">
+                <a16:creationId xmlns:a16="http://schemas.microsoft.com/office/drawing/2014/main" id="{8B198E4F-2EBF-4EEE-8398-DDDC2D369D06}"/>
+              </a:ext>
+            </a:extLst>
+          </p:cNvPr>
+          <p:cNvPicPr>
+            <a:picLocks noChangeAspect="1"/>
+          </p:cNvPicPr>
+          <p:nvPr/>
+        </p:nvPicPr>
+        <p:blipFill>
+          <a:blip r:embed="rId2"/>
+          <a:stretch>
+            <a:fillRect/>
+          </a:stretch>
+        </p:blipFill>
+        <p:spPr>
+          <a:xfrm>
+            <a:off x="1646152" y="0"/>
+            <a:ext cx="8899695" cy="6858000"/>
+          </a:xfrm>
+          <a:prstGeom prst="rect">
+            <a:avLst/>
+          </a:prstGeom>
+        </p:spPr>
+      </p:pic>
+    </p:spTree>
+    <p:extLst>
+      <p:ext uri="{BB962C8B-B14F-4D97-AF65-F5344CB8AC3E}">
+        <p14:creationId xmlns:p14="http://schemas.microsoft.com/office/powerpoint/2010/main" val="4262700180"/>
+      </p:ext>
+    </p:extLst>
+  </p:cSld>
+  <p:clrMapOvr>
+    <a:masterClrMapping/>
+  </p:clrMapOvr>
+</p:sld>
+</file>
+
+<file path=ppt/slides/slide22.xml><?xml version="1.0" encoding="utf-8"?>
+<p:sld xmlns:a="http://schemas.openxmlformats.org/drawingml/2006/main" xmlns:r="http://schemas.openxmlformats.org/officeDocument/2006/relationships" xmlns:p="http://schemas.openxmlformats.org/presentationml/2006/main">
+  <p:cSld>
+    <p:spTree>
+      <p:nvGrpSpPr>
+        <p:cNvPr id="1" name=""/>
+        <p:cNvGrpSpPr/>
+        <p:nvPr/>
+      </p:nvGrpSpPr>
+      <p:grpSpPr>
+        <a:xfrm>
+          <a:off x="0" y="0"/>
+          <a:ext cx="0" cy="0"/>
+          <a:chOff x="0" y="0"/>
+          <a:chExt cx="0" cy="0"/>
+        </a:xfrm>
+      </p:grpSpPr>
+      <p:pic>
+        <p:nvPicPr>
+          <p:cNvPr id="3" name="Picture 2">
+            <a:extLst>
+              <a:ext uri="{FF2B5EF4-FFF2-40B4-BE49-F238E27FC236}">
+                <a16:creationId xmlns:a16="http://schemas.microsoft.com/office/drawing/2014/main" id="{A40DCD5E-27E8-4481-9467-273878A07846}"/>
+              </a:ext>
+            </a:extLst>
+          </p:cNvPr>
+          <p:cNvPicPr>
+            <a:picLocks noChangeAspect="1"/>
+          </p:cNvPicPr>
+          <p:nvPr/>
+        </p:nvPicPr>
+        <p:blipFill>
+          <a:blip r:embed="rId2"/>
+          <a:stretch>
+            <a:fillRect/>
+          </a:stretch>
+        </p:blipFill>
+        <p:spPr>
+          <a:xfrm>
+            <a:off x="0" y="67538"/>
+            <a:ext cx="12192000" cy="6722923"/>
+          </a:xfrm>
+          <a:prstGeom prst="rect">
+            <a:avLst/>
+          </a:prstGeom>
+        </p:spPr>
+      </p:pic>
+    </p:spTree>
+    <p:extLst>
+      <p:ext uri="{BB962C8B-B14F-4D97-AF65-F5344CB8AC3E}">
+        <p14:creationId xmlns:p14="http://schemas.microsoft.com/office/powerpoint/2010/main" val="766970911"/>
+      </p:ext>
+    </p:extLst>
+  </p:cSld>
+  <p:clrMapOvr>
+    <a:masterClrMapping/>
+  </p:clrMapOvr>
+</p:sld>
+</file>
+
+<file path=ppt/slides/slide23.xml><?xml version="1.0" encoding="utf-8"?>
+<p:sld xmlns:a="http://schemas.openxmlformats.org/drawingml/2006/main" xmlns:r="http://schemas.openxmlformats.org/officeDocument/2006/relationships" xmlns:p="http://schemas.openxmlformats.org/presentationml/2006/main">
+  <p:cSld>
+    <p:spTree>
+      <p:nvGrpSpPr>
+        <p:cNvPr id="1" name=""/>
+        <p:cNvGrpSpPr/>
+        <p:nvPr/>
+      </p:nvGrpSpPr>
+      <p:grpSpPr>
+        <a:xfrm>
+          <a:off x="0" y="0"/>
+          <a:ext cx="0" cy="0"/>
+          <a:chOff x="0" y="0"/>
+          <a:chExt cx="0" cy="0"/>
+        </a:xfrm>
+      </p:grpSpPr>
+      <p:pic>
+        <p:nvPicPr>
+          <p:cNvPr id="4" name="Picture 3">
+            <a:extLst>
+              <a:ext uri="{FF2B5EF4-FFF2-40B4-BE49-F238E27FC236}">
+                <a16:creationId xmlns:a16="http://schemas.microsoft.com/office/drawing/2014/main" id="{43905063-C2C7-45FA-AC23-4D17971BB63E}"/>
+              </a:ext>
+            </a:extLst>
+          </p:cNvPr>
+          <p:cNvPicPr>
+            <a:picLocks noChangeAspect="1"/>
+          </p:cNvPicPr>
+          <p:nvPr/>
+        </p:nvPicPr>
+        <p:blipFill>
+          <a:blip r:embed="rId2"/>
+          <a:stretch>
+            <a:fillRect/>
+          </a:stretch>
+        </p:blipFill>
+        <p:spPr>
+          <a:xfrm>
+            <a:off x="288822" y="0"/>
+            <a:ext cx="11614355" cy="6858000"/>
+          </a:xfrm>
+          <a:prstGeom prst="rect">
+            <a:avLst/>
+          </a:prstGeom>
+        </p:spPr>
+      </p:pic>
+    </p:spTree>
+    <p:extLst>
+      <p:ext uri="{BB962C8B-B14F-4D97-AF65-F5344CB8AC3E}">
+        <p14:creationId xmlns:p14="http://schemas.microsoft.com/office/powerpoint/2010/main" val="3231347388"/>
+      </p:ext>
+    </p:extLst>
+  </p:cSld>
+  <p:clrMapOvr>
+    <a:masterClrMapping/>
+  </p:clrMapOvr>
+</p:sld>
+</file>
+
+<file path=ppt/slides/slide24.xml><?xml version="1.0" encoding="utf-8"?>
+<p:sld xmlns:a="http://schemas.openxmlformats.org/drawingml/2006/main" xmlns:r="http://schemas.openxmlformats.org/officeDocument/2006/relationships" xmlns:p="http://schemas.openxmlformats.org/presentationml/2006/main">
+  <p:cSld>
+    <p:spTree>
+      <p:nvGrpSpPr>
+        <p:cNvPr id="1" name=""/>
+        <p:cNvGrpSpPr/>
+        <p:nvPr/>
+      </p:nvGrpSpPr>
+      <p:grpSpPr>
+        <a:xfrm>
+          <a:off x="0" y="0"/>
+          <a:ext cx="0" cy="0"/>
+          <a:chOff x="0" y="0"/>
+          <a:chExt cx="0" cy="0"/>
+        </a:xfrm>
+      </p:grpSpPr>
+      <p:pic>
+        <p:nvPicPr>
+          <p:cNvPr id="3" name="Picture 2">
+            <a:extLst>
+              <a:ext uri="{FF2B5EF4-FFF2-40B4-BE49-F238E27FC236}">
+                <a16:creationId xmlns:a16="http://schemas.microsoft.com/office/drawing/2014/main" id="{B15C44D8-9881-4D96-B7AC-8B8B0829BD8B}"/>
+              </a:ext>
+            </a:extLst>
+          </p:cNvPr>
+          <p:cNvPicPr>
+            <a:picLocks noChangeAspect="1"/>
+          </p:cNvPicPr>
+          <p:nvPr/>
+        </p:nvPicPr>
+        <p:blipFill>
+          <a:blip r:embed="rId3"/>
+          <a:stretch>
+            <a:fillRect/>
+          </a:stretch>
+        </p:blipFill>
+        <p:spPr>
+          <a:xfrm>
+            <a:off x="90942" y="0"/>
+            <a:ext cx="12010116" cy="6858000"/>
+          </a:xfrm>
+          <a:prstGeom prst="rect">
+            <a:avLst/>
+          </a:prstGeom>
+        </p:spPr>
+      </p:pic>
+    </p:spTree>
+    <p:extLst>
+      <p:ext uri="{BB962C8B-B14F-4D97-AF65-F5344CB8AC3E}">
+        <p14:creationId xmlns:p14="http://schemas.microsoft.com/office/powerpoint/2010/main" val="1812203665"/>
+      </p:ext>
+    </p:extLst>
+  </p:cSld>
+  <p:clrMapOvr>
+    <a:masterClrMapping/>
+  </p:clrMapOvr>
+</p:sld>
+</file>
+
+<file path=ppt/slides/slide25.xml><?xml version="1.0" encoding="utf-8"?>
+<p:sld xmlns:a="http://schemas.openxmlformats.org/drawingml/2006/main" xmlns:r="http://schemas.openxmlformats.org/officeDocument/2006/relationships" xmlns:p="http://schemas.openxmlformats.org/presentationml/2006/main">
+  <p:cSld>
+    <p:spTree>
+      <p:nvGrpSpPr>
+        <p:cNvPr id="1" name=""/>
+        <p:cNvGrpSpPr/>
+        <p:nvPr/>
+      </p:nvGrpSpPr>
+      <p:grpSpPr>
+        <a:xfrm>
+          <a:off x="0" y="0"/>
+          <a:ext cx="0" cy="0"/>
+          <a:chOff x="0" y="0"/>
+          <a:chExt cx="0" cy="0"/>
+        </a:xfrm>
+      </p:grpSpPr>
+      <p:pic>
+        <p:nvPicPr>
+          <p:cNvPr id="4" name="Picture 3">
+            <a:extLst>
+              <a:ext uri="{FF2B5EF4-FFF2-40B4-BE49-F238E27FC236}">
+                <a16:creationId xmlns:a16="http://schemas.microsoft.com/office/drawing/2014/main" id="{D209622E-C650-44AB-8780-E6E6D315907C}"/>
+              </a:ext>
+            </a:extLst>
+          </p:cNvPr>
+          <p:cNvPicPr>
+            <a:picLocks noChangeAspect="1"/>
+          </p:cNvPicPr>
+          <p:nvPr/>
+        </p:nvPicPr>
+        <p:blipFill>
+          <a:blip r:embed="rId3"/>
+          <a:stretch>
+            <a:fillRect/>
+          </a:stretch>
+        </p:blipFill>
+        <p:spPr>
+          <a:xfrm>
+            <a:off x="66569" y="0"/>
+            <a:ext cx="12058862" cy="6858000"/>
+          </a:xfrm>
+          <a:prstGeom prst="rect">
+            <a:avLst/>
+          </a:prstGeom>
+        </p:spPr>
+      </p:pic>
+    </p:spTree>
+    <p:extLst>
+      <p:ext uri="{BB962C8B-B14F-4D97-AF65-F5344CB8AC3E}">
+        <p14:creationId xmlns:p14="http://schemas.microsoft.com/office/powerpoint/2010/main" val="2367581235"/>
+      </p:ext>
+    </p:extLst>
+  </p:cSld>
+  <p:clrMapOvr>
+    <a:masterClrMapping/>
+  </p:clrMapOvr>
+</p:sld>
+</file>
+
+<file path=ppt/slides/slide26.xml><?xml version="1.0" encoding="utf-8"?>
+<p:sld xmlns:a="http://schemas.openxmlformats.org/drawingml/2006/main" xmlns:r="http://schemas.openxmlformats.org/officeDocument/2006/relationships" xmlns:p="http://schemas.openxmlformats.org/presentationml/2006/main">
+  <p:cSld>
+    <p:spTree>
+      <p:nvGrpSpPr>
+        <p:cNvPr id="1" name=""/>
+        <p:cNvGrpSpPr/>
+        <p:nvPr/>
+      </p:nvGrpSpPr>
+      <p:grpSpPr>
+        <a:xfrm>
+          <a:off x="0" y="0"/>
+          <a:ext cx="0" cy="0"/>
+          <a:chOff x="0" y="0"/>
+          <a:chExt cx="0" cy="0"/>
+        </a:xfrm>
+      </p:grpSpPr>
+      <p:pic>
+        <p:nvPicPr>
+          <p:cNvPr id="3" name="Picture 2">
+            <a:extLst>
+              <a:ext uri="{FF2B5EF4-FFF2-40B4-BE49-F238E27FC236}">
+                <a16:creationId xmlns:a16="http://schemas.microsoft.com/office/drawing/2014/main" id="{5CCBEE80-000A-46C0-8BD3-A25371F38059}"/>
+              </a:ext>
+            </a:extLst>
+          </p:cNvPr>
+          <p:cNvPicPr>
+            <a:picLocks noChangeAspect="1"/>
+          </p:cNvPicPr>
+          <p:nvPr/>
+        </p:nvPicPr>
+        <p:blipFill>
+          <a:blip r:embed="rId3"/>
+          <a:stretch>
+            <a:fillRect/>
+          </a:stretch>
+        </p:blipFill>
+        <p:spPr>
+          <a:xfrm>
+            <a:off x="1609211" y="0"/>
+            <a:ext cx="8973578" cy="6858000"/>
+          </a:xfrm>
+          <a:prstGeom prst="rect">
+            <a:avLst/>
+          </a:prstGeom>
+        </p:spPr>
+      </p:pic>
+    </p:spTree>
+    <p:extLst>
+      <p:ext uri="{BB962C8B-B14F-4D97-AF65-F5344CB8AC3E}">
+        <p14:creationId xmlns:p14="http://schemas.microsoft.com/office/powerpoint/2010/main" val="2672867098"/>
+      </p:ext>
+    </p:extLst>
+  </p:cSld>
+  <p:clrMapOvr>
+    <a:masterClrMapping/>
+  </p:clrMapOvr>
+</p:sld>
+</file>
+
+<file path=ppt/slides/slide27.xml><?xml version="1.0" encoding="utf-8"?>
+<p:sld xmlns:a="http://schemas.openxmlformats.org/drawingml/2006/main" xmlns:r="http://schemas.openxmlformats.org/officeDocument/2006/relationships" xmlns:p="http://schemas.openxmlformats.org/presentationml/2006/main">
+  <p:cSld>
+    <p:spTree>
+      <p:nvGrpSpPr>
+        <p:cNvPr id="1" name=""/>
+        <p:cNvGrpSpPr/>
+        <p:nvPr/>
+      </p:nvGrpSpPr>
+      <p:grpSpPr>
+        <a:xfrm>
+          <a:off x="0" y="0"/>
+          <a:ext cx="0" cy="0"/>
+          <a:chOff x="0" y="0"/>
+          <a:chExt cx="0" cy="0"/>
+        </a:xfrm>
+      </p:grpSpPr>
+      <p:pic>
+        <p:nvPicPr>
+          <p:cNvPr id="4" name="Picture 3">
+            <a:extLst>
+              <a:ext uri="{FF2B5EF4-FFF2-40B4-BE49-F238E27FC236}">
+                <a16:creationId xmlns:a16="http://schemas.microsoft.com/office/drawing/2014/main" id="{87487D07-354F-4337-9458-E89DF086E71B}"/>
+              </a:ext>
+            </a:extLst>
+          </p:cNvPr>
+          <p:cNvPicPr>
+            <a:picLocks noChangeAspect="1"/>
+          </p:cNvPicPr>
+          <p:nvPr/>
+        </p:nvPicPr>
+        <p:blipFill>
+          <a:blip r:embed="rId3"/>
+          <a:stretch>
+            <a:fillRect/>
+          </a:stretch>
+        </p:blipFill>
+        <p:spPr>
+          <a:xfrm>
+            <a:off x="0" y="971960"/>
+            <a:ext cx="12192000" cy="4914079"/>
+          </a:xfrm>
+          <a:prstGeom prst="rect">
+            <a:avLst/>
+          </a:prstGeom>
+        </p:spPr>
+      </p:pic>
+    </p:spTree>
+    <p:extLst>
+      <p:ext uri="{BB962C8B-B14F-4D97-AF65-F5344CB8AC3E}">
+        <p14:creationId xmlns:p14="http://schemas.microsoft.com/office/powerpoint/2010/main" val="3142645458"/>
+      </p:ext>
+    </p:extLst>
+  </p:cSld>
+  <p:clrMapOvr>
+    <a:masterClrMapping/>
+  </p:clrMapOvr>
+</p:sld>
+</file>
+
+<file path=ppt/slides/slide28.xml><?xml version="1.0" encoding="utf-8"?>
+<p:sld xmlns:a="http://schemas.openxmlformats.org/drawingml/2006/main" xmlns:r="http://schemas.openxmlformats.org/officeDocument/2006/relationships" xmlns:p="http://schemas.openxmlformats.org/presentationml/2006/main">
+  <p:cSld>
+    <p:spTree>
+      <p:nvGrpSpPr>
+        <p:cNvPr id="1" name=""/>
+        <p:cNvGrpSpPr/>
+        <p:nvPr/>
+      </p:nvGrpSpPr>
+      <p:grpSpPr>
+        <a:xfrm>
+          <a:off x="0" y="0"/>
+          <a:ext cx="0" cy="0"/>
+          <a:chOff x="0" y="0"/>
+          <a:chExt cx="0" cy="0"/>
+        </a:xfrm>
+      </p:grpSpPr>
+      <p:pic>
+        <p:nvPicPr>
+          <p:cNvPr id="3" name="Picture 2">
+            <a:extLst>
+              <a:ext uri="{FF2B5EF4-FFF2-40B4-BE49-F238E27FC236}">
+                <a16:creationId xmlns:a16="http://schemas.microsoft.com/office/drawing/2014/main" id="{5B94E142-FEAD-4910-BC25-64BDED55EFC5}"/>
+              </a:ext>
+            </a:extLst>
+          </p:cNvPr>
+          <p:cNvPicPr>
+            <a:picLocks noChangeAspect="1"/>
+          </p:cNvPicPr>
+          <p:nvPr/>
+        </p:nvPicPr>
+        <p:blipFill>
+          <a:blip r:embed="rId3"/>
+          <a:stretch>
+            <a:fillRect/>
+          </a:stretch>
+        </p:blipFill>
+        <p:spPr>
+          <a:xfrm>
+            <a:off x="1322203" y="0"/>
+            <a:ext cx="9547593" cy="6858000"/>
+          </a:xfrm>
+          <a:prstGeom prst="rect">
+            <a:avLst/>
+          </a:prstGeom>
+        </p:spPr>
+      </p:pic>
+    </p:spTree>
+    <p:extLst>
+      <p:ext uri="{BB962C8B-B14F-4D97-AF65-F5344CB8AC3E}">
+        <p14:creationId xmlns:p14="http://schemas.microsoft.com/office/powerpoint/2010/main" val="3994513835"/>
+      </p:ext>
+    </p:extLst>
+  </p:cSld>
+  <p:clrMapOvr>
+    <a:masterClrMapping/>
+  </p:clrMapOvr>
+</p:sld>
+</file>
+
+<file path=ppt/slides/slide29.xml><?xml version="1.0" encoding="utf-8"?>
+<p:sld xmlns:a="http://schemas.openxmlformats.org/drawingml/2006/main" xmlns:r="http://schemas.openxmlformats.org/officeDocument/2006/relationships" xmlns:p="http://schemas.openxmlformats.org/presentationml/2006/main">
+  <p:cSld>
+    <p:spTree>
+      <p:nvGrpSpPr>
+        <p:cNvPr id="1" name=""/>
+        <p:cNvGrpSpPr/>
+        <p:nvPr/>
+      </p:nvGrpSpPr>
+      <p:grpSpPr>
+        <a:xfrm>
+          <a:off x="0" y="0"/>
+          <a:ext cx="0" cy="0"/>
+          <a:chOff x="0" y="0"/>
+          <a:chExt cx="0" cy="0"/>
+        </a:xfrm>
+      </p:grpSpPr>
+      <p:pic>
+        <p:nvPicPr>
+          <p:cNvPr id="4" name="Picture 3">
+            <a:extLst>
+              <a:ext uri="{FF2B5EF4-FFF2-40B4-BE49-F238E27FC236}">
+                <a16:creationId xmlns:a16="http://schemas.microsoft.com/office/drawing/2014/main" id="{3B411E06-8294-458A-8B31-2904C655C95E}"/>
+              </a:ext>
+            </a:extLst>
+          </p:cNvPr>
+          <p:cNvPicPr>
+            <a:picLocks noChangeAspect="1"/>
+          </p:cNvPicPr>
+          <p:nvPr/>
+        </p:nvPicPr>
+        <p:blipFill>
+          <a:blip r:embed="rId3"/>
+          <a:stretch>
+            <a:fillRect/>
+          </a:stretch>
+        </p:blipFill>
+        <p:spPr>
+          <a:xfrm>
+            <a:off x="1761948" y="0"/>
+            <a:ext cx="8668104" cy="6858000"/>
+          </a:xfrm>
+          <a:prstGeom prst="rect">
+            <a:avLst/>
+          </a:prstGeom>
+        </p:spPr>
+      </p:pic>
+    </p:spTree>
+    <p:extLst>
+      <p:ext uri="{BB962C8B-B14F-4D97-AF65-F5344CB8AC3E}">
+        <p14:creationId xmlns:p14="http://schemas.microsoft.com/office/powerpoint/2010/main" val="805606129"/>
+      </p:ext>
+    </p:extLst>
+  </p:cSld>
+  <p:clrMapOvr>
+    <a:masterClrMapping/>
+  </p:clrMapOvr>
+</p:sld>
+</file>
+
+<file path=ppt/slides/slide3.xml><?xml version="1.0" encoding="utf-8"?>
 <p:sld xmlns:a="http://schemas.openxmlformats.org/drawingml/2006/main" xmlns:r="http://schemas.openxmlformats.org/officeDocument/2006/relationships" xmlns:p="http://schemas.openxmlformats.org/presentationml/2006/main">
   <p:cSld>
     <p:spTree>
@@ -24223,7 +24822,7 @@
 </p:sld>
 </file>
 
-<file path=ppt/slides/slide5.xml><?xml version="1.0" encoding="utf-8"?>
+<file path=ppt/slides/slide4.xml><?xml version="1.0" encoding="utf-8"?>
 <p:sld xmlns:a="http://schemas.openxmlformats.org/drawingml/2006/main" xmlns:r="http://schemas.openxmlformats.org/officeDocument/2006/relationships" xmlns:p="http://schemas.openxmlformats.org/presentationml/2006/main">
   <p:cSld>
     <p:spTree>
@@ -26742,7 +27341,7 @@
 </p:sld>
 </file>
 
-<file path=ppt/slides/slide6.xml><?xml version="1.0" encoding="utf-8"?>
+<file path=ppt/slides/slide5.xml><?xml version="1.0" encoding="utf-8"?>
 <p:sld xmlns:a="http://schemas.openxmlformats.org/drawingml/2006/main" xmlns:r="http://schemas.openxmlformats.org/officeDocument/2006/relationships" xmlns:p="http://schemas.openxmlformats.org/presentationml/2006/main">
   <p:cSld>
     <p:spTree>
@@ -28688,7 +29287,7 @@
 </p:sld>
 </file>
 
-<file path=ppt/slides/slide7.xml><?xml version="1.0" encoding="utf-8"?>
+<file path=ppt/slides/slide6.xml><?xml version="1.0" encoding="utf-8"?>
 <p:sld xmlns:a="http://schemas.openxmlformats.org/drawingml/2006/main" xmlns:r="http://schemas.openxmlformats.org/officeDocument/2006/relationships" xmlns:p="http://schemas.openxmlformats.org/presentationml/2006/main">
   <p:cSld>
     <p:spTree>
@@ -31087,7 +31686,7 @@
 </p:sld>
 </file>
 
-<file path=ppt/slides/slide8.xml><?xml version="1.0" encoding="utf-8"?>
+<file path=ppt/slides/slide7.xml><?xml version="1.0" encoding="utf-8"?>
 <p:sld xmlns:a="http://schemas.openxmlformats.org/drawingml/2006/main" xmlns:r="http://schemas.openxmlformats.org/officeDocument/2006/relationships" xmlns:p="http://schemas.openxmlformats.org/presentationml/2006/main">
   <p:cSld>
     <p:spTree>
@@ -32706,7 +33305,7 @@
 </p:sld>
 </file>
 
-<file path=ppt/slides/slide9.xml><?xml version="1.0" encoding="utf-8"?>
+<file path=ppt/slides/slide8.xml><?xml version="1.0" encoding="utf-8"?>
 <p:sld xmlns:a="http://schemas.openxmlformats.org/drawingml/2006/main" xmlns:r="http://schemas.openxmlformats.org/officeDocument/2006/relationships" xmlns:p="http://schemas.openxmlformats.org/presentationml/2006/main">
   <p:cSld>
     <p:spTree>
@@ -36997,6 +37596,1100 @@
           </a:prstGeom>
         </p:spPr>
       </p:pic>
+    </p:spTree>
+  </p:cSld>
+  <p:clrMapOvr>
+    <a:masterClrMapping/>
+  </p:clrMapOvr>
+</p:sld>
+</file>
+
+<file path=ppt/slides/slide9.xml><?xml version="1.0" encoding="utf-8"?>
+<p:sld xmlns:a="http://schemas.openxmlformats.org/drawingml/2006/main" xmlns:r="http://schemas.openxmlformats.org/officeDocument/2006/relationships" xmlns:p="http://schemas.openxmlformats.org/presentationml/2006/main">
+  <p:cSld>
+    <p:spTree>
+      <p:nvGrpSpPr>
+        <p:cNvPr id="1" name=""/>
+        <p:cNvGrpSpPr/>
+        <p:nvPr/>
+      </p:nvGrpSpPr>
+      <p:grpSpPr>
+        <a:xfrm>
+          <a:off x="0" y="0"/>
+          <a:ext cx="0" cy="0"/>
+          <a:chOff x="0" y="0"/>
+          <a:chExt cx="0" cy="0"/>
+        </a:xfrm>
+      </p:grpSpPr>
+      <p:sp>
+        <p:nvSpPr>
+          <p:cNvPr id="4" name="object 4"/>
+          <p:cNvSpPr txBox="1">
+            <a:spLocks noGrp="1"/>
+          </p:cNvSpPr>
+          <p:nvPr>
+            <p:ph type="title"/>
+          </p:nvPr>
+        </p:nvSpPr>
+        <p:spPr>
+          <a:xfrm>
+            <a:off x="916939" y="493407"/>
+            <a:ext cx="7607934" cy="443711"/>
+          </a:xfrm>
+          <a:prstGeom prst="rect">
+            <a:avLst/>
+          </a:prstGeom>
+        </p:spPr>
+        <p:txBody>
+          <a:bodyPr vert="horz" wrap="square" lIns="0" tIns="12700" rIns="0" bIns="0" rtlCol="0">
+            <a:spAutoFit/>
+          </a:bodyPr>
+          <a:lstStyle/>
+          <a:p>
+            <a:pPr marL="12700">
+              <a:lnSpc>
+                <a:spcPct val="100000"/>
+              </a:lnSpc>
+              <a:spcBef>
+                <a:spcPts val="100"/>
+              </a:spcBef>
+            </a:pPr>
+            <a:r>
+              <a:rPr spc="-50" dirty="0">
+                <a:latin typeface="Roboto Light" panose="02000000000000000000" pitchFamily="2" charset="0"/>
+                <a:ea typeface="Roboto Light" panose="02000000000000000000" pitchFamily="2" charset="0"/>
+              </a:rPr>
+              <a:t>ASGs</a:t>
+            </a:r>
+            <a:r>
+              <a:rPr spc="-5" dirty="0">
+                <a:latin typeface="Roboto Light" panose="02000000000000000000" pitchFamily="2" charset="0"/>
+                <a:ea typeface="Roboto Light" panose="02000000000000000000" pitchFamily="2" charset="0"/>
+              </a:rPr>
+              <a:t> </a:t>
+            </a:r>
+            <a:r>
+              <a:rPr spc="-70" dirty="0">
+                <a:latin typeface="Roboto Light" panose="02000000000000000000" pitchFamily="2" charset="0"/>
+                <a:ea typeface="Roboto Light" panose="02000000000000000000" pitchFamily="2" charset="0"/>
+              </a:rPr>
+              <a:t>have</a:t>
+            </a:r>
+            <a:r>
+              <a:rPr spc="-5" dirty="0">
+                <a:latin typeface="Roboto Light" panose="02000000000000000000" pitchFamily="2" charset="0"/>
+                <a:ea typeface="Roboto Light" panose="02000000000000000000" pitchFamily="2" charset="0"/>
+              </a:rPr>
+              <a:t> </a:t>
+            </a:r>
+            <a:r>
+              <a:rPr spc="-65" dirty="0">
+                <a:latin typeface="Roboto Light" panose="02000000000000000000" pitchFamily="2" charset="0"/>
+                <a:ea typeface="Roboto Light" panose="02000000000000000000" pitchFamily="2" charset="0"/>
+              </a:rPr>
+              <a:t>the</a:t>
+            </a:r>
+            <a:r>
+              <a:rPr spc="-5" dirty="0">
+                <a:latin typeface="Roboto Light" panose="02000000000000000000" pitchFamily="2" charset="0"/>
+                <a:ea typeface="Roboto Light" panose="02000000000000000000" pitchFamily="2" charset="0"/>
+              </a:rPr>
+              <a:t> </a:t>
+            </a:r>
+            <a:r>
+              <a:rPr spc="-85" dirty="0">
+                <a:latin typeface="Roboto Light" panose="02000000000000000000" pitchFamily="2" charset="0"/>
+                <a:ea typeface="Roboto Light" panose="02000000000000000000" pitchFamily="2" charset="0"/>
+              </a:rPr>
+              <a:t>following</a:t>
+            </a:r>
+            <a:r>
+              <a:rPr spc="-20" dirty="0">
+                <a:latin typeface="Roboto Light" panose="02000000000000000000" pitchFamily="2" charset="0"/>
+                <a:ea typeface="Roboto Light" panose="02000000000000000000" pitchFamily="2" charset="0"/>
+              </a:rPr>
+              <a:t> </a:t>
+            </a:r>
+            <a:r>
+              <a:rPr spc="-95" dirty="0">
+                <a:latin typeface="Roboto Light" panose="02000000000000000000" pitchFamily="2" charset="0"/>
+                <a:ea typeface="Roboto Light" panose="02000000000000000000" pitchFamily="2" charset="0"/>
+              </a:rPr>
+              <a:t>attributes</a:t>
+            </a:r>
+          </a:p>
+        </p:txBody>
+      </p:sp>
+      <p:sp>
+        <p:nvSpPr>
+          <p:cNvPr id="5" name="object 5"/>
+          <p:cNvSpPr txBox="1"/>
+          <p:nvPr/>
+        </p:nvSpPr>
+        <p:spPr>
+          <a:xfrm>
+            <a:off x="916939" y="1376849"/>
+            <a:ext cx="5247640" cy="4957126"/>
+          </a:xfrm>
+          <a:prstGeom prst="rect">
+            <a:avLst/>
+          </a:prstGeom>
+        </p:spPr>
+        <p:txBody>
+          <a:bodyPr vert="horz" wrap="square" lIns="0" tIns="50165" rIns="0" bIns="0" rtlCol="0">
+            <a:spAutoFit/>
+          </a:bodyPr>
+          <a:lstStyle/>
+          <a:p>
+            <a:pPr marL="241300" indent="-228600">
+              <a:lnSpc>
+                <a:spcPct val="100000"/>
+              </a:lnSpc>
+              <a:spcBef>
+                <a:spcPts val="395"/>
+              </a:spcBef>
+              <a:buFont typeface="Arial"/>
+              <a:buChar char="•"/>
+              <a:tabLst>
+                <a:tab pos="241300" algn="l"/>
+              </a:tabLst>
+            </a:pPr>
+            <a:r>
+              <a:rPr sz="2800" dirty="0">
+                <a:solidFill>
+                  <a:srgbClr val="444949"/>
+                </a:solidFill>
+                <a:latin typeface="Roboto Light" panose="02000000000000000000" pitchFamily="2" charset="0"/>
+                <a:ea typeface="Roboto Light" panose="02000000000000000000" pitchFamily="2" charset="0"/>
+                <a:cs typeface="Gill Sans MT"/>
+              </a:rPr>
+              <a:t>A</a:t>
+            </a:r>
+            <a:r>
+              <a:rPr sz="2800" spc="-25" dirty="0">
+                <a:solidFill>
+                  <a:srgbClr val="444949"/>
+                </a:solidFill>
+                <a:latin typeface="Roboto Light" panose="02000000000000000000" pitchFamily="2" charset="0"/>
+                <a:ea typeface="Roboto Light" panose="02000000000000000000" pitchFamily="2" charset="0"/>
+                <a:cs typeface="Gill Sans MT"/>
+              </a:rPr>
+              <a:t> </a:t>
+            </a:r>
+            <a:r>
+              <a:rPr sz="2800" spc="-40" dirty="0">
+                <a:solidFill>
+                  <a:srgbClr val="444949"/>
+                </a:solidFill>
+                <a:latin typeface="Roboto Light" panose="02000000000000000000" pitchFamily="2" charset="0"/>
+                <a:ea typeface="Roboto Light" panose="02000000000000000000" pitchFamily="2" charset="0"/>
+                <a:cs typeface="Gill Sans MT"/>
+              </a:rPr>
+              <a:t>launch</a:t>
+            </a:r>
+            <a:r>
+              <a:rPr sz="2800" spc="-10" dirty="0">
+                <a:solidFill>
+                  <a:srgbClr val="444949"/>
+                </a:solidFill>
+                <a:latin typeface="Roboto Light" panose="02000000000000000000" pitchFamily="2" charset="0"/>
+                <a:ea typeface="Roboto Light" panose="02000000000000000000" pitchFamily="2" charset="0"/>
+                <a:cs typeface="Gill Sans MT"/>
+              </a:rPr>
+              <a:t> </a:t>
+            </a:r>
+            <a:r>
+              <a:rPr sz="2800" spc="-55" dirty="0">
+                <a:solidFill>
+                  <a:srgbClr val="444949"/>
+                </a:solidFill>
+                <a:latin typeface="Roboto Light" panose="02000000000000000000" pitchFamily="2" charset="0"/>
+                <a:ea typeface="Roboto Light" panose="02000000000000000000" pitchFamily="2" charset="0"/>
+                <a:cs typeface="Gill Sans MT"/>
+              </a:rPr>
+              <a:t>configuration</a:t>
+            </a:r>
+            <a:endParaRPr sz="2800" dirty="0">
+              <a:latin typeface="Roboto Light" panose="02000000000000000000" pitchFamily="2" charset="0"/>
+              <a:ea typeface="Roboto Light" panose="02000000000000000000" pitchFamily="2" charset="0"/>
+              <a:cs typeface="Gill Sans MT"/>
+            </a:endParaRPr>
+          </a:p>
+          <a:p>
+            <a:pPr marL="698500" lvl="1" indent="-228600">
+              <a:lnSpc>
+                <a:spcPct val="100000"/>
+              </a:lnSpc>
+              <a:spcBef>
+                <a:spcPts val="259"/>
+              </a:spcBef>
+              <a:buFont typeface="Arial"/>
+              <a:buChar char="•"/>
+              <a:tabLst>
+                <a:tab pos="698500" algn="l"/>
+              </a:tabLst>
+            </a:pPr>
+            <a:r>
+              <a:rPr sz="2400" spc="-5" dirty="0">
+                <a:solidFill>
+                  <a:srgbClr val="444949"/>
+                </a:solidFill>
+                <a:latin typeface="Roboto Light" panose="02000000000000000000" pitchFamily="2" charset="0"/>
+                <a:ea typeface="Roboto Light" panose="02000000000000000000" pitchFamily="2" charset="0"/>
+                <a:cs typeface="Gill Sans MT"/>
+              </a:rPr>
+              <a:t>A</a:t>
+            </a:r>
+            <a:r>
+              <a:rPr sz="2400" dirty="0">
+                <a:solidFill>
+                  <a:srgbClr val="444949"/>
+                </a:solidFill>
+                <a:latin typeface="Roboto Light" panose="02000000000000000000" pitchFamily="2" charset="0"/>
+                <a:ea typeface="Roboto Light" panose="02000000000000000000" pitchFamily="2" charset="0"/>
+                <a:cs typeface="Gill Sans MT"/>
+              </a:rPr>
+              <a:t>M</a:t>
+            </a:r>
+            <a:r>
+              <a:rPr sz="2400" spc="-105" dirty="0">
+                <a:solidFill>
+                  <a:srgbClr val="444949"/>
+                </a:solidFill>
+                <a:latin typeface="Roboto Light" panose="02000000000000000000" pitchFamily="2" charset="0"/>
+                <a:ea typeface="Roboto Light" panose="02000000000000000000" pitchFamily="2" charset="0"/>
+                <a:cs typeface="Gill Sans MT"/>
+              </a:rPr>
+              <a:t>I</a:t>
+            </a:r>
+            <a:r>
+              <a:rPr sz="2400" spc="-5" dirty="0">
+                <a:solidFill>
+                  <a:srgbClr val="444949"/>
+                </a:solidFill>
+                <a:latin typeface="Roboto Light" panose="02000000000000000000" pitchFamily="2" charset="0"/>
+                <a:ea typeface="Roboto Light" panose="02000000000000000000" pitchFamily="2" charset="0"/>
+                <a:cs typeface="Gill Sans MT"/>
+              </a:rPr>
+              <a:t> </a:t>
+            </a:r>
+            <a:r>
+              <a:rPr sz="2400" spc="180" dirty="0">
+                <a:solidFill>
+                  <a:srgbClr val="444949"/>
+                </a:solidFill>
+                <a:latin typeface="Roboto Light" panose="02000000000000000000" pitchFamily="2" charset="0"/>
+                <a:ea typeface="Roboto Light" panose="02000000000000000000" pitchFamily="2" charset="0"/>
+                <a:cs typeface="Gill Sans MT"/>
+              </a:rPr>
+              <a:t>+</a:t>
+            </a:r>
+            <a:r>
+              <a:rPr sz="2400" spc="-5" dirty="0">
+                <a:solidFill>
+                  <a:srgbClr val="444949"/>
+                </a:solidFill>
+                <a:latin typeface="Roboto Light" panose="02000000000000000000" pitchFamily="2" charset="0"/>
+                <a:ea typeface="Roboto Light" panose="02000000000000000000" pitchFamily="2" charset="0"/>
+                <a:cs typeface="Gill Sans MT"/>
+              </a:rPr>
+              <a:t> </a:t>
+            </a:r>
+            <a:r>
+              <a:rPr sz="2400" spc="-105" dirty="0">
+                <a:solidFill>
+                  <a:srgbClr val="444949"/>
+                </a:solidFill>
+                <a:latin typeface="Roboto Light" panose="02000000000000000000" pitchFamily="2" charset="0"/>
+                <a:ea typeface="Roboto Light" panose="02000000000000000000" pitchFamily="2" charset="0"/>
+                <a:cs typeface="Gill Sans MT"/>
+              </a:rPr>
+              <a:t>I</a:t>
+            </a:r>
+            <a:r>
+              <a:rPr sz="2400" spc="-60" dirty="0">
+                <a:solidFill>
+                  <a:srgbClr val="444949"/>
+                </a:solidFill>
+                <a:latin typeface="Roboto Light" panose="02000000000000000000" pitchFamily="2" charset="0"/>
+                <a:ea typeface="Roboto Light" panose="02000000000000000000" pitchFamily="2" charset="0"/>
+                <a:cs typeface="Gill Sans MT"/>
+              </a:rPr>
+              <a:t>n</a:t>
+            </a:r>
+            <a:r>
+              <a:rPr sz="2400" spc="-45" dirty="0">
+                <a:solidFill>
+                  <a:srgbClr val="444949"/>
+                </a:solidFill>
+                <a:latin typeface="Roboto Light" panose="02000000000000000000" pitchFamily="2" charset="0"/>
+                <a:ea typeface="Roboto Light" panose="02000000000000000000" pitchFamily="2" charset="0"/>
+                <a:cs typeface="Gill Sans MT"/>
+              </a:rPr>
+              <a:t>s</a:t>
+            </a:r>
+            <a:r>
+              <a:rPr sz="2400" spc="-35" dirty="0">
+                <a:solidFill>
+                  <a:srgbClr val="444949"/>
+                </a:solidFill>
+                <a:latin typeface="Roboto Light" panose="02000000000000000000" pitchFamily="2" charset="0"/>
+                <a:ea typeface="Roboto Light" panose="02000000000000000000" pitchFamily="2" charset="0"/>
+                <a:cs typeface="Gill Sans MT"/>
+              </a:rPr>
+              <a:t>tance</a:t>
+            </a:r>
+            <a:r>
+              <a:rPr sz="2400" spc="-340" dirty="0">
+                <a:solidFill>
+                  <a:srgbClr val="444949"/>
+                </a:solidFill>
+                <a:latin typeface="Roboto Light" panose="02000000000000000000" pitchFamily="2" charset="0"/>
+                <a:ea typeface="Roboto Light" panose="02000000000000000000" pitchFamily="2" charset="0"/>
+                <a:cs typeface="Gill Sans MT"/>
+              </a:rPr>
+              <a:t> </a:t>
+            </a:r>
+            <a:r>
+              <a:rPr sz="2400" spc="-365" dirty="0">
+                <a:solidFill>
+                  <a:srgbClr val="444949"/>
+                </a:solidFill>
+                <a:latin typeface="Roboto Light" panose="02000000000000000000" pitchFamily="2" charset="0"/>
+                <a:ea typeface="Roboto Light" panose="02000000000000000000" pitchFamily="2" charset="0"/>
+                <a:cs typeface="Gill Sans MT"/>
+              </a:rPr>
+              <a:t>T</a:t>
+            </a:r>
+            <a:r>
+              <a:rPr sz="2400" spc="-20" dirty="0">
+                <a:solidFill>
+                  <a:srgbClr val="444949"/>
+                </a:solidFill>
+                <a:latin typeface="Roboto Light" panose="02000000000000000000" pitchFamily="2" charset="0"/>
+                <a:ea typeface="Roboto Light" panose="02000000000000000000" pitchFamily="2" charset="0"/>
+                <a:cs typeface="Gill Sans MT"/>
+              </a:rPr>
+              <a:t>y</a:t>
+            </a:r>
+            <a:r>
+              <a:rPr sz="2400" spc="-15" dirty="0">
+                <a:solidFill>
+                  <a:srgbClr val="444949"/>
+                </a:solidFill>
+                <a:latin typeface="Roboto Light" panose="02000000000000000000" pitchFamily="2" charset="0"/>
+                <a:ea typeface="Roboto Light" panose="02000000000000000000" pitchFamily="2" charset="0"/>
+                <a:cs typeface="Gill Sans MT"/>
+              </a:rPr>
+              <a:t>p</a:t>
+            </a:r>
+            <a:r>
+              <a:rPr sz="2400" dirty="0">
+                <a:solidFill>
+                  <a:srgbClr val="444949"/>
+                </a:solidFill>
+                <a:latin typeface="Roboto Light" panose="02000000000000000000" pitchFamily="2" charset="0"/>
+                <a:ea typeface="Roboto Light" panose="02000000000000000000" pitchFamily="2" charset="0"/>
+                <a:cs typeface="Gill Sans MT"/>
+              </a:rPr>
+              <a:t>e</a:t>
+            </a:r>
+            <a:endParaRPr sz="2400" dirty="0">
+              <a:latin typeface="Roboto Light" panose="02000000000000000000" pitchFamily="2" charset="0"/>
+              <a:ea typeface="Roboto Light" panose="02000000000000000000" pitchFamily="2" charset="0"/>
+              <a:cs typeface="Gill Sans MT"/>
+            </a:endParaRPr>
+          </a:p>
+          <a:p>
+            <a:pPr marL="698500" lvl="1" indent="-228600">
+              <a:lnSpc>
+                <a:spcPct val="100000"/>
+              </a:lnSpc>
+              <a:spcBef>
+                <a:spcPts val="215"/>
+              </a:spcBef>
+              <a:buFont typeface="Arial"/>
+              <a:buChar char="•"/>
+              <a:tabLst>
+                <a:tab pos="698500" algn="l"/>
+              </a:tabLst>
+            </a:pPr>
+            <a:r>
+              <a:rPr sz="2400" spc="-35" dirty="0">
+                <a:solidFill>
+                  <a:srgbClr val="444949"/>
+                </a:solidFill>
+                <a:latin typeface="Roboto Light" panose="02000000000000000000" pitchFamily="2" charset="0"/>
+                <a:ea typeface="Roboto Light" panose="02000000000000000000" pitchFamily="2" charset="0"/>
+                <a:cs typeface="Gill Sans MT"/>
+              </a:rPr>
+              <a:t>EC2</a:t>
+            </a:r>
+            <a:r>
+              <a:rPr sz="2400" spc="-20" dirty="0">
+                <a:solidFill>
+                  <a:srgbClr val="444949"/>
+                </a:solidFill>
+                <a:latin typeface="Roboto Light" panose="02000000000000000000" pitchFamily="2" charset="0"/>
+                <a:ea typeface="Roboto Light" panose="02000000000000000000" pitchFamily="2" charset="0"/>
+                <a:cs typeface="Gill Sans MT"/>
+              </a:rPr>
+              <a:t> </a:t>
+            </a:r>
+            <a:r>
+              <a:rPr sz="2400" spc="-65" dirty="0">
+                <a:solidFill>
+                  <a:srgbClr val="444949"/>
+                </a:solidFill>
+                <a:latin typeface="Roboto Light" panose="02000000000000000000" pitchFamily="2" charset="0"/>
+                <a:ea typeface="Roboto Light" panose="02000000000000000000" pitchFamily="2" charset="0"/>
+                <a:cs typeface="Gill Sans MT"/>
+              </a:rPr>
+              <a:t>User</a:t>
+            </a:r>
+            <a:r>
+              <a:rPr sz="2400" spc="-20" dirty="0">
+                <a:solidFill>
+                  <a:srgbClr val="444949"/>
+                </a:solidFill>
+                <a:latin typeface="Roboto Light" panose="02000000000000000000" pitchFamily="2" charset="0"/>
+                <a:ea typeface="Roboto Light" panose="02000000000000000000" pitchFamily="2" charset="0"/>
+                <a:cs typeface="Gill Sans MT"/>
+              </a:rPr>
+              <a:t> </a:t>
+            </a:r>
+            <a:r>
+              <a:rPr sz="2400" spc="-30" dirty="0">
+                <a:solidFill>
+                  <a:srgbClr val="444949"/>
+                </a:solidFill>
+                <a:latin typeface="Roboto Light" panose="02000000000000000000" pitchFamily="2" charset="0"/>
+                <a:ea typeface="Roboto Light" panose="02000000000000000000" pitchFamily="2" charset="0"/>
+                <a:cs typeface="Gill Sans MT"/>
+              </a:rPr>
+              <a:t>Data</a:t>
+            </a:r>
+            <a:endParaRPr sz="2400" dirty="0">
+              <a:latin typeface="Roboto Light" panose="02000000000000000000" pitchFamily="2" charset="0"/>
+              <a:ea typeface="Roboto Light" panose="02000000000000000000" pitchFamily="2" charset="0"/>
+              <a:cs typeface="Gill Sans MT"/>
+            </a:endParaRPr>
+          </a:p>
+          <a:p>
+            <a:pPr marL="698500" lvl="1" indent="-228600">
+              <a:lnSpc>
+                <a:spcPct val="100000"/>
+              </a:lnSpc>
+              <a:spcBef>
+                <a:spcPts val="215"/>
+              </a:spcBef>
+              <a:buFont typeface="Arial"/>
+              <a:buChar char="•"/>
+              <a:tabLst>
+                <a:tab pos="698500" algn="l"/>
+              </a:tabLst>
+            </a:pPr>
+            <a:r>
+              <a:rPr sz="2400" spc="-55" dirty="0">
+                <a:solidFill>
+                  <a:srgbClr val="444949"/>
+                </a:solidFill>
+                <a:latin typeface="Roboto Light" panose="02000000000000000000" pitchFamily="2" charset="0"/>
+                <a:ea typeface="Roboto Light" panose="02000000000000000000" pitchFamily="2" charset="0"/>
+                <a:cs typeface="Gill Sans MT"/>
+              </a:rPr>
+              <a:t>EB</a:t>
+            </a:r>
+            <a:r>
+              <a:rPr sz="2400" spc="25" dirty="0">
+                <a:solidFill>
+                  <a:srgbClr val="444949"/>
+                </a:solidFill>
+                <a:latin typeface="Roboto Light" panose="02000000000000000000" pitchFamily="2" charset="0"/>
+                <a:ea typeface="Roboto Light" panose="02000000000000000000" pitchFamily="2" charset="0"/>
+                <a:cs typeface="Gill Sans MT"/>
+              </a:rPr>
+              <a:t>S</a:t>
+            </a:r>
+            <a:r>
+              <a:rPr sz="2400" spc="-345" dirty="0">
+                <a:solidFill>
+                  <a:srgbClr val="444949"/>
+                </a:solidFill>
+                <a:latin typeface="Roboto Light" panose="02000000000000000000" pitchFamily="2" charset="0"/>
+                <a:ea typeface="Roboto Light" panose="02000000000000000000" pitchFamily="2" charset="0"/>
+                <a:cs typeface="Gill Sans MT"/>
+              </a:rPr>
+              <a:t> </a:t>
+            </a:r>
+            <a:r>
+              <a:rPr sz="2400" spc="-195" dirty="0">
+                <a:solidFill>
+                  <a:srgbClr val="444949"/>
+                </a:solidFill>
+                <a:latin typeface="Roboto Light" panose="02000000000000000000" pitchFamily="2" charset="0"/>
+                <a:ea typeface="Roboto Light" panose="02000000000000000000" pitchFamily="2" charset="0"/>
+                <a:cs typeface="Gill Sans MT"/>
+              </a:rPr>
+              <a:t>V</a:t>
+            </a:r>
+            <a:r>
+              <a:rPr sz="2400" spc="-30" dirty="0">
+                <a:solidFill>
+                  <a:srgbClr val="444949"/>
+                </a:solidFill>
+                <a:latin typeface="Roboto Light" panose="02000000000000000000" pitchFamily="2" charset="0"/>
+                <a:ea typeface="Roboto Light" panose="02000000000000000000" pitchFamily="2" charset="0"/>
+                <a:cs typeface="Gill Sans MT"/>
+              </a:rPr>
+              <a:t>olum</a:t>
+            </a:r>
+            <a:r>
+              <a:rPr sz="2400" spc="-25" dirty="0">
+                <a:solidFill>
+                  <a:srgbClr val="444949"/>
+                </a:solidFill>
+                <a:latin typeface="Roboto Light" panose="02000000000000000000" pitchFamily="2" charset="0"/>
+                <a:ea typeface="Roboto Light" panose="02000000000000000000" pitchFamily="2" charset="0"/>
+                <a:cs typeface="Gill Sans MT"/>
+              </a:rPr>
+              <a:t>e</a:t>
+            </a:r>
+            <a:r>
+              <a:rPr sz="2400" spc="-75" dirty="0">
+                <a:solidFill>
+                  <a:srgbClr val="444949"/>
+                </a:solidFill>
+                <a:latin typeface="Roboto Light" panose="02000000000000000000" pitchFamily="2" charset="0"/>
+                <a:ea typeface="Roboto Light" panose="02000000000000000000" pitchFamily="2" charset="0"/>
+                <a:cs typeface="Gill Sans MT"/>
+              </a:rPr>
+              <a:t>s</a:t>
+            </a:r>
+            <a:endParaRPr sz="2400" dirty="0">
+              <a:latin typeface="Roboto Light" panose="02000000000000000000" pitchFamily="2" charset="0"/>
+              <a:ea typeface="Roboto Light" panose="02000000000000000000" pitchFamily="2" charset="0"/>
+              <a:cs typeface="Gill Sans MT"/>
+            </a:endParaRPr>
+          </a:p>
+          <a:p>
+            <a:pPr marL="698500" lvl="1" indent="-228600">
+              <a:lnSpc>
+                <a:spcPct val="100000"/>
+              </a:lnSpc>
+              <a:spcBef>
+                <a:spcPts val="215"/>
+              </a:spcBef>
+              <a:buFont typeface="Arial"/>
+              <a:buChar char="•"/>
+              <a:tabLst>
+                <a:tab pos="698500" algn="l"/>
+              </a:tabLst>
+            </a:pPr>
+            <a:r>
+              <a:rPr sz="2400" spc="-50" dirty="0">
+                <a:solidFill>
+                  <a:srgbClr val="444949"/>
+                </a:solidFill>
+                <a:latin typeface="Roboto Light" panose="02000000000000000000" pitchFamily="2" charset="0"/>
+                <a:ea typeface="Roboto Light" panose="02000000000000000000" pitchFamily="2" charset="0"/>
+                <a:cs typeface="Gill Sans MT"/>
+              </a:rPr>
+              <a:t>Security</a:t>
+            </a:r>
+            <a:r>
+              <a:rPr sz="2400" spc="-25" dirty="0">
+                <a:solidFill>
+                  <a:srgbClr val="444949"/>
+                </a:solidFill>
+                <a:latin typeface="Roboto Light" panose="02000000000000000000" pitchFamily="2" charset="0"/>
+                <a:ea typeface="Roboto Light" panose="02000000000000000000" pitchFamily="2" charset="0"/>
+                <a:cs typeface="Gill Sans MT"/>
+              </a:rPr>
+              <a:t> </a:t>
+            </a:r>
+            <a:r>
+              <a:rPr sz="2400" spc="-55" dirty="0">
+                <a:solidFill>
+                  <a:srgbClr val="444949"/>
+                </a:solidFill>
+                <a:latin typeface="Roboto Light" panose="02000000000000000000" pitchFamily="2" charset="0"/>
+                <a:ea typeface="Roboto Light" panose="02000000000000000000" pitchFamily="2" charset="0"/>
+                <a:cs typeface="Gill Sans MT"/>
+              </a:rPr>
+              <a:t>Groups</a:t>
+            </a:r>
+            <a:endParaRPr sz="2400" dirty="0">
+              <a:latin typeface="Roboto Light" panose="02000000000000000000" pitchFamily="2" charset="0"/>
+              <a:ea typeface="Roboto Light" panose="02000000000000000000" pitchFamily="2" charset="0"/>
+              <a:cs typeface="Gill Sans MT"/>
+            </a:endParaRPr>
+          </a:p>
+          <a:p>
+            <a:pPr marL="698500" lvl="1" indent="-228600">
+              <a:lnSpc>
+                <a:spcPct val="100000"/>
+              </a:lnSpc>
+              <a:spcBef>
+                <a:spcPts val="215"/>
+              </a:spcBef>
+              <a:buFont typeface="Arial"/>
+              <a:buChar char="•"/>
+              <a:tabLst>
+                <a:tab pos="698500" algn="l"/>
+              </a:tabLst>
+            </a:pPr>
+            <a:r>
+              <a:rPr sz="2400" spc="5" dirty="0">
+                <a:solidFill>
+                  <a:srgbClr val="444949"/>
+                </a:solidFill>
+                <a:latin typeface="Roboto Light" panose="02000000000000000000" pitchFamily="2" charset="0"/>
+                <a:ea typeface="Roboto Light" panose="02000000000000000000" pitchFamily="2" charset="0"/>
+                <a:cs typeface="Gill Sans MT"/>
+              </a:rPr>
+              <a:t>SSH</a:t>
+            </a:r>
+            <a:r>
+              <a:rPr sz="2400" spc="-25" dirty="0">
+                <a:solidFill>
+                  <a:srgbClr val="444949"/>
+                </a:solidFill>
+                <a:latin typeface="Roboto Light" panose="02000000000000000000" pitchFamily="2" charset="0"/>
+                <a:ea typeface="Roboto Light" panose="02000000000000000000" pitchFamily="2" charset="0"/>
+                <a:cs typeface="Gill Sans MT"/>
+              </a:rPr>
+              <a:t> </a:t>
+            </a:r>
+            <a:r>
+              <a:rPr sz="2400" spc="-120" dirty="0">
+                <a:solidFill>
+                  <a:srgbClr val="444949"/>
+                </a:solidFill>
+                <a:latin typeface="Roboto Light" panose="02000000000000000000" pitchFamily="2" charset="0"/>
+                <a:ea typeface="Roboto Light" panose="02000000000000000000" pitchFamily="2" charset="0"/>
+                <a:cs typeface="Gill Sans MT"/>
+              </a:rPr>
+              <a:t>Key</a:t>
+            </a:r>
+            <a:r>
+              <a:rPr sz="2400" spc="-25" dirty="0">
+                <a:solidFill>
+                  <a:srgbClr val="444949"/>
+                </a:solidFill>
+                <a:latin typeface="Roboto Light" panose="02000000000000000000" pitchFamily="2" charset="0"/>
+                <a:ea typeface="Roboto Light" panose="02000000000000000000" pitchFamily="2" charset="0"/>
+                <a:cs typeface="Gill Sans MT"/>
+              </a:rPr>
+              <a:t> </a:t>
+            </a:r>
+            <a:r>
+              <a:rPr sz="2400" spc="-75" dirty="0">
+                <a:solidFill>
+                  <a:srgbClr val="444949"/>
+                </a:solidFill>
+                <a:latin typeface="Roboto Light" panose="02000000000000000000" pitchFamily="2" charset="0"/>
+                <a:ea typeface="Roboto Light" panose="02000000000000000000" pitchFamily="2" charset="0"/>
+                <a:cs typeface="Gill Sans MT"/>
+              </a:rPr>
+              <a:t>Pair</a:t>
+            </a:r>
+            <a:endParaRPr sz="2400" dirty="0">
+              <a:latin typeface="Roboto Light" panose="02000000000000000000" pitchFamily="2" charset="0"/>
+              <a:ea typeface="Roboto Light" panose="02000000000000000000" pitchFamily="2" charset="0"/>
+              <a:cs typeface="Gill Sans MT"/>
+            </a:endParaRPr>
+          </a:p>
+          <a:p>
+            <a:pPr marL="241300" indent="-228600">
+              <a:lnSpc>
+                <a:spcPct val="100000"/>
+              </a:lnSpc>
+              <a:spcBef>
+                <a:spcPts val="635"/>
+              </a:spcBef>
+              <a:buFont typeface="Arial"/>
+              <a:buChar char="•"/>
+              <a:tabLst>
+                <a:tab pos="241300" algn="l"/>
+              </a:tabLst>
+            </a:pPr>
+            <a:r>
+              <a:rPr sz="2800" spc="-40" dirty="0">
+                <a:solidFill>
+                  <a:srgbClr val="444949"/>
+                </a:solidFill>
+                <a:latin typeface="Roboto Light" panose="02000000000000000000" pitchFamily="2" charset="0"/>
+                <a:ea typeface="Roboto Light" panose="02000000000000000000" pitchFamily="2" charset="0"/>
+                <a:cs typeface="Gill Sans MT"/>
+              </a:rPr>
+              <a:t>Min</a:t>
+            </a:r>
+            <a:r>
+              <a:rPr sz="2800" spc="-5" dirty="0">
+                <a:solidFill>
+                  <a:srgbClr val="444949"/>
+                </a:solidFill>
+                <a:latin typeface="Roboto Light" panose="02000000000000000000" pitchFamily="2" charset="0"/>
+                <a:ea typeface="Roboto Light" panose="02000000000000000000" pitchFamily="2" charset="0"/>
+                <a:cs typeface="Gill Sans MT"/>
+              </a:rPr>
+              <a:t> </a:t>
+            </a:r>
+            <a:r>
+              <a:rPr sz="2800" spc="-45" dirty="0">
+                <a:solidFill>
+                  <a:srgbClr val="444949"/>
+                </a:solidFill>
+                <a:latin typeface="Roboto Light" panose="02000000000000000000" pitchFamily="2" charset="0"/>
+                <a:ea typeface="Roboto Light" panose="02000000000000000000" pitchFamily="2" charset="0"/>
+                <a:cs typeface="Gill Sans MT"/>
+              </a:rPr>
+              <a:t>Size</a:t>
+            </a:r>
+            <a:r>
+              <a:rPr sz="2800" spc="-10" dirty="0">
+                <a:solidFill>
+                  <a:srgbClr val="444949"/>
+                </a:solidFill>
+                <a:latin typeface="Roboto Light" panose="02000000000000000000" pitchFamily="2" charset="0"/>
+                <a:ea typeface="Roboto Light" panose="02000000000000000000" pitchFamily="2" charset="0"/>
+                <a:cs typeface="Gill Sans MT"/>
+              </a:rPr>
+              <a:t> </a:t>
+            </a:r>
+            <a:r>
+              <a:rPr sz="2800" dirty="0">
+                <a:solidFill>
+                  <a:srgbClr val="444949"/>
+                </a:solidFill>
+                <a:latin typeface="Roboto Light" panose="02000000000000000000" pitchFamily="2" charset="0"/>
+                <a:ea typeface="Roboto Light" panose="02000000000000000000" pitchFamily="2" charset="0"/>
+                <a:cs typeface="Gill Sans MT"/>
+              </a:rPr>
+              <a:t>/ </a:t>
+            </a:r>
+            <a:r>
+              <a:rPr sz="2800" spc="-20" dirty="0">
+                <a:solidFill>
+                  <a:srgbClr val="444949"/>
+                </a:solidFill>
+                <a:latin typeface="Roboto Light" panose="02000000000000000000" pitchFamily="2" charset="0"/>
+                <a:ea typeface="Roboto Light" panose="02000000000000000000" pitchFamily="2" charset="0"/>
+                <a:cs typeface="Gill Sans MT"/>
+              </a:rPr>
+              <a:t>Max</a:t>
+            </a:r>
+            <a:r>
+              <a:rPr sz="2800" spc="-15" dirty="0">
+                <a:solidFill>
+                  <a:srgbClr val="444949"/>
+                </a:solidFill>
+                <a:latin typeface="Roboto Light" panose="02000000000000000000" pitchFamily="2" charset="0"/>
+                <a:ea typeface="Roboto Light" panose="02000000000000000000" pitchFamily="2" charset="0"/>
+                <a:cs typeface="Gill Sans MT"/>
+              </a:rPr>
+              <a:t> </a:t>
+            </a:r>
+            <a:r>
+              <a:rPr sz="2800" spc="-45" dirty="0">
+                <a:solidFill>
+                  <a:srgbClr val="444949"/>
+                </a:solidFill>
+                <a:latin typeface="Roboto Light" panose="02000000000000000000" pitchFamily="2" charset="0"/>
+                <a:ea typeface="Roboto Light" panose="02000000000000000000" pitchFamily="2" charset="0"/>
+                <a:cs typeface="Gill Sans MT"/>
+              </a:rPr>
+              <a:t>Size</a:t>
+            </a:r>
+            <a:r>
+              <a:rPr sz="2800" spc="-10" dirty="0">
+                <a:solidFill>
+                  <a:srgbClr val="444949"/>
+                </a:solidFill>
+                <a:latin typeface="Roboto Light" panose="02000000000000000000" pitchFamily="2" charset="0"/>
+                <a:ea typeface="Roboto Light" panose="02000000000000000000" pitchFamily="2" charset="0"/>
+                <a:cs typeface="Gill Sans MT"/>
+              </a:rPr>
+              <a:t> </a:t>
+            </a:r>
+            <a:r>
+              <a:rPr sz="2800" dirty="0">
+                <a:solidFill>
+                  <a:srgbClr val="444949"/>
+                </a:solidFill>
+                <a:latin typeface="Roboto Light" panose="02000000000000000000" pitchFamily="2" charset="0"/>
+                <a:ea typeface="Roboto Light" panose="02000000000000000000" pitchFamily="2" charset="0"/>
+                <a:cs typeface="Gill Sans MT"/>
+              </a:rPr>
+              <a:t>/ </a:t>
+            </a:r>
+            <a:r>
+              <a:rPr sz="2800" spc="-75" dirty="0">
+                <a:solidFill>
+                  <a:srgbClr val="444949"/>
+                </a:solidFill>
+                <a:latin typeface="Roboto Light" panose="02000000000000000000" pitchFamily="2" charset="0"/>
+                <a:ea typeface="Roboto Light" panose="02000000000000000000" pitchFamily="2" charset="0"/>
+                <a:cs typeface="Gill Sans MT"/>
+              </a:rPr>
+              <a:t>Initial</a:t>
+            </a:r>
+            <a:r>
+              <a:rPr sz="2800" spc="-10" dirty="0">
+                <a:solidFill>
+                  <a:srgbClr val="444949"/>
+                </a:solidFill>
+                <a:latin typeface="Roboto Light" panose="02000000000000000000" pitchFamily="2" charset="0"/>
+                <a:ea typeface="Roboto Light" panose="02000000000000000000" pitchFamily="2" charset="0"/>
+                <a:cs typeface="Gill Sans MT"/>
+              </a:rPr>
+              <a:t> </a:t>
+            </a:r>
+            <a:r>
+              <a:rPr sz="2800" spc="-50" dirty="0">
+                <a:solidFill>
+                  <a:srgbClr val="444949"/>
+                </a:solidFill>
+                <a:latin typeface="Roboto Light" panose="02000000000000000000" pitchFamily="2" charset="0"/>
+                <a:ea typeface="Roboto Light" panose="02000000000000000000" pitchFamily="2" charset="0"/>
+                <a:cs typeface="Gill Sans MT"/>
+              </a:rPr>
+              <a:t>Capacity</a:t>
+            </a:r>
+            <a:endParaRPr sz="2800" dirty="0">
+              <a:latin typeface="Roboto Light" panose="02000000000000000000" pitchFamily="2" charset="0"/>
+              <a:ea typeface="Roboto Light" panose="02000000000000000000" pitchFamily="2" charset="0"/>
+              <a:cs typeface="Gill Sans MT"/>
+            </a:endParaRPr>
+          </a:p>
+          <a:p>
+            <a:pPr marL="241300" indent="-228600">
+              <a:lnSpc>
+                <a:spcPct val="100000"/>
+              </a:lnSpc>
+              <a:spcBef>
+                <a:spcPts val="645"/>
+              </a:spcBef>
+              <a:buFont typeface="Arial"/>
+              <a:buChar char="•"/>
+              <a:tabLst>
+                <a:tab pos="241300" algn="l"/>
+              </a:tabLst>
+            </a:pPr>
+            <a:r>
+              <a:rPr sz="2800" spc="-65" dirty="0">
+                <a:solidFill>
+                  <a:srgbClr val="444949"/>
+                </a:solidFill>
+                <a:latin typeface="Roboto Light" panose="02000000000000000000" pitchFamily="2" charset="0"/>
+                <a:ea typeface="Roboto Light" panose="02000000000000000000" pitchFamily="2" charset="0"/>
+                <a:cs typeface="Gill Sans MT"/>
+              </a:rPr>
+              <a:t>Network</a:t>
+            </a:r>
+            <a:r>
+              <a:rPr sz="2800" spc="-5" dirty="0">
+                <a:solidFill>
+                  <a:srgbClr val="444949"/>
+                </a:solidFill>
+                <a:latin typeface="Roboto Light" panose="02000000000000000000" pitchFamily="2" charset="0"/>
+                <a:ea typeface="Roboto Light" panose="02000000000000000000" pitchFamily="2" charset="0"/>
+                <a:cs typeface="Gill Sans MT"/>
+              </a:rPr>
+              <a:t> </a:t>
+            </a:r>
+            <a:r>
+              <a:rPr sz="2800" spc="210" dirty="0">
+                <a:solidFill>
+                  <a:srgbClr val="444949"/>
+                </a:solidFill>
+                <a:latin typeface="Roboto Light" panose="02000000000000000000" pitchFamily="2" charset="0"/>
+                <a:ea typeface="Roboto Light" panose="02000000000000000000" pitchFamily="2" charset="0"/>
+                <a:cs typeface="Gill Sans MT"/>
+              </a:rPr>
+              <a:t>+</a:t>
+            </a:r>
+            <a:r>
+              <a:rPr sz="2800" spc="-10" dirty="0">
+                <a:solidFill>
+                  <a:srgbClr val="444949"/>
+                </a:solidFill>
+                <a:latin typeface="Roboto Light" panose="02000000000000000000" pitchFamily="2" charset="0"/>
+                <a:ea typeface="Roboto Light" panose="02000000000000000000" pitchFamily="2" charset="0"/>
+                <a:cs typeface="Gill Sans MT"/>
+              </a:rPr>
+              <a:t> </a:t>
+            </a:r>
+            <a:r>
+              <a:rPr sz="2800" spc="-30" dirty="0">
+                <a:solidFill>
+                  <a:srgbClr val="444949"/>
+                </a:solidFill>
+                <a:latin typeface="Roboto Light" panose="02000000000000000000" pitchFamily="2" charset="0"/>
+                <a:ea typeface="Roboto Light" panose="02000000000000000000" pitchFamily="2" charset="0"/>
+                <a:cs typeface="Gill Sans MT"/>
+              </a:rPr>
+              <a:t>Subnets</a:t>
+            </a:r>
+            <a:r>
+              <a:rPr sz="2800" spc="-10" dirty="0">
+                <a:solidFill>
+                  <a:srgbClr val="444949"/>
+                </a:solidFill>
+                <a:latin typeface="Roboto Light" panose="02000000000000000000" pitchFamily="2" charset="0"/>
+                <a:ea typeface="Roboto Light" panose="02000000000000000000" pitchFamily="2" charset="0"/>
+                <a:cs typeface="Gill Sans MT"/>
+              </a:rPr>
+              <a:t> </a:t>
+            </a:r>
+            <a:r>
+              <a:rPr sz="2800" spc="-55" dirty="0">
+                <a:solidFill>
+                  <a:srgbClr val="444949"/>
+                </a:solidFill>
+                <a:latin typeface="Roboto Light" panose="02000000000000000000" pitchFamily="2" charset="0"/>
+                <a:ea typeface="Roboto Light" panose="02000000000000000000" pitchFamily="2" charset="0"/>
+                <a:cs typeface="Gill Sans MT"/>
+              </a:rPr>
+              <a:t>Information</a:t>
+            </a:r>
+            <a:endParaRPr sz="2800" dirty="0">
+              <a:latin typeface="Roboto Light" panose="02000000000000000000" pitchFamily="2" charset="0"/>
+              <a:ea typeface="Roboto Light" panose="02000000000000000000" pitchFamily="2" charset="0"/>
+              <a:cs typeface="Gill Sans MT"/>
+            </a:endParaRPr>
+          </a:p>
+          <a:p>
+            <a:pPr marL="241300" indent="-228600">
+              <a:lnSpc>
+                <a:spcPct val="100000"/>
+              </a:lnSpc>
+              <a:spcBef>
+                <a:spcPts val="720"/>
+              </a:spcBef>
+              <a:buFont typeface="Arial"/>
+              <a:buChar char="•"/>
+              <a:tabLst>
+                <a:tab pos="241300" algn="l"/>
+              </a:tabLst>
+            </a:pPr>
+            <a:r>
+              <a:rPr sz="2800" spc="-25" dirty="0">
+                <a:solidFill>
+                  <a:srgbClr val="444949"/>
+                </a:solidFill>
+                <a:latin typeface="Roboto Light" panose="02000000000000000000" pitchFamily="2" charset="0"/>
+                <a:ea typeface="Roboto Light" panose="02000000000000000000" pitchFamily="2" charset="0"/>
+                <a:cs typeface="Gill Sans MT"/>
+              </a:rPr>
+              <a:t>Load</a:t>
+            </a:r>
+            <a:r>
+              <a:rPr sz="2800" spc="-20" dirty="0">
+                <a:solidFill>
+                  <a:srgbClr val="444949"/>
+                </a:solidFill>
+                <a:latin typeface="Roboto Light" panose="02000000000000000000" pitchFamily="2" charset="0"/>
+                <a:ea typeface="Roboto Light" panose="02000000000000000000" pitchFamily="2" charset="0"/>
+                <a:cs typeface="Gill Sans MT"/>
+              </a:rPr>
+              <a:t> </a:t>
+            </a:r>
+            <a:r>
+              <a:rPr sz="2800" spc="-60" dirty="0">
+                <a:solidFill>
+                  <a:srgbClr val="444949"/>
+                </a:solidFill>
+                <a:latin typeface="Roboto Light" panose="02000000000000000000" pitchFamily="2" charset="0"/>
+                <a:ea typeface="Roboto Light" panose="02000000000000000000" pitchFamily="2" charset="0"/>
+                <a:cs typeface="Gill Sans MT"/>
+              </a:rPr>
+              <a:t>Balancer</a:t>
+            </a:r>
+            <a:r>
+              <a:rPr sz="2800" spc="-5" dirty="0">
+                <a:solidFill>
+                  <a:srgbClr val="444949"/>
+                </a:solidFill>
+                <a:latin typeface="Roboto Light" panose="02000000000000000000" pitchFamily="2" charset="0"/>
+                <a:ea typeface="Roboto Light" panose="02000000000000000000" pitchFamily="2" charset="0"/>
+                <a:cs typeface="Gill Sans MT"/>
+              </a:rPr>
+              <a:t> </a:t>
+            </a:r>
+            <a:r>
+              <a:rPr sz="2800" spc="-55" dirty="0">
+                <a:solidFill>
+                  <a:srgbClr val="444949"/>
+                </a:solidFill>
+                <a:latin typeface="Roboto Light" panose="02000000000000000000" pitchFamily="2" charset="0"/>
+                <a:ea typeface="Roboto Light" panose="02000000000000000000" pitchFamily="2" charset="0"/>
+                <a:cs typeface="Gill Sans MT"/>
+              </a:rPr>
+              <a:t>Information</a:t>
+            </a:r>
+            <a:endParaRPr sz="2800" dirty="0">
+              <a:latin typeface="Roboto Light" panose="02000000000000000000" pitchFamily="2" charset="0"/>
+              <a:ea typeface="Roboto Light" panose="02000000000000000000" pitchFamily="2" charset="0"/>
+              <a:cs typeface="Gill Sans MT"/>
+            </a:endParaRPr>
+          </a:p>
+          <a:p>
+            <a:pPr marL="241300" indent="-228600">
+              <a:lnSpc>
+                <a:spcPct val="100000"/>
+              </a:lnSpc>
+              <a:spcBef>
+                <a:spcPts val="650"/>
+              </a:spcBef>
+              <a:buFont typeface="Arial"/>
+              <a:buChar char="•"/>
+              <a:tabLst>
+                <a:tab pos="241300" algn="l"/>
+              </a:tabLst>
+            </a:pPr>
+            <a:r>
+              <a:rPr sz="2800" spc="-40" dirty="0">
+                <a:solidFill>
+                  <a:srgbClr val="444949"/>
+                </a:solidFill>
+                <a:latin typeface="Roboto Light" panose="02000000000000000000" pitchFamily="2" charset="0"/>
+                <a:ea typeface="Roboto Light" panose="02000000000000000000" pitchFamily="2" charset="0"/>
+                <a:cs typeface="Gill Sans MT"/>
+              </a:rPr>
+              <a:t>Scaling</a:t>
+            </a:r>
+            <a:r>
+              <a:rPr sz="2800" spc="-15" dirty="0">
+                <a:solidFill>
+                  <a:srgbClr val="444949"/>
+                </a:solidFill>
+                <a:latin typeface="Roboto Light" panose="02000000000000000000" pitchFamily="2" charset="0"/>
+                <a:ea typeface="Roboto Light" panose="02000000000000000000" pitchFamily="2" charset="0"/>
+                <a:cs typeface="Gill Sans MT"/>
+              </a:rPr>
+              <a:t> </a:t>
+            </a:r>
+            <a:r>
+              <a:rPr sz="2800" spc="-80" dirty="0">
+                <a:solidFill>
+                  <a:srgbClr val="444949"/>
+                </a:solidFill>
+                <a:latin typeface="Roboto Light" panose="02000000000000000000" pitchFamily="2" charset="0"/>
+                <a:ea typeface="Roboto Light" panose="02000000000000000000" pitchFamily="2" charset="0"/>
+                <a:cs typeface="Gill Sans MT"/>
+              </a:rPr>
+              <a:t>Policies</a:t>
+            </a:r>
+            <a:endParaRPr sz="2800" dirty="0">
+              <a:latin typeface="Roboto Light" panose="02000000000000000000" pitchFamily="2" charset="0"/>
+              <a:ea typeface="Roboto Light" panose="02000000000000000000" pitchFamily="2" charset="0"/>
+              <a:cs typeface="Gill Sans MT"/>
+            </a:endParaRPr>
+          </a:p>
+        </p:txBody>
+      </p:sp>
     </p:spTree>
   </p:cSld>
   <p:clrMapOvr>
@@ -37263,4 +38956,299 @@
     </a:ext>
   </a:extLst>
 </a:theme>
+</file>
+
+<file path=ppt/theme/theme2.xml><?xml version="1.0" encoding="utf-8"?>
+<a:theme xmlns:a="http://schemas.openxmlformats.org/drawingml/2006/main" name="Office Theme">
+  <a:themeElements>
+    <a:clrScheme name="Office">
+      <a:dk1>
+        <a:sysClr val="windowText" lastClr="000000"/>
+      </a:dk1>
+      <a:lt1>
+        <a:sysClr val="window" lastClr="FFFFFF"/>
+      </a:lt1>
+      <a:dk2>
+        <a:srgbClr val="44546A"/>
+      </a:dk2>
+      <a:lt2>
+        <a:srgbClr val="E7E6E6"/>
+      </a:lt2>
+      <a:accent1>
+        <a:srgbClr val="4472C4"/>
+      </a:accent1>
+      <a:accent2>
+        <a:srgbClr val="ED7D31"/>
+      </a:accent2>
+      <a:accent3>
+        <a:srgbClr val="A5A5A5"/>
+      </a:accent3>
+      <a:accent4>
+        <a:srgbClr val="FFC000"/>
+      </a:accent4>
+      <a:accent5>
+        <a:srgbClr val="5B9BD5"/>
+      </a:accent5>
+      <a:accent6>
+        <a:srgbClr val="70AD47"/>
+      </a:accent6>
+      <a:hlink>
+        <a:srgbClr val="0563C1"/>
+      </a:hlink>
+      <a:folHlink>
+        <a:srgbClr val="954F72"/>
+      </a:folHlink>
+    </a:clrScheme>
+    <a:fontScheme name="Office">
+      <a:majorFont>
+        <a:latin typeface="Calibri Light" panose="020F0302020204030204"/>
+        <a:ea typeface=""/>
+        <a:cs typeface=""/>
+        <a:font script="Jpan" typeface="游ゴシック Light"/>
+        <a:font script="Hang" typeface="맑은 고딕"/>
+        <a:font script="Hans" typeface="等线 Light"/>
+        <a:font script="Hant" typeface="新細明體"/>
+        <a:font script="Arab" typeface="Times New Roman"/>
+        <a:font script="Hebr" typeface="Times New Roman"/>
+        <a:font script="Thai" typeface="Angsana New"/>
+        <a:font script="Ethi" typeface="Nyala"/>
+        <a:font script="Beng" typeface="Vrinda"/>
+        <a:font script="Gujr" typeface="Shruti"/>
+        <a:font script="Khmr" typeface="MoolBoran"/>
+        <a:font script="Knda" typeface="Tunga"/>
+        <a:font script="Guru" typeface="Raavi"/>
+        <a:font script="Cans" typeface="Euphemia"/>
+        <a:font script="Cher" typeface="Plantagenet Cherokee"/>
+        <a:font script="Yiii" typeface="Microsoft Yi Baiti"/>
+        <a:font script="Tibt" typeface="Microsoft Himalaya"/>
+        <a:font script="Thaa" typeface="MV Boli"/>
+        <a:font script="Deva" typeface="Mangal"/>
+        <a:font script="Telu" typeface="Gautami"/>
+        <a:font script="Taml" typeface="Latha"/>
+        <a:font script="Syrc" typeface="Estrangelo Edessa"/>
+        <a:font script="Orya" typeface="Kalinga"/>
+        <a:font script="Mlym" typeface="Kartika"/>
+        <a:font script="Laoo" typeface="DokChampa"/>
+        <a:font script="Sinh" typeface="Iskoola Pota"/>
+        <a:font script="Mong" typeface="Mongolian Baiti"/>
+        <a:font script="Viet" typeface="Times New Roman"/>
+        <a:font script="Uigh" typeface="Microsoft Uighur"/>
+        <a:font script="Geor" typeface="Sylfaen"/>
+        <a:font script="Armn" typeface="Arial"/>
+        <a:font script="Bugi" typeface="Leelawadee UI"/>
+        <a:font script="Bopo" typeface="Microsoft JhengHei"/>
+        <a:font script="Java" typeface="Javanese Text"/>
+        <a:font script="Lisu" typeface="Segoe UI"/>
+        <a:font script="Mymr" typeface="Myanmar Text"/>
+        <a:font script="Nkoo" typeface="Ebrima"/>
+        <a:font script="Olck" typeface="Nirmala UI"/>
+        <a:font script="Osma" typeface="Ebrima"/>
+        <a:font script="Phag" typeface="Phagspa"/>
+        <a:font script="Syrn" typeface="Estrangelo Edessa"/>
+        <a:font script="Syrj" typeface="Estrangelo Edessa"/>
+        <a:font script="Syre" typeface="Estrangelo Edessa"/>
+        <a:font script="Sora" typeface="Nirmala UI"/>
+        <a:font script="Tale" typeface="Microsoft Tai Le"/>
+        <a:font script="Talu" typeface="Microsoft New Tai Lue"/>
+        <a:font script="Tfng" typeface="Ebrima"/>
+      </a:majorFont>
+      <a:minorFont>
+        <a:latin typeface="Calibri" panose="020F0502020204030204"/>
+        <a:ea typeface=""/>
+        <a:cs typeface=""/>
+        <a:font script="Jpan" typeface="游ゴシック"/>
+        <a:font script="Hang" typeface="맑은 고딕"/>
+        <a:font script="Hans" typeface="等线"/>
+        <a:font script="Hant" typeface="新細明體"/>
+        <a:font script="Arab" typeface="Arial"/>
+        <a:font script="Hebr" typeface="Arial"/>
+        <a:font script="Thai" typeface="Cordia New"/>
+        <a:font script="Ethi" typeface="Nyala"/>
+        <a:font script="Beng" typeface="Vrinda"/>
+        <a:font script="Gujr" typeface="Shruti"/>
+        <a:font script="Khmr" typeface="DaunPenh"/>
+        <a:font script="Knda" typeface="Tunga"/>
+        <a:font script="Guru" typeface="Raavi"/>
+        <a:font script="Cans" typeface="Euphemia"/>
+        <a:font script="Cher" typeface="Plantagenet Cherokee"/>
+        <a:font script="Yiii" typeface="Microsoft Yi Baiti"/>
+        <a:font script="Tibt" typeface="Microsoft Himalaya"/>
+        <a:font script="Thaa" typeface="MV Boli"/>
+        <a:font script="Deva" typeface="Mangal"/>
+        <a:font script="Telu" typeface="Gautami"/>
+        <a:font script="Taml" typeface="Latha"/>
+        <a:font script="Syrc" typeface="Estrangelo Edessa"/>
+        <a:font script="Orya" typeface="Kalinga"/>
+        <a:font script="Mlym" typeface="Kartika"/>
+        <a:font script="Laoo" typeface="DokChampa"/>
+        <a:font script="Sinh" typeface="Iskoola Pota"/>
+        <a:font script="Mong" typeface="Mongolian Baiti"/>
+        <a:font script="Viet" typeface="Arial"/>
+        <a:font script="Uigh" typeface="Microsoft Uighur"/>
+        <a:font script="Geor" typeface="Sylfaen"/>
+        <a:font script="Armn" typeface="Arial"/>
+        <a:font script="Bugi" typeface="Leelawadee UI"/>
+        <a:font script="Bopo" typeface="Microsoft JhengHei"/>
+        <a:font script="Java" typeface="Javanese Text"/>
+        <a:font script="Lisu" typeface="Segoe UI"/>
+        <a:font script="Mymr" typeface="Myanmar Text"/>
+        <a:font script="Nkoo" typeface="Ebrima"/>
+        <a:font script="Olck" typeface="Nirmala UI"/>
+        <a:font script="Osma" typeface="Ebrima"/>
+        <a:font script="Phag" typeface="Phagspa"/>
+        <a:font script="Syrn" typeface="Estrangelo Edessa"/>
+        <a:font script="Syrj" typeface="Estrangelo Edessa"/>
+        <a:font script="Syre" typeface="Estrangelo Edessa"/>
+        <a:font script="Sora" typeface="Nirmala UI"/>
+        <a:font script="Tale" typeface="Microsoft Tai Le"/>
+        <a:font script="Talu" typeface="Microsoft New Tai Lue"/>
+        <a:font script="Tfng" typeface="Ebrima"/>
+      </a:minorFont>
+    </a:fontScheme>
+    <a:fmtScheme name="Office">
+      <a:fillStyleLst>
+        <a:solidFill>
+          <a:schemeClr val="phClr"/>
+        </a:solidFill>
+        <a:gradFill rotWithShape="1">
+          <a:gsLst>
+            <a:gs pos="0">
+              <a:schemeClr val="phClr">
+                <a:lumMod val="110000"/>
+                <a:satMod val="105000"/>
+                <a:tint val="67000"/>
+              </a:schemeClr>
+            </a:gs>
+            <a:gs pos="50000">
+              <a:schemeClr val="phClr">
+                <a:lumMod val="105000"/>
+                <a:satMod val="103000"/>
+                <a:tint val="73000"/>
+              </a:schemeClr>
+            </a:gs>
+            <a:gs pos="100000">
+              <a:schemeClr val="phClr">
+                <a:lumMod val="105000"/>
+                <a:satMod val="109000"/>
+                <a:tint val="81000"/>
+              </a:schemeClr>
+            </a:gs>
+          </a:gsLst>
+          <a:lin ang="5400000" scaled="0"/>
+        </a:gradFill>
+        <a:gradFill rotWithShape="1">
+          <a:gsLst>
+            <a:gs pos="0">
+              <a:schemeClr val="phClr">
+                <a:satMod val="103000"/>
+                <a:lumMod val="102000"/>
+                <a:tint val="94000"/>
+              </a:schemeClr>
+            </a:gs>
+            <a:gs pos="50000">
+              <a:schemeClr val="phClr">
+                <a:satMod val="110000"/>
+                <a:lumMod val="100000"/>
+                <a:shade val="100000"/>
+              </a:schemeClr>
+            </a:gs>
+            <a:gs pos="100000">
+              <a:schemeClr val="phClr">
+                <a:lumMod val="99000"/>
+                <a:satMod val="120000"/>
+                <a:shade val="78000"/>
+              </a:schemeClr>
+            </a:gs>
+          </a:gsLst>
+          <a:lin ang="5400000" scaled="0"/>
+        </a:gradFill>
+      </a:fillStyleLst>
+      <a:lnStyleLst>
+        <a:ln w="6350" cap="flat" cmpd="sng" algn="ctr">
+          <a:solidFill>
+            <a:schemeClr val="phClr"/>
+          </a:solidFill>
+          <a:prstDash val="solid"/>
+          <a:miter lim="800000"/>
+        </a:ln>
+        <a:ln w="12700" cap="flat" cmpd="sng" algn="ctr">
+          <a:solidFill>
+            <a:schemeClr val="phClr"/>
+          </a:solidFill>
+          <a:prstDash val="solid"/>
+          <a:miter lim="800000"/>
+        </a:ln>
+        <a:ln w="19050" cap="flat" cmpd="sng" algn="ctr">
+          <a:solidFill>
+            <a:schemeClr val="phClr"/>
+          </a:solidFill>
+          <a:prstDash val="solid"/>
+          <a:miter lim="800000"/>
+        </a:ln>
+      </a:lnStyleLst>
+      <a:effectStyleLst>
+        <a:effectStyle>
+          <a:effectLst/>
+        </a:effectStyle>
+        <a:effectStyle>
+          <a:effectLst/>
+        </a:effectStyle>
+        <a:effectStyle>
+          <a:effectLst>
+            <a:outerShdw blurRad="57150" dist="19050" dir="5400000" algn="ctr" rotWithShape="0">
+              <a:srgbClr val="000000">
+                <a:alpha val="63000"/>
+              </a:srgbClr>
+            </a:outerShdw>
+          </a:effectLst>
+        </a:effectStyle>
+      </a:effectStyleLst>
+      <a:bgFillStyleLst>
+        <a:solidFill>
+          <a:schemeClr val="phClr"/>
+        </a:solidFill>
+        <a:solidFill>
+          <a:schemeClr val="phClr">
+            <a:tint val="95000"/>
+            <a:satMod val="170000"/>
+          </a:schemeClr>
+        </a:solidFill>
+        <a:gradFill rotWithShape="1">
+          <a:gsLst>
+            <a:gs pos="0">
+              <a:schemeClr val="phClr">
+                <a:tint val="93000"/>
+                <a:satMod val="150000"/>
+                <a:shade val="98000"/>
+                <a:lumMod val="102000"/>
+              </a:schemeClr>
+            </a:gs>
+            <a:gs pos="50000">
+              <a:schemeClr val="phClr">
+                <a:tint val="98000"/>
+                <a:satMod val="130000"/>
+                <a:shade val="90000"/>
+                <a:lumMod val="103000"/>
+              </a:schemeClr>
+            </a:gs>
+            <a:gs pos="100000">
+              <a:schemeClr val="phClr">
+                <a:shade val="63000"/>
+                <a:satMod val="120000"/>
+              </a:schemeClr>
+            </a:gs>
+          </a:gsLst>
+          <a:lin ang="5400000" scaled="0"/>
+        </a:gradFill>
+      </a:bgFillStyleLst>
+    </a:fmtScheme>
+  </a:themeElements>
+  <a:objectDefaults/>
+  <a:extraClrSchemeLst/>
+  <a:extLst>
+    <a:ext uri="{05A4C25C-085E-4340-85A3-A5531E510DB2}">
+      <thm15:themeFamily xmlns:thm15="http://schemas.microsoft.com/office/thememl/2012/main" name="Office Theme" id="{62F939B6-93AF-4DB8-9C6B-D6C7DFDC589F}" vid="{4A3C46E8-61CC-4603-A589-7422A47A8E4A}"/>
+    </a:ext>
+  </a:extLst>
+</a:theme>
 </file>